--- a/TLS_Fingerprinting_Presentation.pptx
+++ b/TLS_Fingerprinting_Presentation.pptx
@@ -17,6 +17,8 @@
     <p:sldId id="265" r:id="rId16"/>
     <p:sldId id="266" r:id="rId17"/>
     <p:sldId id="267" r:id="rId18"/>
+    <p:sldId id="268" r:id="rId19"/>
+    <p:sldId id="269" r:id="rId20"/>
   </p:sldIdLst>
   <p:sldSz cx="12191695" cy="6858000" type="screen4x3"/>
   <p:notesSz cx="6858000" cy="9144000"/>
@@ -3170,9 +3172,9 @@
                 <a:solidFill>
                   <a:srgbClr val="69728A"/>
                 </a:solidFill>
-                <a:latin typeface="IBM Plex Mono"/>
-              </a:rPr>
-              <a:t>01 / 12</a:t>
+                <a:latin typeface="Consolas"/>
+              </a:rPr>
+              <a:t>01 / 14</a:t>
             </a:r>
           </a:p>
         </p:txBody>
@@ -3185,8 +3187,8 @@
         </p:nvSpPr>
         <p:spPr>
           <a:xfrm>
-            <a:off x="685800" y="1920240"/>
-            <a:ext cx="9144000" cy="365760"/>
+            <a:off x="685800" y="2011680"/>
+            <a:ext cx="10058400" cy="365760"/>
           </a:xfrm>
           <a:prstGeom prst="rect">
             <a:avLst/>
@@ -3205,11 +3207,11 @@
               </a:lnSpc>
             </a:pPr>
             <a:r>
-              <a:rPr sz="1300" b="0">
+              <a:rPr sz="1300" b="1">
                 <a:solidFill>
                   <a:srgbClr val="E8A33D"/>
                 </a:solidFill>
-                <a:latin typeface="IBM Plex Mono"/>
+                <a:latin typeface="Consolas"/>
               </a:rPr>
               <a:t>COMPUTER NETWORKS — COURSE PROJECT</a:t>
             </a:r>
@@ -3224,8 +3226,8 @@
         </p:nvSpPr>
         <p:spPr>
           <a:xfrm>
-            <a:off x="685800" y="2377440"/>
-            <a:ext cx="10515600" cy="1463040"/>
+            <a:off x="685800" y="2468880"/>
+            <a:ext cx="10789920" cy="1554480"/>
           </a:xfrm>
           <a:prstGeom prst="rect">
             <a:avLst/>
@@ -3248,7 +3250,7 @@
                 <a:solidFill>
                   <a:srgbClr val="EDEFF4"/>
                 </a:solidFill>
-                <a:latin typeface="Archivo"/>
+                <a:latin typeface="Calibri"/>
               </a:rPr>
               <a:t>TLS Fingerprinting</a:t>
             </a:r>
@@ -3263,8 +3265,8 @@
         </p:nvSpPr>
         <p:spPr>
           <a:xfrm>
-            <a:off x="685800" y="3383280"/>
-            <a:ext cx="8229600" cy="1828800"/>
+            <a:off x="685800" y="3429000"/>
+            <a:ext cx="8686800" cy="1828800"/>
           </a:xfrm>
           <a:prstGeom prst="rect">
             <a:avLst/>
@@ -3287,9 +3289,9 @@
                 <a:solidFill>
                   <a:srgbClr val="9AA3B5"/>
                 </a:solidFill>
-                <a:latin typeface="IBM Plex Sans"/>
-              </a:rPr>
-              <a:t>Identifying who's really on the other end of an HTTPS connection — from the one moment before encryption locks in.</a:t>
+                <a:latin typeface="Calibri"/>
+              </a:rPr>
+              <a:t>Identifying who's really on the other end of an HTTPS connection — without decrypting anything.</a:t>
             </a:r>
           </a:p>
         </p:txBody>
@@ -3302,8 +3304,8 @@
         </p:nvSpPr>
         <p:spPr>
           <a:xfrm>
-            <a:off x="685800" y="4297680"/>
-            <a:ext cx="2377440" cy="640080"/>
+            <a:off x="685800" y="4343400"/>
+            <a:ext cx="2514600" cy="640080"/>
           </a:xfrm>
           <a:prstGeom prst="rect">
             <a:avLst/>
@@ -3326,7 +3328,7 @@
                 <a:solidFill>
                   <a:srgbClr val="E8A33D"/>
                 </a:solidFill>
-                <a:latin typeface="Archivo"/>
+                <a:latin typeface="Calibri"/>
               </a:rPr>
               <a:t>5</a:t>
             </a:r>
@@ -3341,8 +3343,8 @@
         </p:nvSpPr>
         <p:spPr>
           <a:xfrm>
-            <a:off x="685800" y="4892040"/>
-            <a:ext cx="2377440" cy="457200"/>
+            <a:off x="685800" y="4937760"/>
+            <a:ext cx="2514600" cy="457200"/>
           </a:xfrm>
           <a:prstGeom prst="rect">
             <a:avLst/>
@@ -3365,7 +3367,7 @@
                 <a:solidFill>
                   <a:srgbClr val="9AA3B5"/>
                 </a:solidFill>
-                <a:latin typeface="IBM Plex Sans"/>
+                <a:latin typeface="Calibri"/>
               </a:rPr>
               <a:t>real clients captured</a:t>
             </a:r>
@@ -3380,8 +3382,8 @@
         </p:nvSpPr>
         <p:spPr>
           <a:xfrm>
-            <a:off x="3063240" y="4297680"/>
-            <a:ext cx="2377440" cy="640080"/>
+            <a:off x="3200400" y="4343400"/>
+            <a:ext cx="2514600" cy="640080"/>
           </a:xfrm>
           <a:prstGeom prst="rect">
             <a:avLst/>
@@ -3404,7 +3406,7 @@
                 <a:solidFill>
                   <a:srgbClr val="E8A33D"/>
                 </a:solidFill>
-                <a:latin typeface="Archivo"/>
+                <a:latin typeface="Calibri"/>
               </a:rPr>
               <a:t>56</a:t>
             </a:r>
@@ -3419,8 +3421,8 @@
         </p:nvSpPr>
         <p:spPr>
           <a:xfrm>
-            <a:off x="3063240" y="4892040"/>
-            <a:ext cx="2377440" cy="457200"/>
+            <a:off x="3200400" y="4937760"/>
+            <a:ext cx="2514600" cy="457200"/>
           </a:xfrm>
           <a:prstGeom prst="rect">
             <a:avLst/>
@@ -3443,7 +3445,7 @@
                 <a:solidFill>
                   <a:srgbClr val="9AA3B5"/>
                 </a:solidFill>
-                <a:latin typeface="IBM Plex Sans"/>
+                <a:latin typeface="Calibri"/>
               </a:rPr>
               <a:t>tests passing</a:t>
             </a:r>
@@ -3458,8 +3460,8 @@
         </p:nvSpPr>
         <p:spPr>
           <a:xfrm>
-            <a:off x="5440680" y="4297680"/>
-            <a:ext cx="2377440" cy="640080"/>
+            <a:off x="5715000" y="4343400"/>
+            <a:ext cx="2514600" cy="640080"/>
           </a:xfrm>
           <a:prstGeom prst="rect">
             <a:avLst/>
@@ -3482,7 +3484,7 @@
                 <a:solidFill>
                   <a:srgbClr val="E8A33D"/>
                 </a:solidFill>
-                <a:latin typeface="Archivo"/>
+                <a:latin typeface="Calibri"/>
               </a:rPr>
               <a:t>0</a:t>
             </a:r>
@@ -3497,8 +3499,8 @@
         </p:nvSpPr>
         <p:spPr>
           <a:xfrm>
-            <a:off x="5440680" y="4892040"/>
-            <a:ext cx="2377440" cy="457200"/>
+            <a:off x="5715000" y="4937760"/>
+            <a:ext cx="2514600" cy="457200"/>
           </a:xfrm>
           <a:prstGeom prst="rect">
             <a:avLst/>
@@ -3521,7 +3523,7 @@
                 <a:solidFill>
                   <a:srgbClr val="9AA3B5"/>
                 </a:solidFill>
-                <a:latin typeface="IBM Plex Sans"/>
+                <a:latin typeface="Calibri"/>
               </a:rPr>
               <a:t>fabricated results</a:t>
             </a:r>
@@ -3617,9 +3619,9 @@
                 <a:solidFill>
                   <a:srgbClr val="69728A"/>
                 </a:solidFill>
-                <a:latin typeface="IBM Plex Mono"/>
-              </a:rPr>
-              <a:t>10 / 12</a:t>
+                <a:latin typeface="Consolas"/>
+              </a:rPr>
+              <a:t>10 / 14</a:t>
             </a:r>
           </a:p>
         </p:txBody>
@@ -3633,7 +3635,7 @@
         <p:spPr>
           <a:xfrm>
             <a:off x="685800" y="594360"/>
-            <a:ext cx="9144000" cy="365760"/>
+            <a:ext cx="10058400" cy="365760"/>
           </a:xfrm>
           <a:prstGeom prst="rect">
             <a:avLst/>
@@ -3652,13 +3654,13 @@
               </a:lnSpc>
             </a:pPr>
             <a:r>
-              <a:rPr sz="1300" b="0">
+              <a:rPr sz="1300" b="1">
                 <a:solidFill>
                   <a:srgbClr val="E8A33D"/>
                 </a:solidFill>
-                <a:latin typeface="IBM Plex Mono"/>
-              </a:rPr>
-              <a:t>UNDER LOAD</a:t>
+                <a:latin typeface="Consolas"/>
+              </a:rPr>
+              <a:t>FROM FINGERPRINT TO DEFENSE</a:t>
             </a:r>
           </a:p>
         </p:txBody>
@@ -3672,7 +3674,7 @@
         <p:spPr>
           <a:xfrm>
             <a:off x="685800" y="1051560"/>
-            <a:ext cx="10515600" cy="1463040"/>
+            <a:ext cx="10789920" cy="1554480"/>
           </a:xfrm>
           <a:prstGeom prst="rect">
             <a:avLst/>
@@ -3695,187 +3697,48 @@
                 <a:solidFill>
                   <a:srgbClr val="EDEFF4"/>
                 </a:solidFill>
-                <a:latin typeface="Archivo"/>
-              </a:rPr>
-              <a:t>5 rapid requests. 5 for 5, caught.</a:t>
-            </a:r>
-          </a:p>
-        </p:txBody>
-      </p:sp>
-      <p:sp>
-        <p:nvSpPr>
-          <p:cNvPr id="6" name="Rounded Rectangle 5"/>
-          <p:cNvSpPr/>
-          <p:nvPr/>
-        </p:nvSpPr>
-        <p:spPr>
-          <a:xfrm>
-            <a:off x="685800" y="2286000"/>
-            <a:ext cx="10515600" cy="2926080"/>
-          </a:xfrm>
-          <a:prstGeom prst="roundRect">
-            <a:avLst>
-              <a:gd name="adj" fmla="val 6000"/>
-            </a:avLst>
-          </a:prstGeom>
-          <a:solidFill>
-            <a:srgbClr val="121826"/>
-          </a:solidFill>
-          <a:ln w="12700">
-            <a:solidFill>
-              <a:srgbClr val="232B3D"/>
-            </a:solidFill>
-          </a:ln>
-          <a:effectLst/>
-        </p:spPr>
-        <p:style>
-          <a:lnRef idx="1">
-            <a:schemeClr val="accent1"/>
-          </a:lnRef>
-          <a:fillRef idx="3">
-            <a:schemeClr val="accent1"/>
-          </a:fillRef>
-          <a:effectRef idx="2">
-            <a:schemeClr val="accent1"/>
-          </a:effectRef>
-          <a:fontRef idx="minor">
-            <a:schemeClr val="lt1"/>
-          </a:fontRef>
-        </p:style>
-        <p:txBody>
-          <a:bodyPr rtlCol="0" anchor="ctr" wrap="square" lIns="228600" rIns="228600" tIns="182880" bIns="182880"/>
-          <a:lstStyle/>
-          <a:p>
-            <a:pPr algn="ctr">
-              <a:lnSpc>
-                <a:spcPct val="125000"/>
-              </a:lnSpc>
-              <a:spcAft>
-                <a:spcPts val="400"/>
-              </a:spcAft>
-            </a:pPr>
-            <a:r>
-              <a:rPr sz="1300" b="0">
-                <a:solidFill>
-                  <a:srgbClr val="69728A"/>
-                </a:solidFill>
-                <a:latin typeface="IBM Plex Mono"/>
-              </a:rPr>
-              <a:t>$ python experiments/bombard_demo.py 5</a:t>
-            </a:r>
-          </a:p>
+                <a:latin typeface="Calibri"/>
+              </a:rPr>
+              <a:t>How a bot pretends to be Chrome</a:t>
+            </a:r>
+          </a:p>
+        </p:txBody>
+      </p:sp>
+      <p:sp>
+        <p:nvSpPr>
+          <p:cNvPr id="6" name="TextBox 5"/>
+          <p:cNvSpPr txBox="1"/>
+          <p:nvPr/>
+        </p:nvSpPr>
+        <p:spPr>
+          <a:xfrm>
+            <a:off x="685800" y="2194560"/>
+            <a:ext cx="9875520" cy="713232"/>
+          </a:xfrm>
+          <a:prstGeom prst="rect">
+            <a:avLst/>
+          </a:prstGeom>
+          <a:noFill/>
+        </p:spPr>
+        <p:txBody>
+          <a:bodyPr wrap="square">
+            <a:spAutoFit/>
+          </a:bodyPr>
+          <a:lstStyle/>
           <a:p>
             <a:pPr>
               <a:lnSpc>
-                <a:spcPct val="125000"/>
-              </a:lnSpc>
-              <a:spcAft>
-                <a:spcPts val="400"/>
-              </a:spcAft>
-            </a:pPr>
-            <a:r>
-              <a:rPr sz="1300" b="0">
-                <a:solidFill>
-                  <a:srgbClr val="F16A54"/>
-                </a:solidFill>
-                <a:latin typeface="IBM Plex Mono"/>
-              </a:rPr>
-              <a:t>request 1/5: JA3=f21f8e6c...  -&gt; FLAGGED</a:t>
-            </a:r>
-          </a:p>
-          <a:p>
-            <a:pPr>
-              <a:lnSpc>
-                <a:spcPct val="125000"/>
-              </a:lnSpc>
-              <a:spcAft>
-                <a:spcPts val="400"/>
-              </a:spcAft>
-            </a:pPr>
-            <a:r>
-              <a:rPr sz="1300" b="0">
-                <a:solidFill>
-                  <a:srgbClr val="F16A54"/>
-                </a:solidFill>
-                <a:latin typeface="IBM Plex Mono"/>
-              </a:rPr>
-              <a:t>request 2/5: JA3=f21f8e6c...  -&gt; FLAGGED</a:t>
-            </a:r>
-          </a:p>
-          <a:p>
-            <a:pPr>
-              <a:lnSpc>
-                <a:spcPct val="125000"/>
-              </a:lnSpc>
-              <a:spcAft>
-                <a:spcPts val="400"/>
-              </a:spcAft>
-            </a:pPr>
-            <a:r>
-              <a:rPr sz="1300" b="0">
-                <a:solidFill>
-                  <a:srgbClr val="F16A54"/>
-                </a:solidFill>
-                <a:latin typeface="IBM Plex Mono"/>
-              </a:rPr>
-              <a:t>request 3/5: JA3=f21f8e6c...  -&gt; FLAGGED</a:t>
-            </a:r>
-          </a:p>
-          <a:p>
-            <a:pPr>
-              <a:lnSpc>
-                <a:spcPct val="125000"/>
-              </a:lnSpc>
-              <a:spcAft>
-                <a:spcPts val="400"/>
-              </a:spcAft>
-            </a:pPr>
-            <a:r>
-              <a:rPr sz="1300" b="0">
-                <a:solidFill>
-                  <a:srgbClr val="F16A54"/>
-                </a:solidFill>
-                <a:latin typeface="IBM Plex Mono"/>
-              </a:rPr>
-              <a:t>request 4/5: JA3=f21f8e6c...  -&gt; FLAGGED</a:t>
-            </a:r>
-          </a:p>
-          <a:p>
-            <a:pPr>
-              <a:lnSpc>
-                <a:spcPct val="125000"/>
-              </a:lnSpc>
-              <a:spcAft>
-                <a:spcPts val="400"/>
-              </a:spcAft>
-            </a:pPr>
-            <a:r>
-              <a:rPr sz="1300" b="0">
-                <a:solidFill>
-                  <a:srgbClr val="F16A54"/>
-                </a:solidFill>
-                <a:latin typeface="IBM Plex Mono"/>
-              </a:rPr>
-              <a:t>request 5/5: JA3=f21f8e6c...  -&gt; FLAGGED</a:t>
-            </a:r>
-          </a:p>
-          <a:p>
-            <a:pPr>
-              <a:lnSpc>
-                <a:spcPct val="125000"/>
-              </a:lnSpc>
-              <a:spcAft>
-                <a:spcPts val="400"/>
-              </a:spcAft>
-            </a:pPr>
-            <a:r>
-              <a:rPr sz="1400" b="1">
-                <a:solidFill>
-                  <a:srgbClr val="49C79A"/>
-                </a:solidFill>
-                <a:latin typeface="IBM Plex Mono"/>
-              </a:rPr>
-              <a:t>Result: 5/5 requests correctly flagged.</a:t>
+                <a:spcPct val="120000"/>
+              </a:lnSpc>
+            </a:pPr>
+            <a:r>
+              <a:rPr sz="1800">
+                <a:solidFill>
+                  <a:srgbClr val="9AA3B5"/>
+                </a:solidFill>
+                <a:latin typeface="Calibri"/>
+              </a:rPr>
+              <a:t>•  The cheap, common trick: set the HTTP "User-Agent" header to Chrome's exact string — one line of code, free to fake.</a:t>
             </a:r>
           </a:p>
         </p:txBody>
@@ -3888,8 +3751,8 @@
         </p:nvSpPr>
         <p:spPr>
           <a:xfrm>
-            <a:off x="685800" y="5486400"/>
-            <a:ext cx="9601200" cy="1828800"/>
+            <a:off x="685800" y="2907792"/>
+            <a:ext cx="9875520" cy="713232"/>
           </a:xfrm>
           <a:prstGeom prst="rect">
             <a:avLst/>
@@ -3902,19 +3765,97 @@
           </a:bodyPr>
           <a:lstStyle/>
           <a:p>
-            <a:pPr algn="l">
-              <a:lnSpc>
-                <a:spcPct val="135000"/>
-              </a:lnSpc>
-            </a:pPr>
-            <a:r>
-              <a:rPr sz="1400" b="0">
+            <a:pPr>
+              <a:lnSpc>
+                <a:spcPct val="120000"/>
+              </a:lnSpc>
+            </a:pPr>
+            <a:r>
+              <a:rPr sz="1800">
                 <a:solidFill>
                   <a:srgbClr val="9AA3B5"/>
                 </a:solidFill>
-                <a:latin typeface="IBM Plex Sans"/>
-              </a:rPr>
-              <a:t>Each is an independent, real, live connection. The fingerprint is evidence about one connection's TLS stack — it doesn't dilute as request volume grows.</a:t>
+                <a:latin typeface="Calibri"/>
+              </a:rPr>
+              <a:t>•  But the TLS ClientHello was already sent, moments earlier, by whichever real library the bot's script actually uses.</a:t>
+            </a:r>
+          </a:p>
+        </p:txBody>
+      </p:sp>
+      <p:sp>
+        <p:nvSpPr>
+          <p:cNvPr id="8" name="TextBox 7"/>
+          <p:cNvSpPr txBox="1"/>
+          <p:nvPr/>
+        </p:nvSpPr>
+        <p:spPr>
+          <a:xfrm>
+            <a:off x="685800" y="3621024"/>
+            <a:ext cx="9875520" cy="713232"/>
+          </a:xfrm>
+          <a:prstGeom prst="rect">
+            <a:avLst/>
+          </a:prstGeom>
+          <a:noFill/>
+        </p:spPr>
+        <p:txBody>
+          <a:bodyPr wrap="square">
+            <a:spAutoFit/>
+          </a:bodyPr>
+          <a:lstStyle/>
+          <a:p>
+            <a:pPr>
+              <a:lnSpc>
+                <a:spcPct val="120000"/>
+              </a:lnSpc>
+            </a:pPr>
+            <a:r>
+              <a:rPr sz="1800">
+                <a:solidFill>
+                  <a:srgbClr val="9AA3B5"/>
+                </a:solidFill>
+                <a:latin typeface="Calibri"/>
+              </a:rPr>
+              <a:t>•  That handshake is a structural byproduct of the real library — not something typed by hand, much harder to fake convincingly.</a:t>
+            </a:r>
+          </a:p>
+        </p:txBody>
+      </p:sp>
+      <p:sp>
+        <p:nvSpPr>
+          <p:cNvPr id="9" name="TextBox 8"/>
+          <p:cNvSpPr txBox="1"/>
+          <p:nvPr/>
+        </p:nvSpPr>
+        <p:spPr>
+          <a:xfrm>
+            <a:off x="685800" y="4334256"/>
+            <a:ext cx="9875520" cy="713232"/>
+          </a:xfrm>
+          <a:prstGeom prst="rect">
+            <a:avLst/>
+          </a:prstGeom>
+          <a:noFill/>
+        </p:spPr>
+        <p:txBody>
+          <a:bodyPr wrap="square">
+            <a:spAutoFit/>
+          </a:bodyPr>
+          <a:lstStyle/>
+          <a:p>
+            <a:pPr>
+              <a:lnSpc>
+                <a:spcPct val="120000"/>
+              </a:lnSpc>
+            </a:pPr>
+            <a:r>
+              <a:rPr sz="1800">
+                <a:solidFill>
+                  <a:srgbClr val="9AA3B5"/>
+                </a:solidFill>
+                <a:latin typeface="Calibri"/>
+              </a:rPr>
+              <a:t>•  The mismatch between the claim and the real handshake is the tell.</a:t>
             </a:r>
           </a:p>
         </p:txBody>
@@ -4008,9 +3949,9 @@
                 <a:solidFill>
                   <a:srgbClr val="69728A"/>
                 </a:solidFill>
-                <a:latin typeface="IBM Plex Mono"/>
-              </a:rPr>
-              <a:t>11 / 12</a:t>
+                <a:latin typeface="Consolas"/>
+              </a:rPr>
+              <a:t>11 / 14</a:t>
             </a:r>
           </a:p>
         </p:txBody>
@@ -4024,7 +3965,7 @@
         <p:spPr>
           <a:xfrm>
             <a:off x="685800" y="594360"/>
-            <a:ext cx="9144000" cy="365760"/>
+            <a:ext cx="10058400" cy="365760"/>
           </a:xfrm>
           <a:prstGeom prst="rect">
             <a:avLst/>
@@ -4043,13 +3984,13 @@
               </a:lnSpc>
             </a:pPr>
             <a:r>
-              <a:rPr sz="1300" b="0">
+              <a:rPr sz="1300" b="1">
                 <a:solidFill>
                   <a:srgbClr val="E8A33D"/>
                 </a:solidFill>
-                <a:latin typeface="IBM Plex Mono"/>
-              </a:rPr>
-              <a:t>WHAT THIS DOESN'T PROVE</a:t>
+                <a:latin typeface="Consolas"/>
+              </a:rPr>
+              <a:t>CATCHING THE LIE</a:t>
             </a:r>
           </a:p>
         </p:txBody>
@@ -4063,7 +4004,7 @@
         <p:spPr>
           <a:xfrm>
             <a:off x="685800" y="1051560"/>
-            <a:ext cx="10515600" cy="1463040"/>
+            <a:ext cx="10789920" cy="1554480"/>
           </a:xfrm>
           <a:prstGeom prst="rect">
             <a:avLst/>
@@ -4082,27 +4023,167 @@
               </a:lnSpc>
             </a:pPr>
             <a:r>
-              <a:rPr sz="3200" b="1">
+              <a:rPr sz="3400" b="1">
                 <a:solidFill>
                   <a:srgbClr val="EDEFF4"/>
                 </a:solidFill>
-                <a:latin typeface="Archivo"/>
-              </a:rPr>
-              <a:t>A fingerprint is a hint, not a verdict.</a:t>
-            </a:r>
-          </a:p>
-        </p:txBody>
-      </p:sp>
-      <p:sp>
-        <p:nvSpPr>
-          <p:cNvPr id="6" name="TextBox 5"/>
+                <a:latin typeface="Calibri"/>
+              </a:rPr>
+              <a:t>Spoofing detection, live</a:t>
+            </a:r>
+          </a:p>
+        </p:txBody>
+      </p:sp>
+      <p:sp>
+        <p:nvSpPr>
+          <p:cNvPr id="6" name="Rounded Rectangle 5"/>
+          <p:cNvSpPr/>
+          <p:nvPr/>
+        </p:nvSpPr>
+        <p:spPr>
+          <a:xfrm>
+            <a:off x="685800" y="2286000"/>
+            <a:ext cx="10515600" cy="2377440"/>
+          </a:xfrm>
+          <a:prstGeom prst="roundRect">
+            <a:avLst>
+              <a:gd name="adj" fmla="val 5000"/>
+            </a:avLst>
+          </a:prstGeom>
+          <a:solidFill>
+            <a:srgbClr val="121826"/>
+          </a:solidFill>
+          <a:ln w="12700">
+            <a:solidFill>
+              <a:srgbClr val="232B3D"/>
+            </a:solidFill>
+          </a:ln>
+          <a:effectLst/>
+        </p:spPr>
+        <p:style>
+          <a:lnRef idx="1">
+            <a:schemeClr val="accent1"/>
+          </a:lnRef>
+          <a:fillRef idx="3">
+            <a:schemeClr val="accent1"/>
+          </a:fillRef>
+          <a:effectRef idx="2">
+            <a:schemeClr val="accent1"/>
+          </a:effectRef>
+          <a:fontRef idx="minor">
+            <a:schemeClr val="lt1"/>
+          </a:fontRef>
+        </p:style>
+        <p:txBody>
+          <a:bodyPr rtlCol="0" anchor="ctr" wrap="square" lIns="256032" rIns="256032" tIns="201168" bIns="201168"/>
+          <a:lstStyle/>
+          <a:p>
+            <a:pPr algn="ctr">
+              <a:lnSpc>
+                <a:spcPct val="125000"/>
+              </a:lnSpc>
+              <a:spcAft>
+                <a:spcPts val="500"/>
+              </a:spcAft>
+            </a:pPr>
+            <a:r>
+              <a:rPr sz="1300" b="0">
+                <a:solidFill>
+                  <a:srgbClr val="69728A"/>
+                </a:solidFill>
+                <a:latin typeface="Consolas"/>
+              </a:rPr>
+              <a:t>$ tls-fingerprint check-spoofing pcaps/bot_client.pcap --claims Chrome</a:t>
+            </a:r>
+          </a:p>
+          <a:p>
+            <a:pPr>
+              <a:lnSpc>
+                <a:spcPct val="125000"/>
+              </a:lnSpc>
+              <a:spcAft>
+                <a:spcPts val="500"/>
+              </a:spcAft>
+            </a:pPr>
+            <a:r>
+              <a:rPr sz="1300" b="0">
+                <a:solidFill>
+                  <a:srgbClr val="9AA3B5"/>
+                </a:solidFill>
+                <a:latin typeface="Consolas"/>
+              </a:rPr>
+              <a:t>Claims to be:  Chrome</a:t>
+            </a:r>
+          </a:p>
+          <a:p>
+            <a:pPr>
+              <a:lnSpc>
+                <a:spcPct val="125000"/>
+              </a:lnSpc>
+              <a:spcAft>
+                <a:spcPts val="500"/>
+              </a:spcAft>
+            </a:pPr>
+            <a:r>
+              <a:rPr sz="1300" b="0">
+                <a:solidFill>
+                  <a:srgbClr val="9AA3B5"/>
+                </a:solidFill>
+                <a:latin typeface="Consolas"/>
+              </a:rPr>
+              <a:t>Measured JA3:  f21f8e6cf70d5980ecfe9fa2e0ef401c</a:t>
+            </a:r>
+          </a:p>
+          <a:p>
+            <a:pPr>
+              <a:lnSpc>
+                <a:spcPct val="125000"/>
+              </a:lnSpc>
+              <a:spcAft>
+                <a:spcPts val="500"/>
+              </a:spcAft>
+            </a:pPr>
+            <a:r>
+              <a:rPr sz="1500" b="1">
+                <a:solidFill>
+                  <a:srgbClr val="F16A54"/>
+                </a:solidFill>
+                <a:latin typeface="Consolas"/>
+              </a:rPr>
+              <a:t>VERDICT: *** MISMATCH — SUSPICIOUS ***</a:t>
+            </a:r>
+          </a:p>
+          <a:p>
+            <a:pPr>
+              <a:lnSpc>
+                <a:spcPct val="125000"/>
+              </a:lnSpc>
+              <a:spcAft>
+                <a:spcPts val="500"/>
+              </a:spcAft>
+            </a:pPr>
+            <a:r>
+              <a:rPr sz="1300" b="0">
+                <a:solidFill>
+                  <a:srgbClr val="9AA3B5"/>
+                </a:solidFill>
+                <a:latin typeface="Consolas"/>
+              </a:rPr>
+              <a:t>matches: Python 3.14.6 stdlib ssl (ssl.create_default_context)</a:t>
+            </a:r>
+          </a:p>
+        </p:txBody>
+      </p:sp>
+      <p:sp>
+        <p:nvSpPr>
+          <p:cNvPr id="7" name="TextBox 6"/>
           <p:cNvSpPr txBox="1"/>
           <p:nvPr/>
         </p:nvSpPr>
         <p:spPr>
           <a:xfrm>
-            <a:off x="685800" y="2194560"/>
-            <a:ext cx="548640" cy="457200"/>
+            <a:off x="685800" y="5120640"/>
+            <a:ext cx="9875520" cy="1828800"/>
           </a:xfrm>
           <a:prstGeom prst="rect">
             <a:avLst/>
@@ -4117,46 +4198,7 @@
           <a:p>
             <a:pPr algn="l">
               <a:lnSpc>
-                <a:spcPct val="115000"/>
-              </a:lnSpc>
-            </a:pPr>
-            <a:r>
-              <a:rPr sz="1400" b="1">
-                <a:solidFill>
-                  <a:srgbClr val="E8A33D"/>
-                </a:solidFill>
-                <a:latin typeface="IBM Plex Mono"/>
-              </a:rPr>
-              <a:t>01</a:t>
-            </a:r>
-          </a:p>
-        </p:txBody>
-      </p:sp>
-      <p:sp>
-        <p:nvSpPr>
-          <p:cNvPr id="7" name="TextBox 6"/>
-          <p:cNvSpPr txBox="1"/>
-          <p:nvPr/>
-        </p:nvSpPr>
-        <p:spPr>
-          <a:xfrm>
-            <a:off x="1371600" y="2194560"/>
-            <a:ext cx="9601200" cy="685800"/>
-          </a:xfrm>
-          <a:prstGeom prst="rect">
-            <a:avLst/>
-          </a:prstGeom>
-          <a:noFill/>
-        </p:spPr>
-        <p:txBody>
-          <a:bodyPr wrap="square">
-            <a:spAutoFit/>
-          </a:bodyPr>
-          <a:lstStyle/>
-          <a:p>
-            <a:pPr algn="l">
-              <a:lnSpc>
-                <a:spcPct val="120000"/>
+                <a:spcPct val="135000"/>
               </a:lnSpc>
             </a:pPr>
             <a:r>
@@ -4164,321 +4206,9 @@
                 <a:solidFill>
                   <a:srgbClr val="9AA3B5"/>
                 </a:solidFill>
-                <a:latin typeface="IBM Plex Sans"/>
-              </a:rPr>
-              <a:t>Same hash != same software. Two unrelated programs on the same library/config fingerprint identically.</a:t>
-            </a:r>
-          </a:p>
-        </p:txBody>
-      </p:sp>
-      <p:sp>
-        <p:nvSpPr>
-          <p:cNvPr id="8" name="TextBox 7"/>
-          <p:cNvSpPr txBox="1"/>
-          <p:nvPr/>
-        </p:nvSpPr>
-        <p:spPr>
-          <a:xfrm>
-            <a:off x="685800" y="2971800"/>
-            <a:ext cx="548640" cy="457200"/>
-          </a:xfrm>
-          <a:prstGeom prst="rect">
-            <a:avLst/>
-          </a:prstGeom>
-          <a:noFill/>
-        </p:spPr>
-        <p:txBody>
-          <a:bodyPr wrap="square">
-            <a:spAutoFit/>
-          </a:bodyPr>
-          <a:lstStyle/>
-          <a:p>
-            <a:pPr algn="l">
-              <a:lnSpc>
-                <a:spcPct val="115000"/>
-              </a:lnSpc>
-            </a:pPr>
-            <a:r>
-              <a:rPr sz="1400" b="1">
-                <a:solidFill>
-                  <a:srgbClr val="E8A33D"/>
-                </a:solidFill>
-                <a:latin typeface="IBM Plex Mono"/>
-              </a:rPr>
-              <a:t>02</a:t>
-            </a:r>
-          </a:p>
-        </p:txBody>
-      </p:sp>
-      <p:sp>
-        <p:nvSpPr>
-          <p:cNvPr id="9" name="TextBox 8"/>
-          <p:cNvSpPr txBox="1"/>
-          <p:nvPr/>
-        </p:nvSpPr>
-        <p:spPr>
-          <a:xfrm>
-            <a:off x="1371600" y="2971800"/>
-            <a:ext cx="9601200" cy="685800"/>
-          </a:xfrm>
-          <a:prstGeom prst="rect">
-            <a:avLst/>
-          </a:prstGeom>
-          <a:noFill/>
-        </p:spPr>
-        <p:txBody>
-          <a:bodyPr wrap="square">
-            <a:spAutoFit/>
-          </a:bodyPr>
-          <a:lstStyle/>
-          <a:p>
-            <a:pPr algn="l">
-              <a:lnSpc>
-                <a:spcPct val="120000"/>
-              </a:lnSpc>
-            </a:pPr>
-            <a:r>
-              <a:rPr sz="1500" b="0">
-                <a:solidFill>
-                  <a:srgbClr val="9AA3B5"/>
-                </a:solidFill>
-                <a:latin typeface="IBM Plex Sans"/>
-              </a:rPr>
-              <a:t>JA3S depends on the client, too. Two of our own clients produced an identical JA3S against the same server.</a:t>
-            </a:r>
-          </a:p>
-        </p:txBody>
-      </p:sp>
-      <p:sp>
-        <p:nvSpPr>
-          <p:cNvPr id="10" name="TextBox 9"/>
-          <p:cNvSpPr txBox="1"/>
-          <p:nvPr/>
-        </p:nvSpPr>
-        <p:spPr>
-          <a:xfrm>
-            <a:off x="685800" y="3749040"/>
-            <a:ext cx="548640" cy="457200"/>
-          </a:xfrm>
-          <a:prstGeom prst="rect">
-            <a:avLst/>
-          </a:prstGeom>
-          <a:noFill/>
-        </p:spPr>
-        <p:txBody>
-          <a:bodyPr wrap="square">
-            <a:spAutoFit/>
-          </a:bodyPr>
-          <a:lstStyle/>
-          <a:p>
-            <a:pPr algn="l">
-              <a:lnSpc>
-                <a:spcPct val="115000"/>
-              </a:lnSpc>
-            </a:pPr>
-            <a:r>
-              <a:rPr sz="1400" b="1">
-                <a:solidFill>
-                  <a:srgbClr val="E8A33D"/>
-                </a:solidFill>
-                <a:latin typeface="IBM Plex Mono"/>
-              </a:rPr>
-              <a:t>03</a:t>
-            </a:r>
-          </a:p>
-        </p:txBody>
-      </p:sp>
-      <p:sp>
-        <p:nvSpPr>
-          <p:cNvPr id="11" name="TextBox 10"/>
-          <p:cNvSpPr txBox="1"/>
-          <p:nvPr/>
-        </p:nvSpPr>
-        <p:spPr>
-          <a:xfrm>
-            <a:off x="1371600" y="3749040"/>
-            <a:ext cx="9601200" cy="685800"/>
-          </a:xfrm>
-          <a:prstGeom prst="rect">
-            <a:avLst/>
-          </a:prstGeom>
-          <a:noFill/>
-        </p:spPr>
-        <p:txBody>
-          <a:bodyPr wrap="square">
-            <a:spAutoFit/>
-          </a:bodyPr>
-          <a:lstStyle/>
-          <a:p>
-            <a:pPr algn="l">
-              <a:lnSpc>
-                <a:spcPct val="120000"/>
-              </a:lnSpc>
-            </a:pPr>
-            <a:r>
-              <a:rPr sz="1500" b="0">
-                <a:solidFill>
-                  <a:srgbClr val="9AA3B5"/>
-                </a:solidFill>
-                <a:latin typeface="IBM Plex Sans"/>
-              </a:rPr>
-              <a:t>GREASE and reordering actively fight back. Chrome randomizes its own hello on purpose — we hit this live.</a:t>
-            </a:r>
-          </a:p>
-        </p:txBody>
-      </p:sp>
-      <p:sp>
-        <p:nvSpPr>
-          <p:cNvPr id="12" name="TextBox 11"/>
-          <p:cNvSpPr txBox="1"/>
-          <p:nvPr/>
-        </p:nvSpPr>
-        <p:spPr>
-          <a:xfrm>
-            <a:off x="685800" y="4526280"/>
-            <a:ext cx="548640" cy="457200"/>
-          </a:xfrm>
-          <a:prstGeom prst="rect">
-            <a:avLst/>
-          </a:prstGeom>
-          <a:noFill/>
-        </p:spPr>
-        <p:txBody>
-          <a:bodyPr wrap="square">
-            <a:spAutoFit/>
-          </a:bodyPr>
-          <a:lstStyle/>
-          <a:p>
-            <a:pPr algn="l">
-              <a:lnSpc>
-                <a:spcPct val="115000"/>
-              </a:lnSpc>
-            </a:pPr>
-            <a:r>
-              <a:rPr sz="1400" b="1">
-                <a:solidFill>
-                  <a:srgbClr val="E8A33D"/>
-                </a:solidFill>
-                <a:latin typeface="IBM Plex Mono"/>
-              </a:rPr>
-              <a:t>04</a:t>
-            </a:r>
-          </a:p>
-        </p:txBody>
-      </p:sp>
-      <p:sp>
-        <p:nvSpPr>
-          <p:cNvPr id="13" name="TextBox 12"/>
-          <p:cNvSpPr txBox="1"/>
-          <p:nvPr/>
-        </p:nvSpPr>
-        <p:spPr>
-          <a:xfrm>
-            <a:off x="1371600" y="4526280"/>
-            <a:ext cx="9601200" cy="685800"/>
-          </a:xfrm>
-          <a:prstGeom prst="rect">
-            <a:avLst/>
-          </a:prstGeom>
-          <a:noFill/>
-        </p:spPr>
-        <p:txBody>
-          <a:bodyPr wrap="square">
-            <a:spAutoFit/>
-          </a:bodyPr>
-          <a:lstStyle/>
-          <a:p>
-            <a:pPr algn="l">
-              <a:lnSpc>
-                <a:spcPct val="120000"/>
-              </a:lnSpc>
-            </a:pPr>
-            <a:r>
-              <a:rPr sz="1500" b="0">
-                <a:solidFill>
-                  <a:srgbClr val="9AA3B5"/>
-                </a:solidFill>
-                <a:latin typeface="IBM Plex Sans"/>
-              </a:rPr>
-              <a:t>Evasion is possible. Since the fingerprint is entirely client-controlled bytes, anyone can copy a browser's signature.</a:t>
-            </a:r>
-          </a:p>
-        </p:txBody>
-      </p:sp>
-      <p:sp>
-        <p:nvSpPr>
-          <p:cNvPr id="14" name="TextBox 13"/>
-          <p:cNvSpPr txBox="1"/>
-          <p:nvPr/>
-        </p:nvSpPr>
-        <p:spPr>
-          <a:xfrm>
-            <a:off x="685800" y="5303520"/>
-            <a:ext cx="548640" cy="457200"/>
-          </a:xfrm>
-          <a:prstGeom prst="rect">
-            <a:avLst/>
-          </a:prstGeom>
-          <a:noFill/>
-        </p:spPr>
-        <p:txBody>
-          <a:bodyPr wrap="square">
-            <a:spAutoFit/>
-          </a:bodyPr>
-          <a:lstStyle/>
-          <a:p>
-            <a:pPr algn="l">
-              <a:lnSpc>
-                <a:spcPct val="115000"/>
-              </a:lnSpc>
-            </a:pPr>
-            <a:r>
-              <a:rPr sz="1400" b="1">
-                <a:solidFill>
-                  <a:srgbClr val="E8A33D"/>
-                </a:solidFill>
-                <a:latin typeface="IBM Plex Mono"/>
-              </a:rPr>
-              <a:t>05</a:t>
-            </a:r>
-          </a:p>
-        </p:txBody>
-      </p:sp>
-      <p:sp>
-        <p:nvSpPr>
-          <p:cNvPr id="15" name="TextBox 14"/>
-          <p:cNvSpPr txBox="1"/>
-          <p:nvPr/>
-        </p:nvSpPr>
-        <p:spPr>
-          <a:xfrm>
-            <a:off x="1371600" y="5303520"/>
-            <a:ext cx="9601200" cy="685800"/>
-          </a:xfrm>
-          <a:prstGeom prst="rect">
-            <a:avLst/>
-          </a:prstGeom>
-          <a:noFill/>
-        </p:spPr>
-        <p:txBody>
-          <a:bodyPr wrap="square">
-            <a:spAutoFit/>
-          </a:bodyPr>
-          <a:lstStyle/>
-          <a:p>
-            <a:pPr algn="l">
-              <a:lnSpc>
-                <a:spcPct val="120000"/>
-              </a:lnSpc>
-            </a:pPr>
-            <a:r>
-              <a:rPr sz="1500" b="0">
-                <a:solidFill>
-                  <a:srgbClr val="9AA3B5"/>
-                </a:solidFill>
-                <a:latin typeface="IBM Plex Sans"/>
-              </a:rPr>
-              <a:t>Encrypted ClientHello looms. TLS 1.3's ECH threatens to encrypt away the exact fields this technique reads.</a:t>
+                <a:latin typeface="Calibri"/>
+              </a:rPr>
+              <a:t>The claimed identity was checked against the database's real Chrome hashes from slide 7 — it didn't match, so it's flagged, and the tool reports what it actually is instead.</a:t>
             </a:r>
           </a:p>
         </p:txBody>
@@ -4572,9 +4302,9 @@
                 <a:solidFill>
                   <a:srgbClr val="69728A"/>
                 </a:solidFill>
-                <a:latin typeface="IBM Plex Mono"/>
-              </a:rPr>
-              <a:t>12 / 12</a:t>
+                <a:latin typeface="Consolas"/>
+              </a:rPr>
+              <a:t>12 / 14</a:t>
             </a:r>
           </a:p>
         </p:txBody>
@@ -4588,7 +4318,7 @@
         <p:spPr>
           <a:xfrm>
             <a:off x="685800" y="594360"/>
-            <a:ext cx="9144000" cy="365760"/>
+            <a:ext cx="10058400" cy="365760"/>
           </a:xfrm>
           <a:prstGeom prst="rect">
             <a:avLst/>
@@ -4607,13 +4337,13 @@
               </a:lnSpc>
             </a:pPr>
             <a:r>
-              <a:rPr sz="1300" b="0">
+              <a:rPr sz="1300" b="1">
                 <a:solidFill>
                   <a:srgbClr val="E8A33D"/>
                 </a:solidFill>
-                <a:latin typeface="IBM Plex Mono"/>
-              </a:rPr>
-              <a:t>IN SUMMARY</a:t>
+                <a:latin typeface="Consolas"/>
+              </a:rPr>
+              <a:t>UNDER LOAD</a:t>
             </a:r>
           </a:p>
         </p:txBody>
@@ -4627,7 +4357,7 @@
         <p:spPr>
           <a:xfrm>
             <a:off x="685800" y="1051560"/>
-            <a:ext cx="10515600" cy="1463040"/>
+            <a:ext cx="10789920" cy="1554480"/>
           </a:xfrm>
           <a:prstGeom prst="rect">
             <a:avLst/>
@@ -4650,9 +4380,400 @@
                 <a:solidFill>
                   <a:srgbClr val="EDEFF4"/>
                 </a:solidFill>
-                <a:latin typeface="Archivo"/>
-              </a:rPr>
-              <a:t>Built, tested, and proven against real traffic.</a:t>
+                <a:latin typeface="Calibri"/>
+              </a:rPr>
+              <a:t>5 rapid requests. 5 for 5, caught.</a:t>
+            </a:r>
+          </a:p>
+        </p:txBody>
+      </p:sp>
+      <p:sp>
+        <p:nvSpPr>
+          <p:cNvPr id="6" name="Rounded Rectangle 5"/>
+          <p:cNvSpPr/>
+          <p:nvPr/>
+        </p:nvSpPr>
+        <p:spPr>
+          <a:xfrm>
+            <a:off x="685800" y="2194560"/>
+            <a:ext cx="10515600" cy="2743200"/>
+          </a:xfrm>
+          <a:prstGeom prst="roundRect">
+            <a:avLst>
+              <a:gd name="adj" fmla="val 5000"/>
+            </a:avLst>
+          </a:prstGeom>
+          <a:solidFill>
+            <a:srgbClr val="121826"/>
+          </a:solidFill>
+          <a:ln w="12700">
+            <a:solidFill>
+              <a:srgbClr val="232B3D"/>
+            </a:solidFill>
+          </a:ln>
+          <a:effectLst/>
+        </p:spPr>
+        <p:style>
+          <a:lnRef idx="1">
+            <a:schemeClr val="accent1"/>
+          </a:lnRef>
+          <a:fillRef idx="3">
+            <a:schemeClr val="accent1"/>
+          </a:fillRef>
+          <a:effectRef idx="2">
+            <a:schemeClr val="accent1"/>
+          </a:effectRef>
+          <a:fontRef idx="minor">
+            <a:schemeClr val="lt1"/>
+          </a:fontRef>
+        </p:style>
+        <p:txBody>
+          <a:bodyPr rtlCol="0" anchor="ctr" wrap="square" lIns="256032" rIns="256032" tIns="201168" bIns="201168"/>
+          <a:lstStyle/>
+          <a:p>
+            <a:pPr algn="ctr">
+              <a:lnSpc>
+                <a:spcPct val="125000"/>
+              </a:lnSpc>
+              <a:spcAft>
+                <a:spcPts val="500"/>
+              </a:spcAft>
+            </a:pPr>
+            <a:r>
+              <a:rPr sz="1300" b="0">
+                <a:solidFill>
+                  <a:srgbClr val="69728A"/>
+                </a:solidFill>
+                <a:latin typeface="Consolas"/>
+              </a:rPr>
+              <a:t>$ python experiments/bombard_demo.py 5</a:t>
+            </a:r>
+          </a:p>
+          <a:p>
+            <a:pPr>
+              <a:lnSpc>
+                <a:spcPct val="125000"/>
+              </a:lnSpc>
+              <a:spcAft>
+                <a:spcPts val="500"/>
+              </a:spcAft>
+            </a:pPr>
+            <a:r>
+              <a:rPr sz="1300" b="0">
+                <a:solidFill>
+                  <a:srgbClr val="F16A54"/>
+                </a:solidFill>
+                <a:latin typeface="Consolas"/>
+              </a:rPr>
+              <a:t>request 1/5: JA3=f21f8e6c...  -&gt; FLAGGED</a:t>
+            </a:r>
+          </a:p>
+          <a:p>
+            <a:pPr>
+              <a:lnSpc>
+                <a:spcPct val="125000"/>
+              </a:lnSpc>
+              <a:spcAft>
+                <a:spcPts val="500"/>
+              </a:spcAft>
+            </a:pPr>
+            <a:r>
+              <a:rPr sz="1300" b="0">
+                <a:solidFill>
+                  <a:srgbClr val="F16A54"/>
+                </a:solidFill>
+                <a:latin typeface="Consolas"/>
+              </a:rPr>
+              <a:t>request 2/5: JA3=f21f8e6c...  -&gt; FLAGGED</a:t>
+            </a:r>
+          </a:p>
+          <a:p>
+            <a:pPr>
+              <a:lnSpc>
+                <a:spcPct val="125000"/>
+              </a:lnSpc>
+              <a:spcAft>
+                <a:spcPts val="500"/>
+              </a:spcAft>
+            </a:pPr>
+            <a:r>
+              <a:rPr sz="1300" b="0">
+                <a:solidFill>
+                  <a:srgbClr val="F16A54"/>
+                </a:solidFill>
+                <a:latin typeface="Consolas"/>
+              </a:rPr>
+              <a:t>request 3/5: JA3=f21f8e6c...  -&gt; FLAGGED</a:t>
+            </a:r>
+          </a:p>
+          <a:p>
+            <a:pPr>
+              <a:lnSpc>
+                <a:spcPct val="125000"/>
+              </a:lnSpc>
+              <a:spcAft>
+                <a:spcPts val="500"/>
+              </a:spcAft>
+            </a:pPr>
+            <a:r>
+              <a:rPr sz="1300" b="0">
+                <a:solidFill>
+                  <a:srgbClr val="F16A54"/>
+                </a:solidFill>
+                <a:latin typeface="Consolas"/>
+              </a:rPr>
+              <a:t>request 4/5: JA3=f21f8e6c...  -&gt; FLAGGED</a:t>
+            </a:r>
+          </a:p>
+          <a:p>
+            <a:pPr>
+              <a:lnSpc>
+                <a:spcPct val="125000"/>
+              </a:lnSpc>
+              <a:spcAft>
+                <a:spcPts val="500"/>
+              </a:spcAft>
+            </a:pPr>
+            <a:r>
+              <a:rPr sz="1300" b="0">
+                <a:solidFill>
+                  <a:srgbClr val="F16A54"/>
+                </a:solidFill>
+                <a:latin typeface="Consolas"/>
+              </a:rPr>
+              <a:t>request 5/5: JA3=f21f8e6c...  -&gt; FLAGGED</a:t>
+            </a:r>
+          </a:p>
+          <a:p>
+            <a:pPr>
+              <a:lnSpc>
+                <a:spcPct val="125000"/>
+              </a:lnSpc>
+              <a:spcAft>
+                <a:spcPts val="500"/>
+              </a:spcAft>
+            </a:pPr>
+            <a:r>
+              <a:rPr sz="1400" b="1">
+                <a:solidFill>
+                  <a:srgbClr val="49C79A"/>
+                </a:solidFill>
+                <a:latin typeface="Consolas"/>
+              </a:rPr>
+              <a:t>Result: 5/5 requests correctly flagged.</a:t>
+            </a:r>
+          </a:p>
+        </p:txBody>
+      </p:sp>
+      <p:sp>
+        <p:nvSpPr>
+          <p:cNvPr id="7" name="TextBox 6"/>
+          <p:cNvSpPr txBox="1"/>
+          <p:nvPr/>
+        </p:nvSpPr>
+        <p:spPr>
+          <a:xfrm>
+            <a:off x="685800" y="5212080"/>
+            <a:ext cx="9875520" cy="1828800"/>
+          </a:xfrm>
+          <a:prstGeom prst="rect">
+            <a:avLst/>
+          </a:prstGeom>
+          <a:noFill/>
+        </p:spPr>
+        <p:txBody>
+          <a:bodyPr wrap="square">
+            <a:spAutoFit/>
+          </a:bodyPr>
+          <a:lstStyle/>
+          <a:p>
+            <a:pPr algn="l">
+              <a:lnSpc>
+                <a:spcPct val="135000"/>
+              </a:lnSpc>
+            </a:pPr>
+            <a:r>
+              <a:rPr sz="1400" b="0">
+                <a:solidFill>
+                  <a:srgbClr val="9AA3B5"/>
+                </a:solidFill>
+                <a:latin typeface="Calibri"/>
+              </a:rPr>
+              <a:t>Real botnets spread requests across many IPs to stay under rate-limit thresholds. That trick doesn't help here — every connection is judged on its own real handshake, independently, so more requests just means more identical evidence.</a:t>
+            </a:r>
+          </a:p>
+        </p:txBody>
+      </p:sp>
+    </p:spTree>
+  </p:cSld>
+  <p:clrMapOvr>
+    <a:masterClrMapping/>
+  </p:clrMapOvr>
+</p:sld>
+</file>
+
+<file path=ppt/slides/slide13.xml><?xml version="1.0" encoding="utf-8"?>
+<p:sld xmlns:a="http://schemas.openxmlformats.org/drawingml/2006/main" xmlns:p="http://schemas.openxmlformats.org/presentationml/2006/main" xmlns:r="http://schemas.openxmlformats.org/officeDocument/2006/relationships">
+  <p:cSld>
+    <p:spTree>
+      <p:nvGrpSpPr>
+        <p:cNvPr id="1" name=""/>
+        <p:cNvGrpSpPr/>
+        <p:nvPr/>
+      </p:nvGrpSpPr>
+      <p:grpSpPr/>
+      <p:sp>
+        <p:nvSpPr>
+          <p:cNvPr id="2" name="Rectangle 1"/>
+          <p:cNvSpPr/>
+          <p:nvPr/>
+        </p:nvSpPr>
+        <p:spPr>
+          <a:xfrm>
+            <a:off x="0" y="0"/>
+            <a:ext cx="12191695" cy="6858000"/>
+          </a:xfrm>
+          <a:prstGeom prst="rect">
+            <a:avLst/>
+          </a:prstGeom>
+          <a:solidFill>
+            <a:srgbClr val="0A0E17"/>
+          </a:solidFill>
+          <a:ln>
+            <a:noFill/>
+          </a:ln>
+          <a:effectLst/>
+        </p:spPr>
+        <p:style>
+          <a:lnRef idx="1">
+            <a:schemeClr val="accent1"/>
+          </a:lnRef>
+          <a:fillRef idx="3">
+            <a:schemeClr val="accent1"/>
+          </a:fillRef>
+          <a:effectRef idx="2">
+            <a:schemeClr val="accent1"/>
+          </a:effectRef>
+          <a:fontRef idx="minor">
+            <a:schemeClr val="lt1"/>
+          </a:fontRef>
+        </p:style>
+        <p:txBody>
+          <a:bodyPr rtlCol="0" anchor="ctr"/>
+          <a:lstStyle/>
+          <a:p>
+            <a:pPr algn="ctr"/>
+          </a:p>
+        </p:txBody>
+      </p:sp>
+      <p:sp>
+        <p:nvSpPr>
+          <p:cNvPr id="3" name="TextBox 2"/>
+          <p:cNvSpPr txBox="1"/>
+          <p:nvPr/>
+        </p:nvSpPr>
+        <p:spPr>
+          <a:xfrm>
+            <a:off x="685800" y="6355080"/>
+            <a:ext cx="1828800" cy="365760"/>
+          </a:xfrm>
+          <a:prstGeom prst="rect">
+            <a:avLst/>
+          </a:prstGeom>
+          <a:noFill/>
+        </p:spPr>
+        <p:txBody>
+          <a:bodyPr wrap="none">
+            <a:spAutoFit/>
+          </a:bodyPr>
+          <a:lstStyle/>
+          <a:p>
+            <a:r>
+              <a:rPr sz="1100">
+                <a:solidFill>
+                  <a:srgbClr val="69728A"/>
+                </a:solidFill>
+                <a:latin typeface="Consolas"/>
+              </a:rPr>
+              <a:t>13 / 14</a:t>
+            </a:r>
+          </a:p>
+        </p:txBody>
+      </p:sp>
+      <p:sp>
+        <p:nvSpPr>
+          <p:cNvPr id="4" name="TextBox 3"/>
+          <p:cNvSpPr txBox="1"/>
+          <p:nvPr/>
+        </p:nvSpPr>
+        <p:spPr>
+          <a:xfrm>
+            <a:off x="685800" y="594360"/>
+            <a:ext cx="10058400" cy="365760"/>
+          </a:xfrm>
+          <a:prstGeom prst="rect">
+            <a:avLst/>
+          </a:prstGeom>
+          <a:noFill/>
+        </p:spPr>
+        <p:txBody>
+          <a:bodyPr wrap="square">
+            <a:spAutoFit/>
+          </a:bodyPr>
+          <a:lstStyle/>
+          <a:p>
+            <a:pPr algn="l">
+              <a:lnSpc>
+                <a:spcPct val="115000"/>
+              </a:lnSpc>
+            </a:pPr>
+            <a:r>
+              <a:rPr sz="1300" b="1">
+                <a:solidFill>
+                  <a:srgbClr val="E8A33D"/>
+                </a:solidFill>
+                <a:latin typeface="Consolas"/>
+              </a:rPr>
+              <a:t>WHAT THIS DOESN'T PROVE</a:t>
+            </a:r>
+          </a:p>
+        </p:txBody>
+      </p:sp>
+      <p:sp>
+        <p:nvSpPr>
+          <p:cNvPr id="5" name="TextBox 4"/>
+          <p:cNvSpPr txBox="1"/>
+          <p:nvPr/>
+        </p:nvSpPr>
+        <p:spPr>
+          <a:xfrm>
+            <a:off x="685800" y="1051560"/>
+            <a:ext cx="10789920" cy="1554480"/>
+          </a:xfrm>
+          <a:prstGeom prst="rect">
+            <a:avLst/>
+          </a:prstGeom>
+          <a:noFill/>
+        </p:spPr>
+        <p:txBody>
+          <a:bodyPr wrap="square">
+            <a:spAutoFit/>
+          </a:bodyPr>
+          <a:lstStyle/>
+          <a:p>
+            <a:pPr algn="l">
+              <a:lnSpc>
+                <a:spcPct val="105000"/>
+              </a:lnSpc>
+            </a:pPr>
+            <a:r>
+              <a:rPr sz="3200" b="1">
+                <a:solidFill>
+                  <a:srgbClr val="EDEFF4"/>
+                </a:solidFill>
+                <a:latin typeface="Calibri"/>
+              </a:rPr>
+              <a:t>A fingerprint is a hint, not a verdict.</a:t>
             </a:r>
           </a:p>
         </p:txBody>
@@ -4665,8 +4786,8 @@
         </p:nvSpPr>
         <p:spPr>
           <a:xfrm>
-            <a:off x="685800" y="2103120"/>
-            <a:ext cx="9144000" cy="1828800"/>
+            <a:off x="685800" y="2194560"/>
+            <a:ext cx="548640" cy="457200"/>
           </a:xfrm>
           <a:prstGeom prst="rect">
             <a:avLst/>
@@ -4681,17 +4802,17 @@
           <a:p>
             <a:pPr algn="l">
               <a:lnSpc>
-                <a:spcPct val="135000"/>
-              </a:lnSpc>
-            </a:pPr>
-            <a:r>
-              <a:rPr sz="1800" b="0">
-                <a:solidFill>
-                  <a:srgbClr val="9AA3B5"/>
-                </a:solidFill>
-                <a:latin typeface="IBM Plex Sans"/>
-              </a:rPr>
-              <a:t>Every hash on every slide came from a real handshake with a real server — none of it invented.</a:t>
+                <a:spcPct val="115000"/>
+              </a:lnSpc>
+            </a:pPr>
+            <a:r>
+              <a:rPr sz="1400" b="1">
+                <a:solidFill>
+                  <a:srgbClr val="E8A33D"/>
+                </a:solidFill>
+                <a:latin typeface="Consolas"/>
+              </a:rPr>
+              <a:t>01</a:t>
             </a:r>
           </a:p>
         </p:txBody>
@@ -4704,8 +4825,8 @@
         </p:nvSpPr>
         <p:spPr>
           <a:xfrm>
-            <a:off x="685800" y="3108960"/>
-            <a:ext cx="2377440" cy="640080"/>
+            <a:off x="1371600" y="2194560"/>
+            <a:ext cx="9601200" cy="685800"/>
           </a:xfrm>
           <a:prstGeom prst="rect">
             <a:avLst/>
@@ -4720,17 +4841,17 @@
           <a:p>
             <a:pPr algn="l">
               <a:lnSpc>
-                <a:spcPct val="115000"/>
-              </a:lnSpc>
-            </a:pPr>
-            <a:r>
-              <a:rPr sz="3200" b="1">
-                <a:solidFill>
-                  <a:srgbClr val="E8A33D"/>
-                </a:solidFill>
-                <a:latin typeface="Archivo"/>
-              </a:rPr>
-              <a:t>56</a:t>
+                <a:spcPct val="120000"/>
+              </a:lnSpc>
+            </a:pPr>
+            <a:r>
+              <a:rPr sz="1500" b="0">
+                <a:solidFill>
+                  <a:srgbClr val="9AA3B5"/>
+                </a:solidFill>
+                <a:latin typeface="Calibri"/>
+              </a:rPr>
+              <a:t>Same hash != same software — two unrelated programs on the same library/config fingerprint identically.</a:t>
             </a:r>
           </a:p>
         </p:txBody>
@@ -4743,8 +4864,8 @@
         </p:nvSpPr>
         <p:spPr>
           <a:xfrm>
-            <a:off x="685800" y="3703320"/>
-            <a:ext cx="2377440" cy="457200"/>
+            <a:off x="685800" y="2971800"/>
+            <a:ext cx="548640" cy="457200"/>
           </a:xfrm>
           <a:prstGeom prst="rect">
             <a:avLst/>
@@ -4763,13 +4884,13 @@
               </a:lnSpc>
             </a:pPr>
             <a:r>
-              <a:rPr sz="1200" b="0">
-                <a:solidFill>
-                  <a:srgbClr val="9AA3B5"/>
-                </a:solidFill>
-                <a:latin typeface="IBM Plex Sans"/>
-              </a:rPr>
-              <a:t>tests passing</a:t>
+              <a:rPr sz="1400" b="1">
+                <a:solidFill>
+                  <a:srgbClr val="E8A33D"/>
+                </a:solidFill>
+                <a:latin typeface="Consolas"/>
+              </a:rPr>
+              <a:t>02</a:t>
             </a:r>
           </a:p>
         </p:txBody>
@@ -4782,8 +4903,8 @@
         </p:nvSpPr>
         <p:spPr>
           <a:xfrm>
-            <a:off x="3063240" y="3108960"/>
-            <a:ext cx="2377440" cy="640080"/>
+            <a:off x="1371600" y="2971800"/>
+            <a:ext cx="9601200" cy="685800"/>
           </a:xfrm>
           <a:prstGeom prst="rect">
             <a:avLst/>
@@ -4798,17 +4919,17 @@
           <a:p>
             <a:pPr algn="l">
               <a:lnSpc>
-                <a:spcPct val="115000"/>
-              </a:lnSpc>
-            </a:pPr>
-            <a:r>
-              <a:rPr sz="3200" b="1">
-                <a:solidFill>
-                  <a:srgbClr val="E8A33D"/>
-                </a:solidFill>
-                <a:latin typeface="Archivo"/>
-              </a:rPr>
-              <a:t>15</a:t>
+                <a:spcPct val="120000"/>
+              </a:lnSpc>
+            </a:pPr>
+            <a:r>
+              <a:rPr sz="1500" b="0">
+                <a:solidFill>
+                  <a:srgbClr val="9AA3B5"/>
+                </a:solidFill>
+                <a:latin typeface="Calibri"/>
+              </a:rPr>
+              <a:t>JA3S depends on the client, too — two of our own clients produced an identical JA3S against the same server.</a:t>
             </a:r>
           </a:p>
         </p:txBody>
@@ -4821,8 +4942,8 @@
         </p:nvSpPr>
         <p:spPr>
           <a:xfrm>
-            <a:off x="3063240" y="3703320"/>
-            <a:ext cx="2377440" cy="457200"/>
+            <a:off x="685800" y="3749040"/>
+            <a:ext cx="548640" cy="457200"/>
           </a:xfrm>
           <a:prstGeom prst="rect">
             <a:avLst/>
@@ -4841,13 +4962,13 @@
               </a:lnSpc>
             </a:pPr>
             <a:r>
-              <a:rPr sz="1200" b="0">
-                <a:solidFill>
-                  <a:srgbClr val="9AA3B5"/>
-                </a:solidFill>
-                <a:latin typeface="IBM Plex Sans"/>
-              </a:rPr>
-              <a:t>measured DB entries</a:t>
+              <a:rPr sz="1400" b="1">
+                <a:solidFill>
+                  <a:srgbClr val="E8A33D"/>
+                </a:solidFill>
+                <a:latin typeface="Consolas"/>
+              </a:rPr>
+              <a:t>03</a:t>
             </a:r>
           </a:p>
         </p:txBody>
@@ -4860,8 +4981,8 @@
         </p:nvSpPr>
         <p:spPr>
           <a:xfrm>
-            <a:off x="5440680" y="3108960"/>
-            <a:ext cx="2377440" cy="640080"/>
+            <a:off x="1371600" y="3749040"/>
+            <a:ext cx="9601200" cy="685800"/>
           </a:xfrm>
           <a:prstGeom prst="rect">
             <a:avLst/>
@@ -4876,17 +4997,17 @@
           <a:p>
             <a:pPr algn="l">
               <a:lnSpc>
-                <a:spcPct val="115000"/>
-              </a:lnSpc>
-            </a:pPr>
-            <a:r>
-              <a:rPr sz="3200" b="1">
-                <a:solidFill>
-                  <a:srgbClr val="E8A33D"/>
-                </a:solidFill>
-                <a:latin typeface="Archivo"/>
-              </a:rPr>
-              <a:t>7</a:t>
+                <a:spcPct val="120000"/>
+              </a:lnSpc>
+            </a:pPr>
+            <a:r>
+              <a:rPr sz="1500" b="0">
+                <a:solidFill>
+                  <a:srgbClr val="9AA3B5"/>
+                </a:solidFill>
+                <a:latin typeface="Calibri"/>
+              </a:rPr>
+              <a:t>GREASE and reordering actively fight back — Chrome randomizes its own hello on purpose (slide 8).</a:t>
             </a:r>
           </a:p>
         </p:txBody>
@@ -4899,8 +5020,8 @@
         </p:nvSpPr>
         <p:spPr>
           <a:xfrm>
-            <a:off x="5440680" y="3703320"/>
-            <a:ext cx="2377440" cy="457200"/>
+            <a:off x="685800" y="4526280"/>
+            <a:ext cx="548640" cy="457200"/>
           </a:xfrm>
           <a:prstGeom prst="rect">
             <a:avLst/>
@@ -4919,13 +5040,13 @@
               </a:lnSpc>
             </a:pPr>
             <a:r>
-              <a:rPr sz="1200" b="0">
-                <a:solidFill>
-                  <a:srgbClr val="9AA3B5"/>
-                </a:solidFill>
-                <a:latin typeface="IBM Plex Sans"/>
-              </a:rPr>
-              <a:t>real experiments</a:t>
+              <a:rPr sz="1400" b="1">
+                <a:solidFill>
+                  <a:srgbClr val="E8A33D"/>
+                </a:solidFill>
+                <a:latin typeface="Consolas"/>
+              </a:rPr>
+              <a:t>04</a:t>
             </a:r>
           </a:p>
         </p:txBody>
@@ -4938,8 +5059,8 @@
         </p:nvSpPr>
         <p:spPr>
           <a:xfrm>
-            <a:off x="7818120" y="3108960"/>
-            <a:ext cx="2377440" cy="640080"/>
+            <a:off x="1371600" y="4526280"/>
+            <a:ext cx="9601200" cy="685800"/>
           </a:xfrm>
           <a:prstGeom prst="rect">
             <a:avLst/>
@@ -4954,17 +5075,17 @@
           <a:p>
             <a:pPr algn="l">
               <a:lnSpc>
-                <a:spcPct val="115000"/>
-              </a:lnSpc>
-            </a:pPr>
-            <a:r>
-              <a:rPr sz="3200" b="1">
-                <a:solidFill>
-                  <a:srgbClr val="E8A33D"/>
-                </a:solidFill>
-                <a:latin typeface="Archivo"/>
-              </a:rPr>
-              <a:t>2</a:t>
+                <a:spcPct val="120000"/>
+              </a:lnSpc>
+            </a:pPr>
+            <a:r>
+              <a:rPr sz="1500" b="0">
+                <a:solidFill>
+                  <a:srgbClr val="9AA3B5"/>
+                </a:solidFill>
+                <a:latin typeface="Calibri"/>
+              </a:rPr>
+              <a:t>Evasion is possible — since the fingerprint is client-controlled bytes, a determined attacker can copy it exactly.</a:t>
             </a:r>
           </a:p>
         </p:txBody>
@@ -4977,8 +5098,8 @@
         </p:nvSpPr>
         <p:spPr>
           <a:xfrm>
-            <a:off x="7818120" y="3703320"/>
-            <a:ext cx="2377440" cy="457200"/>
+            <a:off x="685800" y="5303520"/>
+            <a:ext cx="548640" cy="457200"/>
           </a:xfrm>
           <a:prstGeom prst="rect">
             <a:avLst/>
@@ -4997,13 +5118,13 @@
               </a:lnSpc>
             </a:pPr>
             <a:r>
-              <a:rPr sz="1200" b="0">
-                <a:solidFill>
-                  <a:srgbClr val="9AA3B5"/>
-                </a:solidFill>
-                <a:latin typeface="IBM Plex Sans"/>
-              </a:rPr>
-              <a:t>fingerprint schemes</a:t>
+              <a:rPr sz="1400" b="1">
+                <a:solidFill>
+                  <a:srgbClr val="E8A33D"/>
+                </a:solidFill>
+                <a:latin typeface="Consolas"/>
+              </a:rPr>
+              <a:t>05</a:t>
             </a:r>
           </a:p>
         </p:txBody>
@@ -5016,8 +5137,8 @@
         </p:nvSpPr>
         <p:spPr>
           <a:xfrm>
-            <a:off x="685800" y="4754880"/>
-            <a:ext cx="8686800" cy="1828800"/>
+            <a:off x="1371600" y="5303520"/>
+            <a:ext cx="9601200" cy="685800"/>
           </a:xfrm>
           <a:prstGeom prst="rect">
             <a:avLst/>
@@ -5032,15 +5153,579 @@
           <a:p>
             <a:pPr algn="l">
               <a:lnSpc>
+                <a:spcPct val="120000"/>
+              </a:lnSpc>
+            </a:pPr>
+            <a:r>
+              <a:rPr sz="1500" b="0">
+                <a:solidFill>
+                  <a:srgbClr val="9AA3B5"/>
+                </a:solidFill>
+                <a:latin typeface="Calibri"/>
+              </a:rPr>
+              <a:t>Nothing here decrypts anything — only the already-unencrypted handshake preamble is ever read.</a:t>
+            </a:r>
+          </a:p>
+        </p:txBody>
+      </p:sp>
+    </p:spTree>
+  </p:cSld>
+  <p:clrMapOvr>
+    <a:masterClrMapping/>
+  </p:clrMapOvr>
+</p:sld>
+</file>
+
+<file path=ppt/slides/slide14.xml><?xml version="1.0" encoding="utf-8"?>
+<p:sld xmlns:a="http://schemas.openxmlformats.org/drawingml/2006/main" xmlns:p="http://schemas.openxmlformats.org/presentationml/2006/main" xmlns:r="http://schemas.openxmlformats.org/officeDocument/2006/relationships">
+  <p:cSld>
+    <p:spTree>
+      <p:nvGrpSpPr>
+        <p:cNvPr id="1" name=""/>
+        <p:cNvGrpSpPr/>
+        <p:nvPr/>
+      </p:nvGrpSpPr>
+      <p:grpSpPr/>
+      <p:sp>
+        <p:nvSpPr>
+          <p:cNvPr id="2" name="Rectangle 1"/>
+          <p:cNvSpPr/>
+          <p:nvPr/>
+        </p:nvSpPr>
+        <p:spPr>
+          <a:xfrm>
+            <a:off x="0" y="0"/>
+            <a:ext cx="12191695" cy="6858000"/>
+          </a:xfrm>
+          <a:prstGeom prst="rect">
+            <a:avLst/>
+          </a:prstGeom>
+          <a:solidFill>
+            <a:srgbClr val="0A0E17"/>
+          </a:solidFill>
+          <a:ln>
+            <a:noFill/>
+          </a:ln>
+          <a:effectLst/>
+        </p:spPr>
+        <p:style>
+          <a:lnRef idx="1">
+            <a:schemeClr val="accent1"/>
+          </a:lnRef>
+          <a:fillRef idx="3">
+            <a:schemeClr val="accent1"/>
+          </a:fillRef>
+          <a:effectRef idx="2">
+            <a:schemeClr val="accent1"/>
+          </a:effectRef>
+          <a:fontRef idx="minor">
+            <a:schemeClr val="lt1"/>
+          </a:fontRef>
+        </p:style>
+        <p:txBody>
+          <a:bodyPr rtlCol="0" anchor="ctr"/>
+          <a:lstStyle/>
+          <a:p>
+            <a:pPr algn="ctr"/>
+          </a:p>
+        </p:txBody>
+      </p:sp>
+      <p:sp>
+        <p:nvSpPr>
+          <p:cNvPr id="3" name="TextBox 2"/>
+          <p:cNvSpPr txBox="1"/>
+          <p:nvPr/>
+        </p:nvSpPr>
+        <p:spPr>
+          <a:xfrm>
+            <a:off x="685800" y="6355080"/>
+            <a:ext cx="1828800" cy="365760"/>
+          </a:xfrm>
+          <a:prstGeom prst="rect">
+            <a:avLst/>
+          </a:prstGeom>
+          <a:noFill/>
+        </p:spPr>
+        <p:txBody>
+          <a:bodyPr wrap="none">
+            <a:spAutoFit/>
+          </a:bodyPr>
+          <a:lstStyle/>
+          <a:p>
+            <a:r>
+              <a:rPr sz="1100">
+                <a:solidFill>
+                  <a:srgbClr val="69728A"/>
+                </a:solidFill>
+                <a:latin typeface="Consolas"/>
+              </a:rPr>
+              <a:t>14 / 14</a:t>
+            </a:r>
+          </a:p>
+        </p:txBody>
+      </p:sp>
+      <p:sp>
+        <p:nvSpPr>
+          <p:cNvPr id="4" name="TextBox 3"/>
+          <p:cNvSpPr txBox="1"/>
+          <p:nvPr/>
+        </p:nvSpPr>
+        <p:spPr>
+          <a:xfrm>
+            <a:off x="685800" y="594360"/>
+            <a:ext cx="10058400" cy="365760"/>
+          </a:xfrm>
+          <a:prstGeom prst="rect">
+            <a:avLst/>
+          </a:prstGeom>
+          <a:noFill/>
+        </p:spPr>
+        <p:txBody>
+          <a:bodyPr wrap="square">
+            <a:spAutoFit/>
+          </a:bodyPr>
+          <a:lstStyle/>
+          <a:p>
+            <a:pPr algn="l">
+              <a:lnSpc>
+                <a:spcPct val="115000"/>
+              </a:lnSpc>
+            </a:pPr>
+            <a:r>
+              <a:rPr sz="1300" b="1">
+                <a:solidFill>
+                  <a:srgbClr val="E8A33D"/>
+                </a:solidFill>
+                <a:latin typeface="Consolas"/>
+              </a:rPr>
+              <a:t>IN SUMMARY</a:t>
+            </a:r>
+          </a:p>
+        </p:txBody>
+      </p:sp>
+      <p:sp>
+        <p:nvSpPr>
+          <p:cNvPr id="5" name="TextBox 4"/>
+          <p:cNvSpPr txBox="1"/>
+          <p:nvPr/>
+        </p:nvSpPr>
+        <p:spPr>
+          <a:xfrm>
+            <a:off x="685800" y="1051560"/>
+            <a:ext cx="10789920" cy="1554480"/>
+          </a:xfrm>
+          <a:prstGeom prst="rect">
+            <a:avLst/>
+          </a:prstGeom>
+          <a:noFill/>
+        </p:spPr>
+        <p:txBody>
+          <a:bodyPr wrap="square">
+            <a:spAutoFit/>
+          </a:bodyPr>
+          <a:lstStyle/>
+          <a:p>
+            <a:pPr algn="l">
+              <a:lnSpc>
+                <a:spcPct val="105000"/>
+              </a:lnSpc>
+            </a:pPr>
+            <a:r>
+              <a:rPr sz="3200" b="1">
+                <a:solidFill>
+                  <a:srgbClr val="EDEFF4"/>
+                </a:solidFill>
+                <a:latin typeface="Calibri"/>
+              </a:rPr>
+              <a:t>Built, tested, and proven against real traffic.</a:t>
+            </a:r>
+          </a:p>
+        </p:txBody>
+      </p:sp>
+      <p:sp>
+        <p:nvSpPr>
+          <p:cNvPr id="6" name="TextBox 5"/>
+          <p:cNvSpPr txBox="1"/>
+          <p:nvPr/>
+        </p:nvSpPr>
+        <p:spPr>
+          <a:xfrm>
+            <a:off x="685800" y="2103120"/>
+            <a:ext cx="9601200" cy="1828800"/>
+          </a:xfrm>
+          <a:prstGeom prst="rect">
+            <a:avLst/>
+          </a:prstGeom>
+          <a:noFill/>
+        </p:spPr>
+        <p:txBody>
+          <a:bodyPr wrap="square">
+            <a:spAutoFit/>
+          </a:bodyPr>
+          <a:lstStyle/>
+          <a:p>
+            <a:pPr algn="l">
+              <a:lnSpc>
                 <a:spcPct val="135000"/>
               </a:lnSpc>
             </a:pPr>
             <a:r>
+              <a:rPr sz="1800" b="0">
+                <a:solidFill>
+                  <a:srgbClr val="9AA3B5"/>
+                </a:solidFill>
+                <a:latin typeface="Calibri"/>
+              </a:rPr>
+              <a:t>Every hash on every slide came from a real handshake with a real server — none of it invented.</a:t>
+            </a:r>
+          </a:p>
+        </p:txBody>
+      </p:sp>
+      <p:sp>
+        <p:nvSpPr>
+          <p:cNvPr id="7" name="TextBox 6"/>
+          <p:cNvSpPr txBox="1"/>
+          <p:nvPr/>
+        </p:nvSpPr>
+        <p:spPr>
+          <a:xfrm>
+            <a:off x="685800" y="3108960"/>
+            <a:ext cx="2514600" cy="640080"/>
+          </a:xfrm>
+          <a:prstGeom prst="rect">
+            <a:avLst/>
+          </a:prstGeom>
+          <a:noFill/>
+        </p:spPr>
+        <p:txBody>
+          <a:bodyPr wrap="square">
+            <a:spAutoFit/>
+          </a:bodyPr>
+          <a:lstStyle/>
+          <a:p>
+            <a:pPr algn="l">
+              <a:lnSpc>
+                <a:spcPct val="115000"/>
+              </a:lnSpc>
+            </a:pPr>
+            <a:r>
+              <a:rPr sz="3200" b="1">
+                <a:solidFill>
+                  <a:srgbClr val="E8A33D"/>
+                </a:solidFill>
+                <a:latin typeface="Calibri"/>
+              </a:rPr>
+              <a:t>56</a:t>
+            </a:r>
+          </a:p>
+        </p:txBody>
+      </p:sp>
+      <p:sp>
+        <p:nvSpPr>
+          <p:cNvPr id="8" name="TextBox 7"/>
+          <p:cNvSpPr txBox="1"/>
+          <p:nvPr/>
+        </p:nvSpPr>
+        <p:spPr>
+          <a:xfrm>
+            <a:off x="685800" y="3703320"/>
+            <a:ext cx="2514600" cy="457200"/>
+          </a:xfrm>
+          <a:prstGeom prst="rect">
+            <a:avLst/>
+          </a:prstGeom>
+          <a:noFill/>
+        </p:spPr>
+        <p:txBody>
+          <a:bodyPr wrap="square">
+            <a:spAutoFit/>
+          </a:bodyPr>
+          <a:lstStyle/>
+          <a:p>
+            <a:pPr algn="l">
+              <a:lnSpc>
+                <a:spcPct val="115000"/>
+              </a:lnSpc>
+            </a:pPr>
+            <a:r>
+              <a:rPr sz="1200" b="0">
+                <a:solidFill>
+                  <a:srgbClr val="9AA3B5"/>
+                </a:solidFill>
+                <a:latin typeface="Calibri"/>
+              </a:rPr>
+              <a:t>tests passing</a:t>
+            </a:r>
+          </a:p>
+        </p:txBody>
+      </p:sp>
+      <p:sp>
+        <p:nvSpPr>
+          <p:cNvPr id="9" name="TextBox 8"/>
+          <p:cNvSpPr txBox="1"/>
+          <p:nvPr/>
+        </p:nvSpPr>
+        <p:spPr>
+          <a:xfrm>
+            <a:off x="3200400" y="3108960"/>
+            <a:ext cx="2514600" cy="640080"/>
+          </a:xfrm>
+          <a:prstGeom prst="rect">
+            <a:avLst/>
+          </a:prstGeom>
+          <a:noFill/>
+        </p:spPr>
+        <p:txBody>
+          <a:bodyPr wrap="square">
+            <a:spAutoFit/>
+          </a:bodyPr>
+          <a:lstStyle/>
+          <a:p>
+            <a:pPr algn="l">
+              <a:lnSpc>
+                <a:spcPct val="115000"/>
+              </a:lnSpc>
+            </a:pPr>
+            <a:r>
+              <a:rPr sz="3200" b="1">
+                <a:solidFill>
+                  <a:srgbClr val="E8A33D"/>
+                </a:solidFill>
+                <a:latin typeface="Calibri"/>
+              </a:rPr>
+              <a:t>15</a:t>
+            </a:r>
+          </a:p>
+        </p:txBody>
+      </p:sp>
+      <p:sp>
+        <p:nvSpPr>
+          <p:cNvPr id="10" name="TextBox 9"/>
+          <p:cNvSpPr txBox="1"/>
+          <p:nvPr/>
+        </p:nvSpPr>
+        <p:spPr>
+          <a:xfrm>
+            <a:off x="3200400" y="3703320"/>
+            <a:ext cx="2514600" cy="457200"/>
+          </a:xfrm>
+          <a:prstGeom prst="rect">
+            <a:avLst/>
+          </a:prstGeom>
+          <a:noFill/>
+        </p:spPr>
+        <p:txBody>
+          <a:bodyPr wrap="square">
+            <a:spAutoFit/>
+          </a:bodyPr>
+          <a:lstStyle/>
+          <a:p>
+            <a:pPr algn="l">
+              <a:lnSpc>
+                <a:spcPct val="115000"/>
+              </a:lnSpc>
+            </a:pPr>
+            <a:r>
+              <a:rPr sz="1200" b="0">
+                <a:solidFill>
+                  <a:srgbClr val="9AA3B5"/>
+                </a:solidFill>
+                <a:latin typeface="Calibri"/>
+              </a:rPr>
+              <a:t>measured DB entries</a:t>
+            </a:r>
+          </a:p>
+        </p:txBody>
+      </p:sp>
+      <p:sp>
+        <p:nvSpPr>
+          <p:cNvPr id="11" name="TextBox 10"/>
+          <p:cNvSpPr txBox="1"/>
+          <p:nvPr/>
+        </p:nvSpPr>
+        <p:spPr>
+          <a:xfrm>
+            <a:off x="5715000" y="3108960"/>
+            <a:ext cx="2514600" cy="640080"/>
+          </a:xfrm>
+          <a:prstGeom prst="rect">
+            <a:avLst/>
+          </a:prstGeom>
+          <a:noFill/>
+        </p:spPr>
+        <p:txBody>
+          <a:bodyPr wrap="square">
+            <a:spAutoFit/>
+          </a:bodyPr>
+          <a:lstStyle/>
+          <a:p>
+            <a:pPr algn="l">
+              <a:lnSpc>
+                <a:spcPct val="115000"/>
+              </a:lnSpc>
+            </a:pPr>
+            <a:r>
+              <a:rPr sz="3200" b="1">
+                <a:solidFill>
+                  <a:srgbClr val="E8A33D"/>
+                </a:solidFill>
+                <a:latin typeface="Calibri"/>
+              </a:rPr>
+              <a:t>7</a:t>
+            </a:r>
+          </a:p>
+        </p:txBody>
+      </p:sp>
+      <p:sp>
+        <p:nvSpPr>
+          <p:cNvPr id="12" name="TextBox 11"/>
+          <p:cNvSpPr txBox="1"/>
+          <p:nvPr/>
+        </p:nvSpPr>
+        <p:spPr>
+          <a:xfrm>
+            <a:off x="5715000" y="3703320"/>
+            <a:ext cx="2514600" cy="457200"/>
+          </a:xfrm>
+          <a:prstGeom prst="rect">
+            <a:avLst/>
+          </a:prstGeom>
+          <a:noFill/>
+        </p:spPr>
+        <p:txBody>
+          <a:bodyPr wrap="square">
+            <a:spAutoFit/>
+          </a:bodyPr>
+          <a:lstStyle/>
+          <a:p>
+            <a:pPr algn="l">
+              <a:lnSpc>
+                <a:spcPct val="115000"/>
+              </a:lnSpc>
+            </a:pPr>
+            <a:r>
+              <a:rPr sz="1200" b="0">
+                <a:solidFill>
+                  <a:srgbClr val="9AA3B5"/>
+                </a:solidFill>
+                <a:latin typeface="Calibri"/>
+              </a:rPr>
+              <a:t>real experiments</a:t>
+            </a:r>
+          </a:p>
+        </p:txBody>
+      </p:sp>
+      <p:sp>
+        <p:nvSpPr>
+          <p:cNvPr id="13" name="TextBox 12"/>
+          <p:cNvSpPr txBox="1"/>
+          <p:nvPr/>
+        </p:nvSpPr>
+        <p:spPr>
+          <a:xfrm>
+            <a:off x="8229600" y="3108960"/>
+            <a:ext cx="2514600" cy="640080"/>
+          </a:xfrm>
+          <a:prstGeom prst="rect">
+            <a:avLst/>
+          </a:prstGeom>
+          <a:noFill/>
+        </p:spPr>
+        <p:txBody>
+          <a:bodyPr wrap="square">
+            <a:spAutoFit/>
+          </a:bodyPr>
+          <a:lstStyle/>
+          <a:p>
+            <a:pPr algn="l">
+              <a:lnSpc>
+                <a:spcPct val="115000"/>
+              </a:lnSpc>
+            </a:pPr>
+            <a:r>
+              <a:rPr sz="3200" b="1">
+                <a:solidFill>
+                  <a:srgbClr val="E8A33D"/>
+                </a:solidFill>
+                <a:latin typeface="Calibri"/>
+              </a:rPr>
+              <a:t>2</a:t>
+            </a:r>
+          </a:p>
+        </p:txBody>
+      </p:sp>
+      <p:sp>
+        <p:nvSpPr>
+          <p:cNvPr id="14" name="TextBox 13"/>
+          <p:cNvSpPr txBox="1"/>
+          <p:nvPr/>
+        </p:nvSpPr>
+        <p:spPr>
+          <a:xfrm>
+            <a:off x="8229600" y="3703320"/>
+            <a:ext cx="2514600" cy="457200"/>
+          </a:xfrm>
+          <a:prstGeom prst="rect">
+            <a:avLst/>
+          </a:prstGeom>
+          <a:noFill/>
+        </p:spPr>
+        <p:txBody>
+          <a:bodyPr wrap="square">
+            <a:spAutoFit/>
+          </a:bodyPr>
+          <a:lstStyle/>
+          <a:p>
+            <a:pPr algn="l">
+              <a:lnSpc>
+                <a:spcPct val="115000"/>
+              </a:lnSpc>
+            </a:pPr>
+            <a:r>
+              <a:rPr sz="1200" b="0">
+                <a:solidFill>
+                  <a:srgbClr val="9AA3B5"/>
+                </a:solidFill>
+                <a:latin typeface="Calibri"/>
+              </a:rPr>
+              <a:t>fingerprint schemes</a:t>
+            </a:r>
+          </a:p>
+        </p:txBody>
+      </p:sp>
+      <p:sp>
+        <p:nvSpPr>
+          <p:cNvPr id="15" name="TextBox 14"/>
+          <p:cNvSpPr txBox="1"/>
+          <p:nvPr/>
+        </p:nvSpPr>
+        <p:spPr>
+          <a:xfrm>
+            <a:off x="685800" y="4754880"/>
+            <a:ext cx="9601200" cy="1828800"/>
+          </a:xfrm>
+          <a:prstGeom prst="rect">
+            <a:avLst/>
+          </a:prstGeom>
+          <a:noFill/>
+        </p:spPr>
+        <p:txBody>
+          <a:bodyPr wrap="square">
+            <a:spAutoFit/>
+          </a:bodyPr>
+          <a:lstStyle/>
+          <a:p>
+            <a:pPr algn="l">
+              <a:lnSpc>
+                <a:spcPct val="135000"/>
+              </a:lnSpc>
+            </a:pPr>
+            <a:r>
               <a:rPr sz="1300" b="0">
                 <a:solidFill>
                   <a:srgbClr val="69728A"/>
                 </a:solidFill>
-                <a:latin typeface="IBM Plex Sans"/>
+                <a:latin typeface="Calibri"/>
               </a:rPr>
               <a:t>TLS Fingerprinting — Computer Networks course project.</a:t>
             </a:r>
@@ -5136,9 +5821,9 @@
                 <a:solidFill>
                   <a:srgbClr val="69728A"/>
                 </a:solidFill>
-                <a:latin typeface="IBM Plex Mono"/>
-              </a:rPr>
-              <a:t>02 / 12</a:t>
+                <a:latin typeface="Consolas"/>
+              </a:rPr>
+              <a:t>02 / 14</a:t>
             </a:r>
           </a:p>
         </p:txBody>
@@ -5152,7 +5837,7 @@
         <p:spPr>
           <a:xfrm>
             <a:off x="685800" y="594360"/>
-            <a:ext cx="9144000" cy="365760"/>
+            <a:ext cx="10058400" cy="365760"/>
           </a:xfrm>
           <a:prstGeom prst="rect">
             <a:avLst/>
@@ -5171,13 +5856,13 @@
               </a:lnSpc>
             </a:pPr>
             <a:r>
-              <a:rPr sz="1300" b="0">
+              <a:rPr sz="1300" b="1">
                 <a:solidFill>
                   <a:srgbClr val="E8A33D"/>
                 </a:solidFill>
-                <a:latin typeface="IBM Plex Mono"/>
-              </a:rPr>
-              <a:t>THE BLIND SPOT</a:t>
+                <a:latin typeface="Consolas"/>
+              </a:rPr>
+              <a:t>PROBLEM STATEMENT</a:t>
             </a:r>
           </a:p>
         </p:txBody>
@@ -5191,7 +5876,7 @@
         <p:spPr>
           <a:xfrm>
             <a:off x="685800" y="1051560"/>
-            <a:ext cx="10515600" cy="1463040"/>
+            <a:ext cx="10789920" cy="1554480"/>
           </a:xfrm>
           <a:prstGeom prst="rect">
             <a:avLst/>
@@ -5210,13 +5895,13 @@
               </a:lnSpc>
             </a:pPr>
             <a:r>
-              <a:rPr sz="3400" b="1">
+              <a:rPr sz="3000" b="1">
                 <a:solidFill>
                   <a:srgbClr val="EDEFF4"/>
                 </a:solidFill>
-                <a:latin typeface="Archivo"/>
-              </a:rPr>
-              <a:t>A server can't read what's inside HTTPS.</a:t>
+                <a:latin typeface="Calibri"/>
+              </a:rPr>
+              <a:t>Once HTTPS starts, a server can't read what's inside.</a:t>
             </a:r>
           </a:p>
         </p:txBody>
@@ -5229,8 +5914,8 @@
         </p:nvSpPr>
         <p:spPr>
           <a:xfrm>
-            <a:off x="685800" y="2194560"/>
-            <a:ext cx="9601200" cy="1828800"/>
+            <a:off x="685800" y="2286000"/>
+            <a:ext cx="9875520" cy="713232"/>
           </a:xfrm>
           <a:prstGeom prst="rect">
             <a:avLst/>
@@ -5243,19 +5928,136 @@
           </a:bodyPr>
           <a:lstStyle/>
           <a:p>
-            <a:pPr algn="l">
-              <a:lnSpc>
-                <a:spcPct val="135000"/>
-              </a:lnSpc>
-            </a:pPr>
-            <a:r>
-              <a:rPr sz="1800" b="0">
+            <a:pPr>
+              <a:lnSpc>
+                <a:spcPct val="120000"/>
+              </a:lnSpc>
+            </a:pPr>
+            <a:r>
+              <a:rPr sz="1800">
                 <a:solidFill>
                   <a:srgbClr val="9AA3B5"/>
                 </a:solidFill>
-                <a:latin typeface="IBM Plex Sans"/>
-              </a:rPr>
-              <a:t>Once a handshake completes, everything is encrypted. A scraper hammering a login page, a bot pretending to be a customer, a script bombarding an API — from outside, they look identical to a real visitor. Traffic volume alone won't tell you which requests are automated.</a:t>
+                <a:latin typeface="Calibri"/>
+              </a:rPr>
+              <a:t>•  Almost all internet traffic today is encrypted (HTTPS/TLS).</a:t>
+            </a:r>
+          </a:p>
+        </p:txBody>
+      </p:sp>
+      <p:sp>
+        <p:nvSpPr>
+          <p:cNvPr id="7" name="TextBox 6"/>
+          <p:cNvSpPr txBox="1"/>
+          <p:nvPr/>
+        </p:nvSpPr>
+        <p:spPr>
+          <a:xfrm>
+            <a:off x="685800" y="2999232"/>
+            <a:ext cx="9875520" cy="713232"/>
+          </a:xfrm>
+          <a:prstGeom prst="rect">
+            <a:avLst/>
+          </a:prstGeom>
+          <a:noFill/>
+        </p:spPr>
+        <p:txBody>
+          <a:bodyPr wrap="square">
+            <a:spAutoFit/>
+          </a:bodyPr>
+          <a:lstStyle/>
+          <a:p>
+            <a:pPr>
+              <a:lnSpc>
+                <a:spcPct val="120000"/>
+              </a:lnSpc>
+            </a:pPr>
+            <a:r>
+              <a:rPr sz="1800">
+                <a:solidFill>
+                  <a:srgbClr val="9AA3B5"/>
+                </a:solidFill>
+                <a:latin typeface="Calibri"/>
+              </a:rPr>
+              <a:t>•  A bot pretending to be a browser, a scraper, or malware talking to its C2 server — all look like ordinary encrypted traffic.</a:t>
+            </a:r>
+          </a:p>
+        </p:txBody>
+      </p:sp>
+      <p:sp>
+        <p:nvSpPr>
+          <p:cNvPr id="8" name="TextBox 7"/>
+          <p:cNvSpPr txBox="1"/>
+          <p:nvPr/>
+        </p:nvSpPr>
+        <p:spPr>
+          <a:xfrm>
+            <a:off x="685800" y="3712464"/>
+            <a:ext cx="9875520" cy="713232"/>
+          </a:xfrm>
+          <a:prstGeom prst="rect">
+            <a:avLst/>
+          </a:prstGeom>
+          <a:noFill/>
+        </p:spPr>
+        <p:txBody>
+          <a:bodyPr wrap="square">
+            <a:spAutoFit/>
+          </a:bodyPr>
+          <a:lstStyle/>
+          <a:p>
+            <a:pPr>
+              <a:lnSpc>
+                <a:spcPct val="120000"/>
+              </a:lnSpc>
+            </a:pPr>
+            <a:r>
+              <a:rPr sz="1800">
+                <a:solidFill>
+                  <a:srgbClr val="9AA3B5"/>
+                </a:solidFill>
+                <a:latin typeface="Calibri"/>
+              </a:rPr>
+              <a:t>•  Firewalls and monitors can no longer read URLs, headers, or payloads.</a:t>
+            </a:r>
+          </a:p>
+        </p:txBody>
+      </p:sp>
+      <p:sp>
+        <p:nvSpPr>
+          <p:cNvPr id="9" name="TextBox 8"/>
+          <p:cNvSpPr txBox="1"/>
+          <p:nvPr/>
+        </p:nvSpPr>
+        <p:spPr>
+          <a:xfrm>
+            <a:off x="685800" y="4425696"/>
+            <a:ext cx="9875520" cy="713232"/>
+          </a:xfrm>
+          <a:prstGeom prst="rect">
+            <a:avLst/>
+          </a:prstGeom>
+          <a:noFill/>
+        </p:spPr>
+        <p:txBody>
+          <a:bodyPr wrap="square">
+            <a:spAutoFit/>
+          </a:bodyPr>
+          <a:lstStyle/>
+          <a:p>
+            <a:pPr>
+              <a:lnSpc>
+                <a:spcPct val="120000"/>
+              </a:lnSpc>
+            </a:pPr>
+            <a:r>
+              <a:rPr sz="1800">
+                <a:solidFill>
+                  <a:srgbClr val="9AA3B5"/>
+                </a:solidFill>
+                <a:latin typeface="Calibri"/>
+              </a:rPr>
+              <a:t>•  Question: can we tell WHO is really connecting, without breaking encryption for anyone?</a:t>
             </a:r>
           </a:p>
         </p:txBody>
@@ -5349,9 +6151,9 @@
                 <a:solidFill>
                   <a:srgbClr val="69728A"/>
                 </a:solidFill>
-                <a:latin typeface="IBM Plex Mono"/>
-              </a:rPr>
-              <a:t>03 / 12</a:t>
+                <a:latin typeface="Consolas"/>
+              </a:rPr>
+              <a:t>03 / 14</a:t>
             </a:r>
           </a:p>
         </p:txBody>
@@ -5365,7 +6167,7 @@
         <p:spPr>
           <a:xfrm>
             <a:off x="685800" y="594360"/>
-            <a:ext cx="9144000" cy="365760"/>
+            <a:ext cx="10058400" cy="365760"/>
           </a:xfrm>
           <a:prstGeom prst="rect">
             <a:avLst/>
@@ -5384,13 +6186,13 @@
               </a:lnSpc>
             </a:pPr>
             <a:r>
-              <a:rPr sz="1300" b="0">
+              <a:rPr sz="1300" b="1">
                 <a:solidFill>
                   <a:srgbClr val="E8A33D"/>
                 </a:solidFill>
-                <a:latin typeface="IBM Plex Mono"/>
-              </a:rPr>
-              <a:t>THE ONE UNENCRYPTED MOMENT</a:t>
+                <a:latin typeface="Consolas"/>
+              </a:rPr>
+              <a:t>WHAT ALREADY EXISTS</a:t>
             </a:r>
           </a:p>
         </p:txBody>
@@ -5404,7 +6206,7 @@
         <p:spPr>
           <a:xfrm>
             <a:off x="685800" y="1051560"/>
-            <a:ext cx="10515600" cy="1463040"/>
+            <a:ext cx="10789920" cy="1554480"/>
           </a:xfrm>
           <a:prstGeom prst="rect">
             <a:avLst/>
@@ -5427,9 +6229,9 @@
                 <a:solidFill>
                   <a:srgbClr val="EDEFF4"/>
                 </a:solidFill>
-                <a:latin typeface="Archivo"/>
-              </a:rPr>
-              <a:t>Before encryption starts, every client says hello — in plain text.</a:t>
+                <a:latin typeface="Calibri"/>
+              </a:rPr>
+              <a:t>JA3 / JA3S: a published fingerprinting technique</a:t>
             </a:r>
           </a:p>
         </p:txBody>
@@ -5442,8 +6244,8 @@
         </p:nvSpPr>
         <p:spPr>
           <a:xfrm>
-            <a:off x="685800" y="2103120"/>
-            <a:ext cx="9601200" cy="1828800"/>
+            <a:off x="685800" y="2286000"/>
+            <a:ext cx="9875520" cy="713232"/>
           </a:xfrm>
           <a:prstGeom prst="rect">
             <a:avLst/>
@@ -5456,102 +6258,58 @@
           </a:bodyPr>
           <a:lstStyle/>
           <a:p>
-            <a:pPr algn="l">
-              <a:lnSpc>
-                <a:spcPct val="135000"/>
-              </a:lnSpc>
-            </a:pPr>
-            <a:r>
-              <a:rPr sz="1700" b="0">
+            <a:pPr>
+              <a:lnSpc>
+                <a:spcPct val="120000"/>
+              </a:lnSpc>
+            </a:pPr>
+            <a:r>
+              <a:rPr sz="1700">
                 <a:solidFill>
                   <a:srgbClr val="9AA3B5"/>
                 </a:solidFill>
-                <a:latin typeface="IBM Plex Sans"/>
-              </a:rPr>
-              <a:t>The TLS ClientHello: version, cipher list, extensions — sent unencrypted, always, by design. Different libraries write this "hello" differently. That structure is a fingerprint, sitting in the open.</a:t>
-            </a:r>
-          </a:p>
-        </p:txBody>
-      </p:sp>
-      <p:sp>
-        <p:nvSpPr>
-          <p:cNvPr id="7" name="Rounded Rectangle 6"/>
-          <p:cNvSpPr/>
-          <p:nvPr/>
-        </p:nvSpPr>
-        <p:spPr>
-          <a:xfrm>
-            <a:off x="685800" y="3749039"/>
-            <a:ext cx="10515600" cy="1188720"/>
-          </a:xfrm>
-          <a:prstGeom prst="roundRect">
-            <a:avLst>
-              <a:gd name="adj" fmla="val 6000"/>
-            </a:avLst>
-          </a:prstGeom>
-          <a:solidFill>
-            <a:srgbClr val="121826"/>
-          </a:solidFill>
-          <a:ln w="12700">
-            <a:solidFill>
-              <a:srgbClr val="232B3D"/>
-            </a:solidFill>
-          </a:ln>
-          <a:effectLst/>
-        </p:spPr>
-        <p:style>
-          <a:lnRef idx="1">
-            <a:schemeClr val="accent1"/>
-          </a:lnRef>
-          <a:fillRef idx="3">
-            <a:schemeClr val="accent1"/>
-          </a:fillRef>
-          <a:effectRef idx="2">
-            <a:schemeClr val="accent1"/>
-          </a:effectRef>
-          <a:fontRef idx="minor">
-            <a:schemeClr val="lt1"/>
-          </a:fontRef>
-        </p:style>
-        <p:txBody>
-          <a:bodyPr rtlCol="0" anchor="ctr" wrap="square" lIns="228600" rIns="228600" tIns="182880" bIns="182880"/>
-          <a:lstStyle/>
-          <a:p>
-            <a:pPr algn="ctr">
-              <a:lnSpc>
-                <a:spcPct val="125000"/>
-              </a:lnSpc>
-              <a:spcAft>
-                <a:spcPts val="400"/>
-              </a:spcAft>
-            </a:pPr>
-            <a:r>
-              <a:rPr sz="1300" b="0">
-                <a:solidFill>
-                  <a:srgbClr val="49C79A"/>
-                </a:solidFill>
-                <a:latin typeface="IBM Plex Mono"/>
-              </a:rPr>
-              <a:t>0040  00 00 0b 65 78 61 6d 70 6c 65 2e 63 6f 6d 00 0a  ...example.com..</a:t>
-            </a:r>
-          </a:p>
+                <a:latin typeface="Calibri"/>
+              </a:rPr>
+              <a:t>•  Right before encryption locks in, both sides send ONE message each in plain text: the "ClientHello" and "ServerHello".</a:t>
+            </a:r>
+          </a:p>
+        </p:txBody>
+      </p:sp>
+      <p:sp>
+        <p:nvSpPr>
+          <p:cNvPr id="7" name="TextBox 6"/>
+          <p:cNvSpPr txBox="1"/>
+          <p:nvPr/>
+        </p:nvSpPr>
+        <p:spPr>
+          <a:xfrm>
+            <a:off x="685800" y="2999232"/>
+            <a:ext cx="9875520" cy="713232"/>
+          </a:xfrm>
+          <a:prstGeom prst="rect">
+            <a:avLst/>
+          </a:prstGeom>
+          <a:noFill/>
+        </p:spPr>
+        <p:txBody>
+          <a:bodyPr wrap="square">
+            <a:spAutoFit/>
+          </a:bodyPr>
+          <a:lstStyle/>
           <a:p>
             <a:pPr>
               <a:lnSpc>
-                <a:spcPct val="125000"/>
-              </a:lnSpc>
-              <a:spcAft>
-                <a:spcPts val="400"/>
-              </a:spcAft>
-            </a:pPr>
-            <a:r>
-              <a:rPr sz="1300" b="0">
+                <a:spcPct val="120000"/>
+              </a:lnSpc>
+            </a:pPr>
+            <a:r>
+              <a:rPr sz="1700">
                 <a:solidFill>
                   <a:srgbClr val="9AA3B5"/>
                 </a:solidFill>
-                <a:latin typeface="IBM Plex Mono"/>
-              </a:rPr>
-              <a:t>0050  00 06 00 04 00 1d 00 17 00 0b 00 02 01 00 00 0d  ................</a:t>
+                <a:latin typeface="Calibri"/>
+              </a:rPr>
+              <a:t>•  Every TLS library (Chrome, curl, OpenSSL...) builds this handshake slightly differently — different ciphers, different order.</a:t>
             </a:r>
           </a:p>
         </p:txBody>
@@ -5564,8 +6322,8 @@
         </p:nvSpPr>
         <p:spPr>
           <a:xfrm>
-            <a:off x="685800" y="5120640"/>
-            <a:ext cx="8686800" cy="1828800"/>
+            <a:off x="685800" y="3712464"/>
+            <a:ext cx="9875520" cy="713232"/>
           </a:xfrm>
           <a:prstGeom prst="rect">
             <a:avLst/>
@@ -5578,19 +6336,58 @@
           </a:bodyPr>
           <a:lstStyle/>
           <a:p>
-            <a:pPr algn="l">
-              <a:lnSpc>
-                <a:spcPct val="135000"/>
-              </a:lnSpc>
-            </a:pPr>
-            <a:r>
-              <a:rPr sz="1300" b="0">
-                <a:solidFill>
-                  <a:srgbClr val="69728A"/>
-                </a:solidFill>
-                <a:latin typeface="IBM Plex Sans"/>
-              </a:rPr>
-              <a:t>Real bytes from pcaps/custom_client.pcap — the hostname is readable with no decryption at all.</a:t>
+            <a:pPr>
+              <a:lnSpc>
+                <a:spcPct val="120000"/>
+              </a:lnSpc>
+            </a:pPr>
+            <a:r>
+              <a:rPr sz="1700">
+                <a:solidFill>
+                  <a:srgbClr val="9AA3B5"/>
+                </a:solidFill>
+                <a:latin typeface="Calibri"/>
+              </a:rPr>
+              <a:t>•  JA3 (Salesforce, 2017) turns a ClientHello into one short hash. JA3S does the same for a ServerHello.</a:t>
+            </a:r>
+          </a:p>
+        </p:txBody>
+      </p:sp>
+      <p:sp>
+        <p:nvSpPr>
+          <p:cNvPr id="9" name="TextBox 8"/>
+          <p:cNvSpPr txBox="1"/>
+          <p:nvPr/>
+        </p:nvSpPr>
+        <p:spPr>
+          <a:xfrm>
+            <a:off x="685800" y="4425696"/>
+            <a:ext cx="9875520" cy="713232"/>
+          </a:xfrm>
+          <a:prstGeom prst="rect">
+            <a:avLst/>
+          </a:prstGeom>
+          <a:noFill/>
+        </p:spPr>
+        <p:txBody>
+          <a:bodyPr wrap="square">
+            <a:spAutoFit/>
+          </a:bodyPr>
+          <a:lstStyle/>
+          <a:p>
+            <a:pPr>
+              <a:lnSpc>
+                <a:spcPct val="120000"/>
+              </a:lnSpc>
+            </a:pPr>
+            <a:r>
+              <a:rPr sz="1700">
+                <a:solidFill>
+                  <a:srgbClr val="9AA3B5"/>
+                </a:solidFill>
+                <a:latin typeface="Calibri"/>
+              </a:rPr>
+              <a:t>•  This is a real, industry-standard technique — not something we invented for this project.</a:t>
             </a:r>
           </a:p>
         </p:txBody>
@@ -5684,9 +6481,9 @@
                 <a:solidFill>
                   <a:srgbClr val="69728A"/>
                 </a:solidFill>
-                <a:latin typeface="IBM Plex Mono"/>
-              </a:rPr>
-              <a:t>04 / 12</a:t>
+                <a:latin typeface="Consolas"/>
+              </a:rPr>
+              <a:t>04 / 14</a:t>
             </a:r>
           </a:p>
         </p:txBody>
@@ -5700,7 +6497,7 @@
         <p:spPr>
           <a:xfrm>
             <a:off x="685800" y="594360"/>
-            <a:ext cx="9144000" cy="365760"/>
+            <a:ext cx="10058400" cy="365760"/>
           </a:xfrm>
           <a:prstGeom prst="rect">
             <a:avLst/>
@@ -5719,13 +6516,13 @@
               </a:lnSpc>
             </a:pPr>
             <a:r>
-              <a:rPr sz="1300" b="0">
+              <a:rPr sz="1300" b="1">
                 <a:solidFill>
                   <a:srgbClr val="E8A33D"/>
                 </a:solidFill>
-                <a:latin typeface="IBM Plex Mono"/>
-              </a:rPr>
-              <a:t>THE PUBLISHED TECHNIQUE — JA3 / JA3S</a:t>
+                <a:latin typeface="Consolas"/>
+              </a:rPr>
+              <a:t>PROJECT SCOPE</a:t>
             </a:r>
           </a:p>
         </p:txBody>
@@ -5739,7 +6536,7 @@
         <p:spPr>
           <a:xfrm>
             <a:off x="685800" y="1051560"/>
-            <a:ext cx="10515600" cy="1463040"/>
+            <a:ext cx="10789920" cy="1554480"/>
           </a:xfrm>
           <a:prstGeom prst="rect">
             <a:avLst/>
@@ -5762,271 +6559,87 @@
                 <a:solidFill>
                   <a:srgbClr val="EDEFF4"/>
                 </a:solidFill>
-                <a:latin typeface="Archivo"/>
-              </a:rPr>
-              <a:t>Five fields, glued together, hashed.</a:t>
-            </a:r>
-          </a:p>
-        </p:txBody>
-      </p:sp>
-      <p:sp>
-        <p:nvSpPr>
-          <p:cNvPr id="6" name="Rounded Rectangle 5"/>
-          <p:cNvSpPr/>
-          <p:nvPr/>
-        </p:nvSpPr>
-        <p:spPr>
-          <a:xfrm>
-            <a:off x="685800" y="2286000"/>
-            <a:ext cx="5120640" cy="2926080"/>
-          </a:xfrm>
-          <a:prstGeom prst="roundRect">
-            <a:avLst>
-              <a:gd name="adj" fmla="val 6000"/>
-            </a:avLst>
-          </a:prstGeom>
-          <a:solidFill>
-            <a:srgbClr val="121826"/>
-          </a:solidFill>
-          <a:ln w="12700">
-            <a:solidFill>
-              <a:srgbClr val="232B3D"/>
-            </a:solidFill>
-          </a:ln>
-          <a:effectLst/>
-        </p:spPr>
-        <p:style>
-          <a:lnRef idx="1">
-            <a:schemeClr val="accent1"/>
-          </a:lnRef>
-          <a:fillRef idx="3">
-            <a:schemeClr val="accent1"/>
-          </a:fillRef>
-          <a:effectRef idx="2">
-            <a:schemeClr val="accent1"/>
-          </a:effectRef>
-          <a:fontRef idx="minor">
-            <a:schemeClr val="lt1"/>
-          </a:fontRef>
-        </p:style>
-        <p:txBody>
-          <a:bodyPr rtlCol="0" anchor="ctr" wrap="square" lIns="228600" rIns="228600" tIns="182880" bIns="182880"/>
-          <a:lstStyle/>
-          <a:p>
-            <a:pPr algn="ctr">
-              <a:lnSpc>
-                <a:spcPct val="125000"/>
-              </a:lnSpc>
-              <a:spcAft>
-                <a:spcPts val="400"/>
-              </a:spcAft>
-            </a:pPr>
-            <a:r>
-              <a:rPr sz="1200" b="0">
-                <a:solidFill>
-                  <a:srgbClr val="69728A"/>
-                </a:solidFill>
-                <a:latin typeface="IBM Plex Mono"/>
-              </a:rPr>
-              <a:t>JA3 — the client</a:t>
-            </a:r>
-          </a:p>
+                <a:latin typeface="Calibri"/>
+              </a:rPr>
+              <a:t>What we were asked to implement</a:t>
+            </a:r>
+          </a:p>
+        </p:txBody>
+      </p:sp>
+      <p:sp>
+        <p:nvSpPr>
+          <p:cNvPr id="6" name="TextBox 5"/>
+          <p:cNvSpPr txBox="1"/>
+          <p:nvPr/>
+        </p:nvSpPr>
+        <p:spPr>
+          <a:xfrm>
+            <a:off x="685800" y="2103120"/>
+            <a:ext cx="9875520" cy="621792"/>
+          </a:xfrm>
+          <a:prstGeom prst="rect">
+            <a:avLst/>
+          </a:prstGeom>
+          <a:noFill/>
+        </p:spPr>
+        <p:txBody>
+          <a:bodyPr wrap="square">
+            <a:spAutoFit/>
+          </a:bodyPr>
+          <a:lstStyle/>
           <a:p>
             <a:pPr>
               <a:lnSpc>
-                <a:spcPct val="125000"/>
-              </a:lnSpc>
-              <a:spcAft>
-                <a:spcPts val="400"/>
-              </a:spcAft>
-            </a:pPr>
-            <a:r>
-              <a:rPr sz="1200" b="0">
-                <a:solidFill>
-                  <a:srgbClr val="69728A"/>
-                </a:solidFill>
-                <a:latin typeface="IBM Plex Mono"/>
-              </a:rPr>
-              <a:t>SSLVersion,Cipher,SSLExtension,</a:t>
-            </a:r>
-            <a:br/>
-            <a:r>
-              <a:rPr sz="1200" b="0">
-                <a:solidFill>
-                  <a:srgbClr val="69728A"/>
-                </a:solidFill>
-                <a:latin typeface="IBM Plex Mono"/>
-              </a:rPr>
-              <a:t>EllipticCurve,PointFormat</a:t>
-            </a:r>
-          </a:p>
+                <a:spcPct val="120000"/>
+              </a:lnSpc>
+            </a:pPr>
+            <a:r>
+              <a:rPr sz="1800">
+                <a:solidFill>
+                  <a:srgbClr val="9AA3B5"/>
+                </a:solidFill>
+                <a:latin typeface="Calibri"/>
+              </a:rPr>
+              <a:t>•  Passively capture TLS handshakes (ClientHello / ServerHello)</a:t>
+            </a:r>
+          </a:p>
+        </p:txBody>
+      </p:sp>
+      <p:sp>
+        <p:nvSpPr>
+          <p:cNvPr id="7" name="TextBox 6"/>
+          <p:cNvSpPr txBox="1"/>
+          <p:nvPr/>
+        </p:nvSpPr>
+        <p:spPr>
+          <a:xfrm>
+            <a:off x="685800" y="2724912"/>
+            <a:ext cx="9875520" cy="621792"/>
+          </a:xfrm>
+          <a:prstGeom prst="rect">
+            <a:avLst/>
+          </a:prstGeom>
+          <a:noFill/>
+        </p:spPr>
+        <p:txBody>
+          <a:bodyPr wrap="square">
+            <a:spAutoFit/>
+          </a:bodyPr>
+          <a:lstStyle/>
           <a:p>
             <a:pPr>
               <a:lnSpc>
-                <a:spcPct val="125000"/>
-              </a:lnSpc>
-              <a:spcAft>
-                <a:spcPts val="400"/>
-              </a:spcAft>
-            </a:pPr>
-            <a:r>
-              <a:rPr sz="1300" b="0">
-                <a:solidFill>
-                  <a:srgbClr val="EDEFF4"/>
-                </a:solidFill>
-                <a:latin typeface="IBM Plex Mono"/>
-              </a:rPr>
-              <a:t>771,4867-4866-4865-...,</a:t>
-            </a:r>
-            <a:br/>
-            <a:r>
-              <a:rPr sz="1300" b="0">
-                <a:solidFill>
-                  <a:srgbClr val="EDEFF4"/>
-                </a:solidFill>
-                <a:latin typeface="IBM Plex Mono"/>
-              </a:rPr>
-              <a:t>43-51-0-11-10-13-16,29-23-24-25,0</a:t>
-            </a:r>
-          </a:p>
-          <a:p>
-            <a:pPr>
-              <a:lnSpc>
-                <a:spcPct val="125000"/>
-              </a:lnSpc>
-              <a:spcAft>
-                <a:spcPts val="400"/>
-              </a:spcAft>
-            </a:pPr>
-            <a:r>
-              <a:rPr sz="1300" b="1">
-                <a:solidFill>
-                  <a:srgbClr val="E8A33D"/>
-                </a:solidFill>
-                <a:latin typeface="IBM Plex Mono"/>
-              </a:rPr>
-              <a:t>-&gt; 375c6162a492dfbf2795909110ce8424</a:t>
-            </a:r>
-          </a:p>
-        </p:txBody>
-      </p:sp>
-      <p:sp>
-        <p:nvSpPr>
-          <p:cNvPr id="7" name="Rounded Rectangle 6"/>
-          <p:cNvSpPr/>
-          <p:nvPr/>
-        </p:nvSpPr>
-        <p:spPr>
-          <a:xfrm>
-            <a:off x="6080760" y="2286000"/>
-            <a:ext cx="5120640" cy="2926080"/>
-          </a:xfrm>
-          <a:prstGeom prst="roundRect">
-            <a:avLst>
-              <a:gd name="adj" fmla="val 6000"/>
-            </a:avLst>
-          </a:prstGeom>
-          <a:solidFill>
-            <a:srgbClr val="121826"/>
-          </a:solidFill>
-          <a:ln w="12700">
-            <a:solidFill>
-              <a:srgbClr val="232B3D"/>
-            </a:solidFill>
-          </a:ln>
-          <a:effectLst/>
-        </p:spPr>
-        <p:style>
-          <a:lnRef idx="1">
-            <a:schemeClr val="accent1"/>
-          </a:lnRef>
-          <a:fillRef idx="3">
-            <a:schemeClr val="accent1"/>
-          </a:fillRef>
-          <a:effectRef idx="2">
-            <a:schemeClr val="accent1"/>
-          </a:effectRef>
-          <a:fontRef idx="minor">
-            <a:schemeClr val="lt1"/>
-          </a:fontRef>
-        </p:style>
-        <p:txBody>
-          <a:bodyPr rtlCol="0" anchor="ctr" wrap="square" lIns="228600" rIns="228600" tIns="182880" bIns="182880"/>
-          <a:lstStyle/>
-          <a:p>
-            <a:pPr algn="ctr">
-              <a:lnSpc>
-                <a:spcPct val="125000"/>
-              </a:lnSpc>
-              <a:spcAft>
-                <a:spcPts val="400"/>
-              </a:spcAft>
-            </a:pPr>
-            <a:r>
-              <a:rPr sz="1200" b="0">
-                <a:solidFill>
-                  <a:srgbClr val="69728A"/>
-                </a:solidFill>
-                <a:latin typeface="IBM Plex Mono"/>
-              </a:rPr>
-              <a:t>JA3S — the server's reply</a:t>
-            </a:r>
-          </a:p>
-          <a:p>
-            <a:pPr>
-              <a:lnSpc>
-                <a:spcPct val="125000"/>
-              </a:lnSpc>
-              <a:spcAft>
-                <a:spcPts val="400"/>
-              </a:spcAft>
-            </a:pPr>
-            <a:r>
-              <a:rPr sz="1200" b="0">
-                <a:solidFill>
-                  <a:srgbClr val="69728A"/>
-                </a:solidFill>
-                <a:latin typeface="IBM Plex Mono"/>
-              </a:rPr>
-              <a:t>SSLVersion,Cipher,SSLExtension</a:t>
-            </a:r>
-          </a:p>
-          <a:p>
-            <a:pPr>
-              <a:lnSpc>
-                <a:spcPct val="125000"/>
-              </a:lnSpc>
-              <a:spcAft>
-                <a:spcPts val="400"/>
-              </a:spcAft>
-            </a:pPr>
-            <a:r>
-              <a:rPr sz="1300" b="0">
-                <a:solidFill>
-                  <a:srgbClr val="EDEFF4"/>
-                </a:solidFill>
-                <a:latin typeface="IBM Plex Mono"/>
-              </a:rPr>
-              <a:t>771,4867,51-43</a:t>
-            </a:r>
-          </a:p>
-          <a:p>
-            <a:pPr>
-              <a:lnSpc>
-                <a:spcPct val="125000"/>
-              </a:lnSpc>
-              <a:spcAft>
-                <a:spcPts val="400"/>
-              </a:spcAft>
-            </a:pPr>
-            <a:r>
-              <a:rPr sz="1300" b="1">
-                <a:solidFill>
-                  <a:srgbClr val="E8A33D"/>
-                </a:solidFill>
-                <a:latin typeface="IBM Plex Mono"/>
-              </a:rPr>
-              <a:t>-&gt; d75f9129bb5d05492a65ff78e081bcb2</a:t>
+                <a:spcPct val="120000"/>
+              </a:lnSpc>
+            </a:pPr>
+            <a:r>
+              <a:rPr sz="1800">
+                <a:solidFill>
+                  <a:srgbClr val="9AA3B5"/>
+                </a:solidFill>
+                <a:latin typeface="Calibri"/>
+              </a:rPr>
+              <a:t>•  Compute JA3 (client) and JA3S (server) fingerprints</a:t>
             </a:r>
           </a:p>
         </p:txBody>
@@ -6039,8 +6652,8 @@
         </p:nvSpPr>
         <p:spPr>
           <a:xfrm>
-            <a:off x="685800" y="5486400"/>
-            <a:ext cx="8686800" cy="1828800"/>
+            <a:off x="685800" y="3346704"/>
+            <a:ext cx="9875520" cy="621792"/>
           </a:xfrm>
           <a:prstGeom prst="rect">
             <a:avLst/>
@@ -6053,19 +6666,136 @@
           </a:bodyPr>
           <a:lstStyle/>
           <a:p>
-            <a:pPr algn="l">
-              <a:lnSpc>
-                <a:spcPct val="135000"/>
-              </a:lnSpc>
-            </a:pPr>
-            <a:r>
-              <a:rPr sz="1300" b="0">
-                <a:solidFill>
-                  <a:srgbClr val="69728A"/>
-                </a:solidFill>
-                <a:latin typeface="IBM Plex Sans"/>
-              </a:rPr>
-              <a:t>Real curl -&gt; example.com capture. GREASE values (RFC 8701) are stripped from every field first.</a:t>
+            <a:pPr>
+              <a:lnSpc>
+                <a:spcPct val="120000"/>
+              </a:lnSpc>
+            </a:pPr>
+            <a:r>
+              <a:rPr sz="1800">
+                <a:solidFill>
+                  <a:srgbClr val="9AA3B5"/>
+                </a:solidFill>
+                <a:latin typeface="Calibri"/>
+              </a:rPr>
+              <a:t>•  Build a small reference database of known fingerprints</a:t>
+            </a:r>
+          </a:p>
+        </p:txBody>
+      </p:sp>
+      <p:sp>
+        <p:nvSpPr>
+          <p:cNvPr id="9" name="TextBox 8"/>
+          <p:cNvSpPr txBox="1"/>
+          <p:nvPr/>
+        </p:nvSpPr>
+        <p:spPr>
+          <a:xfrm>
+            <a:off x="685800" y="3968496"/>
+            <a:ext cx="9875520" cy="621792"/>
+          </a:xfrm>
+          <a:prstGeom prst="rect">
+            <a:avLst/>
+          </a:prstGeom>
+          <a:noFill/>
+        </p:spPr>
+        <p:txBody>
+          <a:bodyPr wrap="square">
+            <a:spAutoFit/>
+          </a:bodyPr>
+          <a:lstStyle/>
+          <a:p>
+            <a:pPr>
+              <a:lnSpc>
+                <a:spcPct val="120000"/>
+              </a:lnSpc>
+            </a:pPr>
+            <a:r>
+              <a:rPr sz="1800">
+                <a:solidFill>
+                  <a:srgbClr val="9AA3B5"/>
+                </a:solidFill>
+                <a:latin typeface="Calibri"/>
+              </a:rPr>
+              <a:t>•  Match a new capture against that database and identify the client</a:t>
+            </a:r>
+          </a:p>
+        </p:txBody>
+      </p:sp>
+      <p:sp>
+        <p:nvSpPr>
+          <p:cNvPr id="10" name="TextBox 9"/>
+          <p:cNvSpPr txBox="1"/>
+          <p:nvPr/>
+        </p:nvSpPr>
+        <p:spPr>
+          <a:xfrm>
+            <a:off x="685800" y="4590288"/>
+            <a:ext cx="9875520" cy="621792"/>
+          </a:xfrm>
+          <a:prstGeom prst="rect">
+            <a:avLst/>
+          </a:prstGeom>
+          <a:noFill/>
+        </p:spPr>
+        <p:txBody>
+          <a:bodyPr wrap="square">
+            <a:spAutoFit/>
+          </a:bodyPr>
+          <a:lstStyle/>
+          <a:p>
+            <a:pPr>
+              <a:lnSpc>
+                <a:spcPct val="120000"/>
+              </a:lnSpc>
+            </a:pPr>
+            <a:r>
+              <a:rPr sz="1800">
+                <a:solidFill>
+                  <a:srgbClr val="9AA3B5"/>
+                </a:solidFill>
+                <a:latin typeface="Calibri"/>
+              </a:rPr>
+              <a:t>•  Demonstrate on at least 5 real, distinct clients</a:t>
+            </a:r>
+          </a:p>
+        </p:txBody>
+      </p:sp>
+      <p:sp>
+        <p:nvSpPr>
+          <p:cNvPr id="11" name="TextBox 10"/>
+          <p:cNvSpPr txBox="1"/>
+          <p:nvPr/>
+        </p:nvSpPr>
+        <p:spPr>
+          <a:xfrm>
+            <a:off x="685800" y="5212080"/>
+            <a:ext cx="9875520" cy="621792"/>
+          </a:xfrm>
+          <a:prstGeom prst="rect">
+            <a:avLst/>
+          </a:prstGeom>
+          <a:noFill/>
+        </p:spPr>
+        <p:txBody>
+          <a:bodyPr wrap="square">
+            <a:spAutoFit/>
+          </a:bodyPr>
+          <a:lstStyle/>
+          <a:p>
+            <a:pPr>
+              <a:lnSpc>
+                <a:spcPct val="120000"/>
+              </a:lnSpc>
+            </a:pPr>
+            <a:r>
+              <a:rPr sz="1800">
+                <a:solidFill>
+                  <a:srgbClr val="9AA3B5"/>
+                </a:solidFill>
+                <a:latin typeface="Calibri"/>
+              </a:rPr>
+              <a:t>•  Explain the security use case AND the honest limitations</a:t>
             </a:r>
           </a:p>
         </p:txBody>
@@ -6159,9 +6889,9 @@
                 <a:solidFill>
                   <a:srgbClr val="69728A"/>
                 </a:solidFill>
-                <a:latin typeface="IBM Plex Mono"/>
-              </a:rPr>
-              <a:t>05 / 12</a:t>
+                <a:latin typeface="Consolas"/>
+              </a:rPr>
+              <a:t>05 / 14</a:t>
             </a:r>
           </a:p>
         </p:txBody>
@@ -6175,7 +6905,7 @@
         <p:spPr>
           <a:xfrm>
             <a:off x="685800" y="594360"/>
-            <a:ext cx="9144000" cy="365760"/>
+            <a:ext cx="10058400" cy="365760"/>
           </a:xfrm>
           <a:prstGeom prst="rect">
             <a:avLst/>
@@ -6194,11 +6924,11 @@
               </a:lnSpc>
             </a:pPr>
             <a:r>
-              <a:rPr sz="1300" b="0">
+              <a:rPr sz="1300" b="1">
                 <a:solidFill>
                   <a:srgbClr val="E8A33D"/>
                 </a:solidFill>
-                <a:latin typeface="IBM Plex Mono"/>
+                <a:latin typeface="Consolas"/>
               </a:rPr>
               <a:t>HOW IT'S BUILT</a:t>
             </a:r>
@@ -6214,7 +6944,7 @@
         <p:spPr>
           <a:xfrm>
             <a:off x="685800" y="1051560"/>
-            <a:ext cx="10515600" cy="1463040"/>
+            <a:ext cx="10789920" cy="1554480"/>
           </a:xfrm>
           <a:prstGeom prst="rect">
             <a:avLst/>
@@ -6233,13 +6963,13 @@
               </a:lnSpc>
             </a:pPr>
             <a:r>
-              <a:rPr sz="3000" b="1">
+              <a:rPr sz="3400" b="1">
                 <a:solidFill>
                   <a:srgbClr val="EDEFF4"/>
                 </a:solidFill>
-                <a:latin typeface="Archivo"/>
-              </a:rPr>
-              <a:t>One pipeline, independently tested at every stage.</a:t>
+                <a:latin typeface="Calibri"/>
+              </a:rPr>
+              <a:t>The pipeline</a:t>
             </a:r>
           </a:p>
         </p:txBody>
@@ -6252,12 +6982,12 @@
         </p:nvSpPr>
         <p:spPr>
           <a:xfrm>
-            <a:off x="685800" y="2743200"/>
+            <a:off x="685800" y="2834640"/>
             <a:ext cx="1874519" cy="822960"/>
           </a:xfrm>
           <a:prstGeom prst="roundRect">
             <a:avLst>
-              <a:gd name="adj" fmla="val 6000"/>
+              <a:gd name="adj" fmla="val 5000"/>
             </a:avLst>
           </a:prstGeom>
           <a:solidFill>
@@ -6285,7 +7015,7 @@
           </a:fontRef>
         </p:style>
         <p:txBody>
-          <a:bodyPr rtlCol="0" anchor="ctr" wrap="square" lIns="228600" rIns="228600" tIns="182880" bIns="182880"/>
+          <a:bodyPr rtlCol="0" anchor="ctr" wrap="square" lIns="256032" rIns="256032" tIns="201168" bIns="201168"/>
           <a:lstStyle/>
           <a:p>
             <a:pPr algn="ctr">
@@ -6293,7 +7023,7 @@
                 <a:spcPct val="125000"/>
               </a:lnSpc>
               <a:spcAft>
-                <a:spcPts val="400"/>
+                <a:spcPts val="500"/>
               </a:spcAft>
             </a:pPr>
             <a:r>
@@ -6301,7 +7031,7 @@
                 <a:solidFill>
                   <a:srgbClr val="EDEFF4"/>
                 </a:solidFill>
-                <a:latin typeface="IBM Plex Mono"/>
+                <a:latin typeface="Consolas"/>
               </a:rPr>
               <a:t>.pcap</a:t>
             </a:r>
@@ -6316,7 +7046,7 @@
         </p:nvSpPr>
         <p:spPr>
           <a:xfrm>
-            <a:off x="2560319" y="2944368"/>
+            <a:off x="2560319" y="3035808"/>
             <a:ext cx="228600" cy="457200"/>
           </a:xfrm>
           <a:prstGeom prst="rect">
@@ -6340,7 +7070,7 @@
                 <a:solidFill>
                   <a:srgbClr val="69728A"/>
                 </a:solidFill>
-                <a:latin typeface="IBM Plex Mono"/>
+                <a:latin typeface="Consolas"/>
               </a:rPr>
               <a:t>-&gt;</a:t>
             </a:r>
@@ -6355,12 +7085,12 @@
         </p:nvSpPr>
         <p:spPr>
           <a:xfrm>
-            <a:off x="2788919" y="2743200"/>
+            <a:off x="2788919" y="2834640"/>
             <a:ext cx="1874519" cy="822960"/>
           </a:xfrm>
           <a:prstGeom prst="roundRect">
             <a:avLst>
-              <a:gd name="adj" fmla="val 6000"/>
+              <a:gd name="adj" fmla="val 5000"/>
             </a:avLst>
           </a:prstGeom>
           <a:solidFill>
@@ -6388,7 +7118,7 @@
           </a:fontRef>
         </p:style>
         <p:txBody>
-          <a:bodyPr rtlCol="0" anchor="ctr" wrap="square" lIns="228600" rIns="228600" tIns="182880" bIns="182880"/>
+          <a:bodyPr rtlCol="0" anchor="ctr" wrap="square" lIns="256032" rIns="256032" tIns="201168" bIns="201168"/>
           <a:lstStyle/>
           <a:p>
             <a:pPr algn="ctr">
@@ -6396,7 +7126,7 @@
                 <a:spcPct val="125000"/>
               </a:lnSpc>
               <a:spcAft>
-                <a:spcPts val="400"/>
+                <a:spcPts val="500"/>
               </a:spcAft>
             </a:pPr>
             <a:r>
@@ -6404,7 +7134,7 @@
                 <a:solidFill>
                   <a:srgbClr val="EDEFF4"/>
                 </a:solidFill>
-                <a:latin typeface="IBM Plex Mono"/>
+                <a:latin typeface="Consolas"/>
               </a:rPr>
               <a:t>parser.py</a:t>
             </a:r>
@@ -6419,7 +7149,7 @@
         </p:nvSpPr>
         <p:spPr>
           <a:xfrm>
-            <a:off x="4663438" y="2944368"/>
+            <a:off x="4663438" y="3035808"/>
             <a:ext cx="228600" cy="457200"/>
           </a:xfrm>
           <a:prstGeom prst="rect">
@@ -6443,7 +7173,7 @@
                 <a:solidFill>
                   <a:srgbClr val="69728A"/>
                 </a:solidFill>
-                <a:latin typeface="IBM Plex Mono"/>
+                <a:latin typeface="Consolas"/>
               </a:rPr>
               <a:t>-&gt;</a:t>
             </a:r>
@@ -6458,12 +7188,12 @@
         </p:nvSpPr>
         <p:spPr>
           <a:xfrm>
-            <a:off x="4892038" y="2743200"/>
+            <a:off x="4892038" y="2834640"/>
             <a:ext cx="1874519" cy="822960"/>
           </a:xfrm>
           <a:prstGeom prst="roundRect">
             <a:avLst>
-              <a:gd name="adj" fmla="val 6000"/>
+              <a:gd name="adj" fmla="val 5000"/>
             </a:avLst>
           </a:prstGeom>
           <a:solidFill>
@@ -6491,7 +7221,7 @@
           </a:fontRef>
         </p:style>
         <p:txBody>
-          <a:bodyPr rtlCol="0" anchor="ctr" wrap="square" lIns="228600" rIns="228600" tIns="182880" bIns="182880"/>
+          <a:bodyPr rtlCol="0" anchor="ctr" wrap="square" lIns="256032" rIns="256032" tIns="201168" bIns="201168"/>
           <a:lstStyle/>
           <a:p>
             <a:pPr algn="ctr">
@@ -6499,7 +7229,7 @@
                 <a:spcPct val="125000"/>
               </a:lnSpc>
               <a:spcAft>
-                <a:spcPts val="400"/>
+                <a:spcPts val="500"/>
               </a:spcAft>
             </a:pPr>
             <a:r>
@@ -6507,9 +7237,9 @@
                 <a:solidFill>
                   <a:srgbClr val="EDEFF4"/>
                 </a:solidFill>
-                <a:latin typeface="IBM Plex Mono"/>
-              </a:rPr>
-              <a:t>ja3 / ja3s / ja4</a:t>
+                <a:latin typeface="Consolas"/>
+              </a:rPr>
+              <a:t>JA3 / JA3S / JA4</a:t>
             </a:r>
           </a:p>
         </p:txBody>
@@ -6522,7 +7252,7 @@
         </p:nvSpPr>
         <p:spPr>
           <a:xfrm>
-            <a:off x="6766557" y="2944368"/>
+            <a:off x="6766557" y="3035808"/>
             <a:ext cx="228600" cy="457200"/>
           </a:xfrm>
           <a:prstGeom prst="rect">
@@ -6546,7 +7276,7 @@
                 <a:solidFill>
                   <a:srgbClr val="69728A"/>
                 </a:solidFill>
-                <a:latin typeface="IBM Plex Mono"/>
+                <a:latin typeface="Consolas"/>
               </a:rPr>
               <a:t>-&gt;</a:t>
             </a:r>
@@ -6561,12 +7291,12 @@
         </p:nvSpPr>
         <p:spPr>
           <a:xfrm>
-            <a:off x="6995157" y="2743200"/>
+            <a:off x="6995157" y="2834640"/>
             <a:ext cx="1874519" cy="822960"/>
           </a:xfrm>
           <a:prstGeom prst="roundRect">
             <a:avLst>
-              <a:gd name="adj" fmla="val 6000"/>
+              <a:gd name="adj" fmla="val 5000"/>
             </a:avLst>
           </a:prstGeom>
           <a:solidFill>
@@ -6594,7 +7324,7 @@
           </a:fontRef>
         </p:style>
         <p:txBody>
-          <a:bodyPr rtlCol="0" anchor="ctr" wrap="square" lIns="228600" rIns="228600" tIns="182880" bIns="182880"/>
+          <a:bodyPr rtlCol="0" anchor="ctr" wrap="square" lIns="256032" rIns="256032" tIns="201168" bIns="201168"/>
           <a:lstStyle/>
           <a:p>
             <a:pPr algn="ctr">
@@ -6602,7 +7332,7 @@
                 <a:spcPct val="125000"/>
               </a:lnSpc>
               <a:spcAft>
-                <a:spcPts val="400"/>
+                <a:spcPts val="500"/>
               </a:spcAft>
             </a:pPr>
             <a:r>
@@ -6610,7 +7340,7 @@
                 <a:solidFill>
                   <a:srgbClr val="EDEFF4"/>
                 </a:solidFill>
-                <a:latin typeface="IBM Plex Mono"/>
+                <a:latin typeface="Consolas"/>
               </a:rPr>
               <a:t>database.py</a:t>
             </a:r>
@@ -6625,7 +7355,7 @@
         </p:nvSpPr>
         <p:spPr>
           <a:xfrm>
-            <a:off x="8869676" y="2944368"/>
+            <a:off x="8869676" y="3035808"/>
             <a:ext cx="228600" cy="457200"/>
           </a:xfrm>
           <a:prstGeom prst="rect">
@@ -6649,7 +7379,7 @@
                 <a:solidFill>
                   <a:srgbClr val="69728A"/>
                 </a:solidFill>
-                <a:latin typeface="IBM Plex Mono"/>
+                <a:latin typeface="Consolas"/>
               </a:rPr>
               <a:t>-&gt;</a:t>
             </a:r>
@@ -6664,12 +7394,12 @@
         </p:nvSpPr>
         <p:spPr>
           <a:xfrm>
-            <a:off x="9098276" y="2743200"/>
+            <a:off x="9098276" y="2834640"/>
             <a:ext cx="1874519" cy="822960"/>
           </a:xfrm>
           <a:prstGeom prst="roundRect">
             <a:avLst>
-              <a:gd name="adj" fmla="val 6000"/>
+              <a:gd name="adj" fmla="val 5000"/>
             </a:avLst>
           </a:prstGeom>
           <a:solidFill>
@@ -6697,7 +7427,7 @@
           </a:fontRef>
         </p:style>
         <p:txBody>
-          <a:bodyPr rtlCol="0" anchor="ctr" wrap="square" lIns="228600" rIns="228600" tIns="182880" bIns="182880"/>
+          <a:bodyPr rtlCol="0" anchor="ctr" wrap="square" lIns="256032" rIns="256032" tIns="201168" bIns="201168"/>
           <a:lstStyle/>
           <a:p>
             <a:pPr algn="ctr">
@@ -6705,7 +7435,7 @@
                 <a:spcPct val="125000"/>
               </a:lnSpc>
               <a:spcAft>
-                <a:spcPts val="400"/>
+                <a:spcPts val="500"/>
               </a:spcAft>
             </a:pPr>
             <a:r>
@@ -6713,9 +7443,9 @@
                 <a:solidFill>
                   <a:srgbClr val="EDEFF4"/>
                 </a:solidFill>
-                <a:latin typeface="IBM Plex Mono"/>
-              </a:rPr>
-              <a:t>CLI report</a:t>
+                <a:latin typeface="Consolas"/>
+              </a:rPr>
+              <a:t>CLI output</a:t>
             </a:r>
           </a:p>
         </p:txBody>
@@ -6728,7 +7458,7 @@
         </p:nvSpPr>
         <p:spPr>
           <a:xfrm>
-            <a:off x="685800" y="4023360"/>
+            <a:off x="685800" y="4114800"/>
             <a:ext cx="9601200" cy="1828800"/>
           </a:xfrm>
           <a:prstGeom prst="rect">
@@ -6752,9 +7482,9 @@
                 <a:solidFill>
                   <a:srgbClr val="9AA3B5"/>
                 </a:solidFill>
-                <a:latin typeface="IBM Plex Sans"/>
-              </a:rPr>
-              <a:t>ClientHello/ServerHello bytes are parsed by hand against the RFC layout. Every arrow above is a separately unit-tested function.</a:t>
+                <a:latin typeface="Calibri"/>
+              </a:rPr>
+              <a:t>Every stage is a separate, independently-tested Python module — the handshake is parsed byte-by-byte against the real TLS spec, not guessed.</a:t>
             </a:r>
           </a:p>
         </p:txBody>
@@ -6848,9 +7578,9 @@
                 <a:solidFill>
                   <a:srgbClr val="69728A"/>
                 </a:solidFill>
-                <a:latin typeface="IBM Plex Mono"/>
-              </a:rPr>
-              <a:t>06 / 12</a:t>
+                <a:latin typeface="Consolas"/>
+              </a:rPr>
+              <a:t>06 / 14</a:t>
             </a:r>
           </a:p>
         </p:txBody>
@@ -6864,7 +7594,7 @@
         <p:spPr>
           <a:xfrm>
             <a:off x="685800" y="594360"/>
-            <a:ext cx="9144000" cy="365760"/>
+            <a:ext cx="10058400" cy="365760"/>
           </a:xfrm>
           <a:prstGeom prst="rect">
             <a:avLst/>
@@ -6883,13 +7613,13 @@
               </a:lnSpc>
             </a:pPr>
             <a:r>
-              <a:rPr sz="1300" b="0">
+              <a:rPr sz="1300" b="1">
                 <a:solidFill>
                   <a:srgbClr val="E8A33D"/>
                 </a:solidFill>
-                <a:latin typeface="IBM Plex Mono"/>
-              </a:rPr>
-              <a:t>EXPERIMENT — FIVE REAL CLIENTS, ONE REAL SERVER</a:t>
+                <a:latin typeface="Consolas"/>
+              </a:rPr>
+              <a:t>REFERENCE DATABASE</a:t>
             </a:r>
           </a:p>
         </p:txBody>
@@ -6903,7 +7633,7 @@
         <p:spPr>
           <a:xfrm>
             <a:off x="685800" y="1051560"/>
-            <a:ext cx="10515600" cy="1463040"/>
+            <a:ext cx="10789920" cy="1554480"/>
           </a:xfrm>
           <a:prstGeom prst="rect">
             <a:avLst/>
@@ -6922,13 +7652,404 @@
               </a:lnSpc>
             </a:pPr>
             <a:r>
+              <a:rPr sz="3200" b="1">
+                <a:solidFill>
+                  <a:srgbClr val="EDEFF4"/>
+                </a:solidFill>
+                <a:latin typeface="Calibri"/>
+              </a:rPr>
+              <a:t>A notebook of known fingerprints</a:t>
+            </a:r>
+          </a:p>
+        </p:txBody>
+      </p:sp>
+      <p:sp>
+        <p:nvSpPr>
+          <p:cNvPr id="6" name="TextBox 5"/>
+          <p:cNvSpPr txBox="1"/>
+          <p:nvPr/>
+        </p:nvSpPr>
+        <p:spPr>
+          <a:xfrm>
+            <a:off x="685800" y="2148840"/>
+            <a:ext cx="9875520" cy="1828800"/>
+          </a:xfrm>
+          <a:prstGeom prst="rect">
+            <a:avLst/>
+          </a:prstGeom>
+          <a:noFill/>
+        </p:spPr>
+        <p:txBody>
+          <a:bodyPr wrap="square">
+            <a:spAutoFit/>
+          </a:bodyPr>
+          <a:lstStyle/>
+          <a:p>
+            <a:pPr algn="l">
+              <a:lnSpc>
+                <a:spcPct val="135000"/>
+              </a:lnSpc>
+            </a:pPr>
+            <a:r>
+              <a:rPr sz="1700" b="0">
+                <a:solidFill>
+                  <a:srgbClr val="9AA3B5"/>
+                </a:solidFill>
+                <a:latin typeface="Calibri"/>
+              </a:rPr>
+              <a:t>Every entry was computed from a real, captured network connection — never typed by hand or copied from a public list.</a:t>
+            </a:r>
+          </a:p>
+        </p:txBody>
+      </p:sp>
+      <p:sp>
+        <p:nvSpPr>
+          <p:cNvPr id="7" name="Rounded Rectangle 6"/>
+          <p:cNvSpPr/>
+          <p:nvPr/>
+        </p:nvSpPr>
+        <p:spPr>
+          <a:xfrm>
+            <a:off x="685800" y="2926080"/>
+            <a:ext cx="10515600" cy="2651760"/>
+          </a:xfrm>
+          <a:prstGeom prst="roundRect">
+            <a:avLst>
+              <a:gd name="adj" fmla="val 5000"/>
+            </a:avLst>
+          </a:prstGeom>
+          <a:solidFill>
+            <a:srgbClr val="121826"/>
+          </a:solidFill>
+          <a:ln w="12700">
+            <a:solidFill>
+              <a:srgbClr val="232B3D"/>
+            </a:solidFill>
+          </a:ln>
+          <a:effectLst/>
+        </p:spPr>
+        <p:style>
+          <a:lnRef idx="1">
+            <a:schemeClr val="accent1"/>
+          </a:lnRef>
+          <a:fillRef idx="3">
+            <a:schemeClr val="accent1"/>
+          </a:fillRef>
+          <a:effectRef idx="2">
+            <a:schemeClr val="accent1"/>
+          </a:effectRef>
+          <a:fontRef idx="minor">
+            <a:schemeClr val="lt1"/>
+          </a:fontRef>
+        </p:style>
+        <p:txBody>
+          <a:bodyPr rtlCol="0" anchor="ctr" wrap="square" lIns="256032" rIns="256032" tIns="201168" bIns="201168"/>
+          <a:lstStyle/>
+          <a:p>
+            <a:pPr algn="ctr">
+              <a:lnSpc>
+                <a:spcPct val="125000"/>
+              </a:lnSpc>
+              <a:spcAft>
+                <a:spcPts val="500"/>
+              </a:spcAft>
+            </a:pPr>
+            <a:r>
+              <a:rPr sz="1200" b="0">
+                <a:solidFill>
+                  <a:srgbClr val="69728A"/>
+                </a:solidFill>
+                <a:latin typeface="Consolas"/>
+              </a:rPr>
+              <a:t>tls-fingerprint db list</a:t>
+            </a:r>
+          </a:p>
+          <a:p>
+            <a:pPr>
+              <a:lnSpc>
+                <a:spcPct val="125000"/>
+              </a:lnSpc>
+              <a:spcAft>
+                <a:spcPts val="500"/>
+              </a:spcAft>
+            </a:pPr>
+            <a:r>
+              <a:rPr sz="1300" b="0">
+                <a:solidFill>
+                  <a:srgbClr val="EDEFF4"/>
+                </a:solidFill>
+                <a:latin typeface="Consolas"/>
+              </a:rPr>
+              <a:t>[ja3]  curl 8.7.1 (macOS system, SecureTransport/LibreSSL)</a:t>
+            </a:r>
+          </a:p>
+          <a:p>
+            <a:pPr>
+              <a:lnSpc>
+                <a:spcPct val="125000"/>
+              </a:lnSpc>
+              <a:spcAft>
+                <a:spcPts val="500"/>
+              </a:spcAft>
+            </a:pPr>
+            <a:r>
+              <a:rPr sz="1300" b="0">
+                <a:solidFill>
+                  <a:srgbClr val="EDEFF4"/>
+                </a:solidFill>
+                <a:latin typeface="Consolas"/>
+              </a:rPr>
+              <a:t>[ja4]  curl 8.7.1 (macOS system, SecureTransport/LibreSSL)</a:t>
+            </a:r>
+          </a:p>
+          <a:p>
+            <a:pPr>
+              <a:lnSpc>
+                <a:spcPct val="125000"/>
+              </a:lnSpc>
+              <a:spcAft>
+                <a:spcPts val="500"/>
+              </a:spcAft>
+            </a:pPr>
+            <a:r>
+              <a:rPr sz="1300" b="0">
+                <a:solidFill>
+                  <a:srgbClr val="9AA3B5"/>
+                </a:solidFill>
+                <a:latin typeface="Consolas"/>
+              </a:rPr>
+              <a:t>[ja3s] Cloudflare edge (fronting example.com)</a:t>
+            </a:r>
+          </a:p>
+          <a:p>
+            <a:pPr>
+              <a:lnSpc>
+                <a:spcPct val="125000"/>
+              </a:lnSpc>
+              <a:spcAft>
+                <a:spcPts val="500"/>
+              </a:spcAft>
+            </a:pPr>
+            <a:r>
+              <a:rPr sz="1300" b="0">
+                <a:solidFill>
+                  <a:srgbClr val="EDEFF4"/>
+                </a:solidFill>
+                <a:latin typeface="Consolas"/>
+              </a:rPr>
+              <a:t>[ja3]  Google Chrome 151.0.7922.174 (headless)</a:t>
+            </a:r>
+          </a:p>
+          <a:p>
+            <a:pPr>
+              <a:lnSpc>
+                <a:spcPct val="125000"/>
+              </a:lnSpc>
+              <a:spcAft>
+                <a:spcPts val="500"/>
+              </a:spcAft>
+            </a:pPr>
+            <a:r>
+              <a:rPr sz="1300" b="0">
+                <a:solidFill>
+                  <a:srgbClr val="EDEFF4"/>
+                </a:solidFill>
+                <a:latin typeface="Consolas"/>
+              </a:rPr>
+              <a:t>[ja4]  Google Chrome 151.0.7922.174 (headless)</a:t>
+            </a:r>
+          </a:p>
+          <a:p>
+            <a:pPr>
+              <a:lnSpc>
+                <a:spcPct val="125000"/>
+              </a:lnSpc>
+              <a:spcAft>
+                <a:spcPts val="500"/>
+              </a:spcAft>
+            </a:pPr>
+            <a:r>
+              <a:rPr sz="1300" b="0">
+                <a:solidFill>
+                  <a:srgbClr val="69728A"/>
+                </a:solidFill>
+                <a:latin typeface="Consolas"/>
+              </a:rPr>
+              <a:t>... 15 entries total: 5 clients x (JA3 + JA4 + JA3S)</a:t>
+            </a:r>
+          </a:p>
+        </p:txBody>
+      </p:sp>
+    </p:spTree>
+  </p:cSld>
+  <p:clrMapOvr>
+    <a:masterClrMapping/>
+  </p:clrMapOvr>
+</p:sld>
+</file>
+
+<file path=ppt/slides/slide7.xml><?xml version="1.0" encoding="utf-8"?>
+<p:sld xmlns:a="http://schemas.openxmlformats.org/drawingml/2006/main" xmlns:p="http://schemas.openxmlformats.org/presentationml/2006/main" xmlns:r="http://schemas.openxmlformats.org/officeDocument/2006/relationships">
+  <p:cSld>
+    <p:spTree>
+      <p:nvGrpSpPr>
+        <p:cNvPr id="1" name=""/>
+        <p:cNvGrpSpPr/>
+        <p:nvPr/>
+      </p:nvGrpSpPr>
+      <p:grpSpPr/>
+      <p:sp>
+        <p:nvSpPr>
+          <p:cNvPr id="2" name="Rectangle 1"/>
+          <p:cNvSpPr/>
+          <p:nvPr/>
+        </p:nvSpPr>
+        <p:spPr>
+          <a:xfrm>
+            <a:off x="0" y="0"/>
+            <a:ext cx="12191695" cy="6858000"/>
+          </a:xfrm>
+          <a:prstGeom prst="rect">
+            <a:avLst/>
+          </a:prstGeom>
+          <a:solidFill>
+            <a:srgbClr val="0A0E17"/>
+          </a:solidFill>
+          <a:ln>
+            <a:noFill/>
+          </a:ln>
+          <a:effectLst/>
+        </p:spPr>
+        <p:style>
+          <a:lnRef idx="1">
+            <a:schemeClr val="accent1"/>
+          </a:lnRef>
+          <a:fillRef idx="3">
+            <a:schemeClr val="accent1"/>
+          </a:fillRef>
+          <a:effectRef idx="2">
+            <a:schemeClr val="accent1"/>
+          </a:effectRef>
+          <a:fontRef idx="minor">
+            <a:schemeClr val="lt1"/>
+          </a:fontRef>
+        </p:style>
+        <p:txBody>
+          <a:bodyPr rtlCol="0" anchor="ctr"/>
+          <a:lstStyle/>
+          <a:p>
+            <a:pPr algn="ctr"/>
+          </a:p>
+        </p:txBody>
+      </p:sp>
+      <p:sp>
+        <p:nvSpPr>
+          <p:cNvPr id="3" name="TextBox 2"/>
+          <p:cNvSpPr txBox="1"/>
+          <p:nvPr/>
+        </p:nvSpPr>
+        <p:spPr>
+          <a:xfrm>
+            <a:off x="685800" y="6355080"/>
+            <a:ext cx="1828800" cy="365760"/>
+          </a:xfrm>
+          <a:prstGeom prst="rect">
+            <a:avLst/>
+          </a:prstGeom>
+          <a:noFill/>
+        </p:spPr>
+        <p:txBody>
+          <a:bodyPr wrap="none">
+            <a:spAutoFit/>
+          </a:bodyPr>
+          <a:lstStyle/>
+          <a:p>
+            <a:r>
+              <a:rPr sz="1100">
+                <a:solidFill>
+                  <a:srgbClr val="69728A"/>
+                </a:solidFill>
+                <a:latin typeface="Consolas"/>
+              </a:rPr>
+              <a:t>07 / 14</a:t>
+            </a:r>
+          </a:p>
+        </p:txBody>
+      </p:sp>
+      <p:sp>
+        <p:nvSpPr>
+          <p:cNvPr id="4" name="TextBox 3"/>
+          <p:cNvSpPr txBox="1"/>
+          <p:nvPr/>
+        </p:nvSpPr>
+        <p:spPr>
+          <a:xfrm>
+            <a:off x="685800" y="594360"/>
+            <a:ext cx="10058400" cy="365760"/>
+          </a:xfrm>
+          <a:prstGeom prst="rect">
+            <a:avLst/>
+          </a:prstGeom>
+          <a:noFill/>
+        </p:spPr>
+        <p:txBody>
+          <a:bodyPr wrap="square">
+            <a:spAutoFit/>
+          </a:bodyPr>
+          <a:lstStyle/>
+          <a:p>
+            <a:pPr algn="l">
+              <a:lnSpc>
+                <a:spcPct val="115000"/>
+              </a:lnSpc>
+            </a:pPr>
+            <a:r>
+              <a:rPr sz="1300" b="1">
+                <a:solidFill>
+                  <a:srgbClr val="E8A33D"/>
+                </a:solidFill>
+                <a:latin typeface="Consolas"/>
+              </a:rPr>
+              <a:t>RESULTS</a:t>
+            </a:r>
+          </a:p>
+        </p:txBody>
+      </p:sp>
+      <p:sp>
+        <p:nvSpPr>
+          <p:cNvPr id="5" name="TextBox 4"/>
+          <p:cNvSpPr txBox="1"/>
+          <p:nvPr/>
+        </p:nvSpPr>
+        <p:spPr>
+          <a:xfrm>
+            <a:off x="685800" y="1051560"/>
+            <a:ext cx="10789920" cy="1554480"/>
+          </a:xfrm>
+          <a:prstGeom prst="rect">
+            <a:avLst/>
+          </a:prstGeom>
+          <a:noFill/>
+        </p:spPr>
+        <p:txBody>
+          <a:bodyPr wrap="square">
+            <a:spAutoFit/>
+          </a:bodyPr>
+          <a:lstStyle/>
+          <a:p>
+            <a:pPr algn="l">
+              <a:lnSpc>
+                <a:spcPct val="105000"/>
+              </a:lnSpc>
+            </a:pPr>
+            <a:r>
               <a:rPr sz="2700" b="1">
                 <a:solidFill>
                   <a:srgbClr val="EDEFF4"/>
                 </a:solidFill>
-                <a:latin typeface="Archivo"/>
-              </a:rPr>
-              <a:t>Five different implementations. Five different fingerprints.</a:t>
+                <a:latin typeface="Calibri"/>
+              </a:rPr>
+              <a:t>Five different clients. Five different fingerprints.</a:t>
             </a:r>
           </a:p>
         </p:txBody>
@@ -6967,7 +8088,7 @@
                           <a:solidFill>
                             <a:srgbClr val="69728A"/>
                           </a:solidFill>
-                          <a:latin typeface="IBM Plex Mono"/>
+                          <a:latin typeface="Consolas"/>
                         </a:rPr>
                         <a:t>Client</a:t>
                       </a:r>
@@ -6989,7 +8110,7 @@
                           <a:solidFill>
                             <a:srgbClr val="69728A"/>
                           </a:solidFill>
-                          <a:latin typeface="IBM Plex Mono"/>
+                          <a:latin typeface="Consolas"/>
                         </a:rPr>
                         <a:t>TLS library</a:t>
                       </a:r>
@@ -7011,7 +8132,7 @@
                           <a:solidFill>
                             <a:srgbClr val="69728A"/>
                           </a:solidFill>
-                          <a:latin typeface="IBM Plex Mono"/>
+                          <a:latin typeface="Consolas"/>
                         </a:rPr>
                         <a:t>JA3 hash</a:t>
                       </a:r>
@@ -7035,7 +8156,7 @@
                           <a:solidFill>
                             <a:srgbClr val="EDEFF4"/>
                           </a:solidFill>
-                          <a:latin typeface="IBM Plex Sans"/>
+                          <a:latin typeface="Calibri"/>
                         </a:rPr>
                         <a:t>curl 8.7.1</a:t>
                       </a:r>
@@ -7057,7 +8178,7 @@
                           <a:solidFill>
                             <a:srgbClr val="9AA3B5"/>
                           </a:solidFill>
-                          <a:latin typeface="IBM Plex Mono"/>
+                          <a:latin typeface="Consolas"/>
                         </a:rPr>
                         <a:t>SecureTransport / LibreSSL</a:t>
                       </a:r>
@@ -7079,7 +8200,7 @@
                           <a:solidFill>
                             <a:srgbClr val="9AA3B5"/>
                           </a:solidFill>
-                          <a:latin typeface="IBM Plex Mono"/>
+                          <a:latin typeface="Consolas"/>
                         </a:rPr>
                         <a:t>375c6162a492...ce8424</a:t>
                       </a:r>
@@ -7103,7 +8224,7 @@
                           <a:solidFill>
                             <a:srgbClr val="EDEFF4"/>
                           </a:solidFill>
-                          <a:latin typeface="IBM Plex Sans"/>
+                          <a:latin typeface="Calibri"/>
                         </a:rPr>
                         <a:t>openssl s_client</a:t>
                       </a:r>
@@ -7125,7 +8246,7 @@
                           <a:solidFill>
                             <a:srgbClr val="9AA3B5"/>
                           </a:solidFill>
-                          <a:latin typeface="IBM Plex Mono"/>
+                          <a:latin typeface="Consolas"/>
                         </a:rPr>
                         <a:t>OpenSSL 3.6.2</a:t>
                       </a:r>
@@ -7147,7 +8268,7 @@
                           <a:solidFill>
                             <a:srgbClr val="9AA3B5"/>
                           </a:solidFill>
-                          <a:latin typeface="IBM Plex Mono"/>
+                          <a:latin typeface="Consolas"/>
                         </a:rPr>
                         <a:t>0b85eb0d4981...f0ac5f</a:t>
                       </a:r>
@@ -7171,7 +8292,7 @@
                           <a:solidFill>
                             <a:srgbClr val="EDEFF4"/>
                           </a:solidFill>
-                          <a:latin typeface="IBM Plex Sans"/>
+                          <a:latin typeface="Calibri"/>
                         </a:rPr>
                         <a:t>Python stdlib ssl</a:t>
                       </a:r>
@@ -7193,7 +8314,7 @@
                           <a:solidFill>
                             <a:srgbClr val="9AA3B5"/>
                           </a:solidFill>
-                          <a:latin typeface="IBM Plex Mono"/>
+                          <a:latin typeface="Consolas"/>
                         </a:rPr>
                         <a:t>OpenSSL 3.6.2 (same lib!)</a:t>
                       </a:r>
@@ -7215,7 +8336,7 @@
                           <a:solidFill>
                             <a:srgbClr val="9AA3B5"/>
                           </a:solidFill>
-                          <a:latin typeface="IBM Plex Mono"/>
+                          <a:latin typeface="Consolas"/>
                         </a:rPr>
                         <a:t>f21f8e6cf70d...ef401c</a:t>
                       </a:r>
@@ -7239,7 +8360,7 @@
                           <a:solidFill>
                             <a:srgbClr val="EDEFF4"/>
                           </a:solidFill>
-                          <a:latin typeface="IBM Plex Sans"/>
+                          <a:latin typeface="Calibri"/>
                         </a:rPr>
                         <a:t>Chrome 151 (headless)</a:t>
                       </a:r>
@@ -7261,7 +8382,7 @@
                           <a:solidFill>
                             <a:srgbClr val="9AA3B5"/>
                           </a:solidFill>
-                          <a:latin typeface="IBM Plex Mono"/>
+                          <a:latin typeface="Consolas"/>
                         </a:rPr>
                         <a:t>BoringSSL</a:t>
                       </a:r>
@@ -7283,7 +8404,7 @@
                           <a:solidFill>
                             <a:srgbClr val="9AA3B5"/>
                           </a:solidFill>
-                          <a:latin typeface="IBM Plex Mono"/>
+                          <a:latin typeface="Consolas"/>
                         </a:rPr>
                         <a:t>81a2542af844...f2a626</a:t>
                       </a:r>
@@ -7307,7 +8428,7 @@
                           <a:solidFill>
                             <a:srgbClr val="EDEFF4"/>
                           </a:solidFill>
-                          <a:latin typeface="IBM Plex Sans"/>
+                          <a:latin typeface="Calibri"/>
                         </a:rPr>
                         <a:t>Hand-built ClientHello</a:t>
                       </a:r>
@@ -7329,7 +8450,7 @@
                           <a:solidFill>
                             <a:srgbClr val="9AA3B5"/>
                           </a:solidFill>
-                          <a:latin typeface="IBM Plex Mono"/>
+                          <a:latin typeface="Consolas"/>
                         </a:rPr>
                         <a:t>none — raw socket</a:t>
                       </a:r>
@@ -7351,7 +8472,7 @@
                           <a:solidFill>
                             <a:srgbClr val="9AA3B5"/>
                           </a:solidFill>
-                          <a:latin typeface="IBM Plex Mono"/>
+                          <a:latin typeface="Consolas"/>
                         </a:rPr>
                         <a:t>c53113116bb0...6fedc9</a:t>
                       </a:r>
@@ -7377,7 +8498,7 @@
         <p:spPr>
           <a:xfrm>
             <a:off x="685800" y="5486400"/>
-            <a:ext cx="8686800" cy="1828800"/>
+            <a:ext cx="9601200" cy="1828800"/>
           </a:xfrm>
           <a:prstGeom prst="rect">
             <a:avLst/>
@@ -7400,388 +8521,9 @@
                 <a:solidFill>
                   <a:srgbClr val="69728A"/>
                 </a:solidFill>
-                <a:latin typeface="IBM Plex Sans"/>
-              </a:rPr>
-              <a:t>openssl and Python share the exact same crypto library and still fingerprint differently — JA3 reflects configuration, not just which library is linked.</a:t>
-            </a:r>
-          </a:p>
-        </p:txBody>
-      </p:sp>
-    </p:spTree>
-  </p:cSld>
-  <p:clrMapOvr>
-    <a:masterClrMapping/>
-  </p:clrMapOvr>
-</p:sld>
-</file>
-
-<file path=ppt/slides/slide7.xml><?xml version="1.0" encoding="utf-8"?>
-<p:sld xmlns:a="http://schemas.openxmlformats.org/drawingml/2006/main" xmlns:p="http://schemas.openxmlformats.org/presentationml/2006/main" xmlns:r="http://schemas.openxmlformats.org/officeDocument/2006/relationships">
-  <p:cSld>
-    <p:spTree>
-      <p:nvGrpSpPr>
-        <p:cNvPr id="1" name=""/>
-        <p:cNvGrpSpPr/>
-        <p:nvPr/>
-      </p:nvGrpSpPr>
-      <p:grpSpPr/>
-      <p:sp>
-        <p:nvSpPr>
-          <p:cNvPr id="2" name="Rectangle 1"/>
-          <p:cNvSpPr/>
-          <p:nvPr/>
-        </p:nvSpPr>
-        <p:spPr>
-          <a:xfrm>
-            <a:off x="0" y="0"/>
-            <a:ext cx="12191695" cy="6858000"/>
-          </a:xfrm>
-          <a:prstGeom prst="rect">
-            <a:avLst/>
-          </a:prstGeom>
-          <a:solidFill>
-            <a:srgbClr val="0A0E17"/>
-          </a:solidFill>
-          <a:ln>
-            <a:noFill/>
-          </a:ln>
-          <a:effectLst/>
-        </p:spPr>
-        <p:style>
-          <a:lnRef idx="1">
-            <a:schemeClr val="accent1"/>
-          </a:lnRef>
-          <a:fillRef idx="3">
-            <a:schemeClr val="accent1"/>
-          </a:fillRef>
-          <a:effectRef idx="2">
-            <a:schemeClr val="accent1"/>
-          </a:effectRef>
-          <a:fontRef idx="minor">
-            <a:schemeClr val="lt1"/>
-          </a:fontRef>
-        </p:style>
-        <p:txBody>
-          <a:bodyPr rtlCol="0" anchor="ctr"/>
-          <a:lstStyle/>
-          <a:p>
-            <a:pPr algn="ctr"/>
-          </a:p>
-        </p:txBody>
-      </p:sp>
-      <p:sp>
-        <p:nvSpPr>
-          <p:cNvPr id="3" name="TextBox 2"/>
-          <p:cNvSpPr txBox="1"/>
-          <p:nvPr/>
-        </p:nvSpPr>
-        <p:spPr>
-          <a:xfrm>
-            <a:off x="685800" y="6355080"/>
-            <a:ext cx="1828800" cy="365760"/>
-          </a:xfrm>
-          <a:prstGeom prst="rect">
-            <a:avLst/>
-          </a:prstGeom>
-          <a:noFill/>
-        </p:spPr>
-        <p:txBody>
-          <a:bodyPr wrap="none">
-            <a:spAutoFit/>
-          </a:bodyPr>
-          <a:lstStyle/>
-          <a:p>
-            <a:r>
-              <a:rPr sz="1100">
-                <a:solidFill>
-                  <a:srgbClr val="69728A"/>
-                </a:solidFill>
-                <a:latin typeface="IBM Plex Mono"/>
-              </a:rPr>
-              <a:t>07 / 12</a:t>
-            </a:r>
-          </a:p>
-        </p:txBody>
-      </p:sp>
-      <p:sp>
-        <p:nvSpPr>
-          <p:cNvPr id="4" name="TextBox 3"/>
-          <p:cNvSpPr txBox="1"/>
-          <p:nvPr/>
-        </p:nvSpPr>
-        <p:spPr>
-          <a:xfrm>
-            <a:off x="685800" y="594360"/>
-            <a:ext cx="9144000" cy="365760"/>
-          </a:xfrm>
-          <a:prstGeom prst="rect">
-            <a:avLst/>
-          </a:prstGeom>
-          <a:noFill/>
-        </p:spPr>
-        <p:txBody>
-          <a:bodyPr wrap="square">
-            <a:spAutoFit/>
-          </a:bodyPr>
-          <a:lstStyle/>
-          <a:p>
-            <a:pPr algn="l">
-              <a:lnSpc>
-                <a:spcPct val="115000"/>
-              </a:lnSpc>
-            </a:pPr>
-            <a:r>
-              <a:rPr sz="1300" b="0">
-                <a:solidFill>
-                  <a:srgbClr val="E8A33D"/>
-                </a:solidFill>
-                <a:latin typeface="IBM Plex Mono"/>
-              </a:rPr>
-              <a:t>AN UNPLANNED DISCOVERY</a:t>
-            </a:r>
-          </a:p>
-        </p:txBody>
-      </p:sp>
-      <p:sp>
-        <p:nvSpPr>
-          <p:cNvPr id="5" name="TextBox 4"/>
-          <p:cNvSpPr txBox="1"/>
-          <p:nvPr/>
-        </p:nvSpPr>
-        <p:spPr>
-          <a:xfrm>
-            <a:off x="685800" y="1051560"/>
-            <a:ext cx="10515600" cy="1463040"/>
-          </a:xfrm>
-          <a:prstGeom prst="rect">
-            <a:avLst/>
-          </a:prstGeom>
-          <a:noFill/>
-        </p:spPr>
-        <p:txBody>
-          <a:bodyPr wrap="square">
-            <a:spAutoFit/>
-          </a:bodyPr>
-          <a:lstStyle/>
-          <a:p>
-            <a:pPr algn="l">
-              <a:lnSpc>
-                <a:spcPct val="105000"/>
-              </a:lnSpc>
-            </a:pPr>
-            <a:r>
-              <a:rPr sz="2800" b="1">
-                <a:solidFill>
-                  <a:srgbClr val="EDEFF4"/>
-                </a:solidFill>
-                <a:latin typeface="Archivo"/>
-              </a:rPr>
-              <a:t>The same Chrome, twice, gave two different answers.</a:t>
-            </a:r>
-          </a:p>
-        </p:txBody>
-      </p:sp>
-      <p:sp>
-        <p:nvSpPr>
-          <p:cNvPr id="6" name="Rounded Rectangle 5"/>
-          <p:cNvSpPr/>
-          <p:nvPr/>
-        </p:nvSpPr>
-        <p:spPr>
-          <a:xfrm>
-            <a:off x="685800" y="2377440"/>
-            <a:ext cx="5120640" cy="1463040"/>
-          </a:xfrm>
-          <a:prstGeom prst="roundRect">
-            <a:avLst>
-              <a:gd name="adj" fmla="val 6000"/>
-            </a:avLst>
-          </a:prstGeom>
-          <a:solidFill>
-            <a:srgbClr val="121826"/>
-          </a:solidFill>
-          <a:ln w="12700">
-            <a:solidFill>
-              <a:srgbClr val="232B3D"/>
-            </a:solidFill>
-          </a:ln>
-          <a:effectLst/>
-        </p:spPr>
-        <p:style>
-          <a:lnRef idx="1">
-            <a:schemeClr val="accent1"/>
-          </a:lnRef>
-          <a:fillRef idx="3">
-            <a:schemeClr val="accent1"/>
-          </a:fillRef>
-          <a:effectRef idx="2">
-            <a:schemeClr val="accent1"/>
-          </a:effectRef>
-          <a:fontRef idx="minor">
-            <a:schemeClr val="lt1"/>
-          </a:fontRef>
-        </p:style>
-        <p:txBody>
-          <a:bodyPr rtlCol="0" anchor="ctr" wrap="square" lIns="228600" rIns="228600" tIns="182880" bIns="182880"/>
-          <a:lstStyle/>
-          <a:p>
-            <a:pPr algn="ctr">
-              <a:lnSpc>
-                <a:spcPct val="125000"/>
-              </a:lnSpc>
-              <a:spcAft>
-                <a:spcPts val="400"/>
-              </a:spcAft>
-            </a:pPr>
-            <a:r>
-              <a:rPr sz="1200" b="0">
-                <a:solidFill>
-                  <a:srgbClr val="69728A"/>
-                </a:solidFill>
-                <a:latin typeface="IBM Plex Mono"/>
-              </a:rPr>
-              <a:t>Run 1</a:t>
-            </a:r>
-          </a:p>
-          <a:p>
-            <a:pPr>
-              <a:lnSpc>
-                <a:spcPct val="125000"/>
-              </a:lnSpc>
-              <a:spcAft>
-                <a:spcPts val="400"/>
-              </a:spcAft>
-            </a:pPr>
-            <a:r>
-              <a:rPr sz="1400" b="0">
-                <a:solidFill>
-                  <a:srgbClr val="EDEFF4"/>
-                </a:solidFill>
-                <a:latin typeface="IBM Plex Mono"/>
-              </a:rPr>
-              <a:t>81a2542af8442fcd7802f178d9f2a626</a:t>
-            </a:r>
-          </a:p>
-        </p:txBody>
-      </p:sp>
-      <p:sp>
-        <p:nvSpPr>
-          <p:cNvPr id="7" name="Rounded Rectangle 6"/>
-          <p:cNvSpPr/>
-          <p:nvPr/>
-        </p:nvSpPr>
-        <p:spPr>
-          <a:xfrm>
-            <a:off x="6080760" y="2377440"/>
-            <a:ext cx="5120640" cy="1463040"/>
-          </a:xfrm>
-          <a:prstGeom prst="roundRect">
-            <a:avLst>
-              <a:gd name="adj" fmla="val 6000"/>
-            </a:avLst>
-          </a:prstGeom>
-          <a:solidFill>
-            <a:srgbClr val="121826"/>
-          </a:solidFill>
-          <a:ln w="12700">
-            <a:solidFill>
-              <a:srgbClr val="232B3D"/>
-            </a:solidFill>
-          </a:ln>
-          <a:effectLst/>
-        </p:spPr>
-        <p:style>
-          <a:lnRef idx="1">
-            <a:schemeClr val="accent1"/>
-          </a:lnRef>
-          <a:fillRef idx="3">
-            <a:schemeClr val="accent1"/>
-          </a:fillRef>
-          <a:effectRef idx="2">
-            <a:schemeClr val="accent1"/>
-          </a:effectRef>
-          <a:fontRef idx="minor">
-            <a:schemeClr val="lt1"/>
-          </a:fontRef>
-        </p:style>
-        <p:txBody>
-          <a:bodyPr rtlCol="0" anchor="ctr" wrap="square" lIns="228600" rIns="228600" tIns="182880" bIns="182880"/>
-          <a:lstStyle/>
-          <a:p>
-            <a:pPr algn="ctr">
-              <a:lnSpc>
-                <a:spcPct val="125000"/>
-              </a:lnSpc>
-              <a:spcAft>
-                <a:spcPts val="400"/>
-              </a:spcAft>
-            </a:pPr>
-            <a:r>
-              <a:rPr sz="1200" b="0">
-                <a:solidFill>
-                  <a:srgbClr val="69728A"/>
-                </a:solidFill>
-                <a:latin typeface="IBM Plex Mono"/>
-              </a:rPr>
-              <a:t>Run 2 — same install, moments later</a:t>
-            </a:r>
-          </a:p>
-          <a:p>
-            <a:pPr>
-              <a:lnSpc>
-                <a:spcPct val="125000"/>
-              </a:lnSpc>
-              <a:spcAft>
-                <a:spcPts val="400"/>
-              </a:spcAft>
-            </a:pPr>
-            <a:r>
-              <a:rPr sz="1400" b="1">
-                <a:solidFill>
-                  <a:srgbClr val="F16A54"/>
-                </a:solidFill>
-                <a:latin typeface="IBM Plex Mono"/>
-              </a:rPr>
-              <a:t>825cf36b22c9ab3e25a5bc094aecde86</a:t>
-            </a:r>
-          </a:p>
-        </p:txBody>
-      </p:sp>
-      <p:sp>
-        <p:nvSpPr>
-          <p:cNvPr id="8" name="TextBox 7"/>
-          <p:cNvSpPr txBox="1"/>
-          <p:nvPr/>
-        </p:nvSpPr>
-        <p:spPr>
-          <a:xfrm>
-            <a:off x="685800" y="4206240"/>
-            <a:ext cx="9601200" cy="1828800"/>
-          </a:xfrm>
-          <a:prstGeom prst="rect">
-            <a:avLst/>
-          </a:prstGeom>
-          <a:noFill/>
-        </p:spPr>
-        <p:txBody>
-          <a:bodyPr wrap="square">
-            <a:spAutoFit/>
-          </a:bodyPr>
-          <a:lstStyle/>
-          <a:p>
-            <a:pPr algn="l">
-              <a:lnSpc>
-                <a:spcPct val="135000"/>
-              </a:lnSpc>
-            </a:pPr>
-            <a:r>
-              <a:rPr sz="1600" b="0">
-                <a:solidFill>
-                  <a:srgbClr val="9AA3B5"/>
-                </a:solidFill>
-                <a:latin typeface="IBM Plex Sans"/>
-              </a:rPr>
-              <a:t>Modern Chrome deliberately randomizes ClientHello extension order per connection, specifically to weaken fingerprinting like this. We didn't cite that as a fact — we reproduced it live, by accident, re-running our own experiment.</a:t>
+                <a:latin typeface="Calibri"/>
+              </a:rPr>
+              <a:t>openssl and Python use the exact same crypto library and still get different fingerprints — JA3 reflects configuration, not just which library is linked.</a:t>
             </a:r>
           </a:p>
         </p:txBody>
@@ -7875,9 +8617,9 @@
                 <a:solidFill>
                   <a:srgbClr val="69728A"/>
                 </a:solidFill>
-                <a:latin typeface="IBM Plex Mono"/>
-              </a:rPr>
-              <a:t>08 / 12</a:t>
+                <a:latin typeface="Consolas"/>
+              </a:rPr>
+              <a:t>08 / 14</a:t>
             </a:r>
           </a:p>
         </p:txBody>
@@ -7891,7 +8633,7 @@
         <p:spPr>
           <a:xfrm>
             <a:off x="685800" y="594360"/>
-            <a:ext cx="9144000" cy="365760"/>
+            <a:ext cx="10058400" cy="365760"/>
           </a:xfrm>
           <a:prstGeom prst="rect">
             <a:avLst/>
@@ -7910,13 +8652,13 @@
               </a:lnSpc>
             </a:pPr>
             <a:r>
-              <a:rPr sz="1300" b="0">
+              <a:rPr sz="1300" b="1">
                 <a:solidFill>
                   <a:srgbClr val="E8A33D"/>
                 </a:solidFill>
-                <a:latin typeface="IBM Plex Mono"/>
-              </a:rPr>
-              <a:t>BUILT IN RESPONSE — JA4</a:t>
+                <a:latin typeface="Consolas"/>
+              </a:rPr>
+              <a:t>AN UNPLANNED DISCOVERY</a:t>
             </a:r>
           </a:p>
         </p:txBody>
@@ -7930,7 +8672,7 @@
         <p:spPr>
           <a:xfrm>
             <a:off x="685800" y="1051560"/>
-            <a:ext cx="10515600" cy="1463040"/>
+            <a:ext cx="10789920" cy="1554480"/>
           </a:xfrm>
           <a:prstGeom prst="rect">
             <a:avLst/>
@@ -7949,13 +8691,13 @@
               </a:lnSpc>
             </a:pPr>
             <a:r>
-              <a:rPr sz="3200" b="1">
+              <a:rPr sz="2800" b="1">
                 <a:solidFill>
                   <a:srgbClr val="EDEFF4"/>
                 </a:solidFill>
-                <a:latin typeface="Archivo"/>
-              </a:rPr>
-              <a:t>JA4 isolates what actually changed.</a:t>
+                <a:latin typeface="Calibri"/>
+              </a:rPr>
+              <a:t>The same Chrome, twice, gave two different answers.</a:t>
             </a:r>
           </a:p>
         </p:txBody>
@@ -7968,12 +8710,12 @@
         </p:nvSpPr>
         <p:spPr>
           <a:xfrm>
-            <a:off x="685800" y="2286000"/>
-            <a:ext cx="5120640" cy="2651760"/>
+            <a:off x="685800" y="2377440"/>
+            <a:ext cx="5120640" cy="1463040"/>
           </a:xfrm>
           <a:prstGeom prst="roundRect">
             <a:avLst>
-              <a:gd name="adj" fmla="val 6000"/>
+              <a:gd name="adj" fmla="val 5000"/>
             </a:avLst>
           </a:prstGeom>
           <a:solidFill>
@@ -8001,7 +8743,7 @@
           </a:fontRef>
         </p:style>
         <p:txBody>
-          <a:bodyPr rtlCol="0" anchor="ctr" wrap="square" lIns="228600" rIns="228600" tIns="182880" bIns="182880"/>
+          <a:bodyPr rtlCol="0" anchor="ctr" wrap="square" lIns="256032" rIns="256032" tIns="201168" bIns="201168"/>
           <a:lstStyle/>
           <a:p>
             <a:pPr algn="ctr">
@@ -8009,7 +8751,7 @@
                 <a:spcPct val="125000"/>
               </a:lnSpc>
               <a:spcAft>
-                <a:spcPts val="400"/>
+                <a:spcPts val="500"/>
               </a:spcAft>
             </a:pPr>
             <a:r>
@@ -8017,9 +8759,9 @@
                 <a:solidFill>
                   <a:srgbClr val="69728A"/>
                 </a:solidFill>
-                <a:latin typeface="IBM Plex Mono"/>
-              </a:rPr>
-              <a:t>Cipher segment</a:t>
+                <a:latin typeface="Consolas"/>
+              </a:rPr>
+              <a:t>Run 1</a:t>
             </a:r>
           </a:p>
           <a:p>
@@ -8028,65 +8770,17 @@
                 <a:spcPct val="125000"/>
               </a:lnSpc>
               <a:spcAft>
-                <a:spcPts val="400"/>
+                <a:spcPts val="500"/>
               </a:spcAft>
             </a:pPr>
             <a:r>
-              <a:rPr sz="1500" b="1">
-                <a:solidFill>
-                  <a:srgbClr val="49C79A"/>
-                </a:solidFill>
-                <a:latin typeface="IBM Plex Mono"/>
-              </a:rPr>
-              <a:t>8daaf6152771</a:t>
-            </a:r>
-          </a:p>
-          <a:p>
-            <a:pPr>
-              <a:lnSpc>
-                <a:spcPct val="125000"/>
-              </a:lnSpc>
-              <a:spcAft>
-                <a:spcPts val="400"/>
-              </a:spcAft>
-            </a:pPr>
-            <a:r>
-              <a:rPr sz="1500" b="1">
-                <a:solidFill>
-                  <a:srgbClr val="49C79A"/>
-                </a:solidFill>
-                <a:latin typeface="IBM Plex Mono"/>
-              </a:rPr>
-              <a:t>8daaf6152771</a:t>
-            </a:r>
-          </a:p>
-          <a:p>
-            <a:pPr>
-              <a:lnSpc>
-                <a:spcPct val="125000"/>
-              </a:lnSpc>
-              <a:spcAft>
-                <a:spcPts val="400"/>
-              </a:spcAft>
-            </a:pPr>
-            <a:r>
-              <a:rPr sz="1200" b="0">
-                <a:solidFill>
-                  <a:srgbClr val="69728A"/>
-                </a:solidFill>
-                <a:latin typeface="IBM Plex Sans"/>
-              </a:rPr>
-              <a:t>Identical, both runs — sorted before</a:t>
-            </a:r>
-            <a:br/>
-            <a:r>
-              <a:rPr sz="1200" b="0">
-                <a:solidFill>
-                  <a:srgbClr val="69728A"/>
-                </a:solidFill>
-                <a:latin typeface="IBM Plex Sans"/>
-              </a:rPr>
-              <a:t>hashing, immune to reordering.</a:t>
+              <a:rPr sz="1400" b="0">
+                <a:solidFill>
+                  <a:srgbClr val="EDEFF4"/>
+                </a:solidFill>
+                <a:latin typeface="Consolas"/>
+              </a:rPr>
+              <a:t>81a2542af8442fcd7802f178d9f2a626</a:t>
             </a:r>
           </a:p>
         </p:txBody>
@@ -8099,12 +8793,12 @@
         </p:nvSpPr>
         <p:spPr>
           <a:xfrm>
-            <a:off x="6080760" y="2286000"/>
-            <a:ext cx="5120640" cy="2651760"/>
+            <a:off x="6080760" y="2377440"/>
+            <a:ext cx="5120640" cy="1463040"/>
           </a:xfrm>
           <a:prstGeom prst="roundRect">
             <a:avLst>
-              <a:gd name="adj" fmla="val 6000"/>
+              <a:gd name="adj" fmla="val 5000"/>
             </a:avLst>
           </a:prstGeom>
           <a:solidFill>
@@ -8132,7 +8826,7 @@
           </a:fontRef>
         </p:style>
         <p:txBody>
-          <a:bodyPr rtlCol="0" anchor="ctr" wrap="square" lIns="228600" rIns="228600" tIns="182880" bIns="182880"/>
+          <a:bodyPr rtlCol="0" anchor="ctr" wrap="square" lIns="256032" rIns="256032" tIns="201168" bIns="201168"/>
           <a:lstStyle/>
           <a:p>
             <a:pPr algn="ctr">
@@ -8140,7 +8834,7 @@
                 <a:spcPct val="125000"/>
               </a:lnSpc>
               <a:spcAft>
-                <a:spcPts val="400"/>
+                <a:spcPts val="500"/>
               </a:spcAft>
             </a:pPr>
             <a:r>
@@ -8148,9 +8842,9 @@
                 <a:solidFill>
                   <a:srgbClr val="69728A"/>
                 </a:solidFill>
-                <a:latin typeface="IBM Plex Mono"/>
-              </a:rPr>
-              <a:t>Extension segment</a:t>
+                <a:latin typeface="Consolas"/>
+              </a:rPr>
+              <a:t>Run 2 — same install, moments later</a:t>
             </a:r>
           </a:p>
           <a:p>
@@ -8159,65 +8853,17 @@
                 <a:spcPct val="125000"/>
               </a:lnSpc>
               <a:spcAft>
-                <a:spcPts val="400"/>
+                <a:spcPts val="500"/>
               </a:spcAft>
             </a:pPr>
             <a:r>
-              <a:rPr sz="1400" b="0">
-                <a:solidFill>
-                  <a:srgbClr val="EDEFF4"/>
-                </a:solidFill>
-                <a:latin typeface="IBM Plex Mono"/>
-              </a:rPr>
-              <a:t>806a8c22fdea   (16 extensions)</a:t>
-            </a:r>
-          </a:p>
-          <a:p>
-            <a:pPr>
-              <a:lnSpc>
-                <a:spcPct val="125000"/>
-              </a:lnSpc>
-              <a:spcAft>
-                <a:spcPts val="400"/>
-              </a:spcAft>
-            </a:pPr>
-            <a:r>
               <a:rPr sz="1400" b="1">
                 <a:solidFill>
                   <a:srgbClr val="F16A54"/>
                 </a:solidFill>
-                <a:latin typeface="IBM Plex Mono"/>
-              </a:rPr>
-              <a:t>cb7bf5808d99   (17 extensions)</a:t>
-            </a:r>
-          </a:p>
-          <a:p>
-            <a:pPr>
-              <a:lnSpc>
-                <a:spcPct val="125000"/>
-              </a:lnSpc>
-              <a:spcAft>
-                <a:spcPts val="400"/>
-              </a:spcAft>
-            </a:pPr>
-            <a:r>
-              <a:rPr sz="1200" b="0">
-                <a:solidFill>
-                  <a:srgbClr val="69728A"/>
-                </a:solidFill>
-                <a:latin typeface="IBM Plex Sans"/>
-              </a:rPr>
-              <a:t>Genuinely different — Chrome sent one</a:t>
-            </a:r>
-            <a:br/>
-            <a:r>
-              <a:rPr sz="1200" b="0">
-                <a:solidFill>
-                  <a:srgbClr val="69728A"/>
-                </a:solidFill>
-                <a:latin typeface="IBM Plex Sans"/>
-              </a:rPr>
-              <a:t>extra extension. JA4 reports that honestly.</a:t>
+                <a:latin typeface="Consolas"/>
+              </a:rPr>
+              <a:t>825cf36b22c9ab3e25a5bc094aecde86</a:t>
             </a:r>
           </a:p>
         </p:txBody>
@@ -8230,8 +8876,8 @@
         </p:nvSpPr>
         <p:spPr>
           <a:xfrm>
-            <a:off x="685800" y="5212080"/>
-            <a:ext cx="8686800" cy="1828800"/>
+            <a:off x="685800" y="4206240"/>
+            <a:ext cx="9875520" cy="1828800"/>
           </a:xfrm>
           <a:prstGeom prst="rect">
             <a:avLst/>
@@ -8250,13 +8896,13 @@
               </a:lnSpc>
             </a:pPr>
             <a:r>
-              <a:rPr sz="1300" b="0">
-                <a:solidFill>
-                  <a:srgbClr val="69728A"/>
-                </a:solidFill>
-                <a:latin typeface="IBM Plex Sans"/>
-              </a:rPr>
-              <a:t>Validated against the official FoxIO spec's own worked examples — not just checked against itself.</a:t>
+              <a:rPr sz="1600" b="0">
+                <a:solidFill>
+                  <a:srgbClr val="9AA3B5"/>
+                </a:solidFill>
+                <a:latin typeface="Calibri"/>
+              </a:rPr>
+              <a:t>Modern Chrome deliberately randomizes ClientHello extension order per connection, specifically to weaken fingerprinting like this. We didn't just read that fact — we reproduced it live, re-running our own experiment.</a:t>
             </a:r>
           </a:p>
         </p:txBody>
@@ -8350,9 +8996,9 @@
                 <a:solidFill>
                   <a:srgbClr val="69728A"/>
                 </a:solidFill>
-                <a:latin typeface="IBM Plex Mono"/>
-              </a:rPr>
-              <a:t>09 / 12</a:t>
+                <a:latin typeface="Consolas"/>
+              </a:rPr>
+              <a:t>09 / 14</a:t>
             </a:r>
           </a:p>
         </p:txBody>
@@ -8366,7 +9012,7 @@
         <p:spPr>
           <a:xfrm>
             <a:off x="685800" y="594360"/>
-            <a:ext cx="9144000" cy="365760"/>
+            <a:ext cx="10058400" cy="365760"/>
           </a:xfrm>
           <a:prstGeom prst="rect">
             <a:avLst/>
@@ -8385,13 +9031,13 @@
               </a:lnSpc>
             </a:pPr>
             <a:r>
-              <a:rPr sz="1300" b="0">
+              <a:rPr sz="1300" b="1">
                 <a:solidFill>
                   <a:srgbClr val="E8A33D"/>
                 </a:solidFill>
-                <a:latin typeface="IBM Plex Mono"/>
-              </a:rPr>
-              <a:t>FROM FINGERPRINT TO DEFENSE</a:t>
+                <a:latin typeface="Consolas"/>
+              </a:rPr>
+              <a:t>BUILT IN RESPONSE — JA4</a:t>
             </a:r>
           </a:p>
         </p:txBody>
@@ -8405,7 +9051,7 @@
         <p:spPr>
           <a:xfrm>
             <a:off x="685800" y="1051560"/>
-            <a:ext cx="10515600" cy="1463040"/>
+            <a:ext cx="10789920" cy="1554480"/>
           </a:xfrm>
           <a:prstGeom prst="rect">
             <a:avLst/>
@@ -8424,70 +9070,31 @@
               </a:lnSpc>
             </a:pPr>
             <a:r>
-              <a:rPr sz="2800" b="1">
+              <a:rPr sz="2700" b="1">
                 <a:solidFill>
                   <a:srgbClr val="EDEFF4"/>
                 </a:solidFill>
-                <a:latin typeface="Archivo"/>
-              </a:rPr>
-              <a:t>A script can lie about its identity. It can't fake its handshake.</a:t>
-            </a:r>
-          </a:p>
-        </p:txBody>
-      </p:sp>
-      <p:sp>
-        <p:nvSpPr>
-          <p:cNvPr id="6" name="TextBox 5"/>
-          <p:cNvSpPr txBox="1"/>
-          <p:nvPr/>
-        </p:nvSpPr>
-        <p:spPr>
-          <a:xfrm>
-            <a:off x="685800" y="2103120"/>
-            <a:ext cx="9601200" cy="1828800"/>
-          </a:xfrm>
-          <a:prstGeom prst="rect">
-            <a:avLst/>
-          </a:prstGeom>
-          <a:noFill/>
-        </p:spPr>
-        <p:txBody>
-          <a:bodyPr wrap="square">
-            <a:spAutoFit/>
-          </a:bodyPr>
-          <a:lstStyle/>
-          <a:p>
-            <a:pPr algn="l">
-              <a:lnSpc>
-                <a:spcPct val="135000"/>
-              </a:lnSpc>
-            </a:pPr>
-            <a:r>
-              <a:rPr sz="1600" b="0">
-                <a:solidFill>
-                  <a:srgbClr val="9AA3B5"/>
-                </a:solidFill>
-                <a:latin typeface="IBM Plex Sans"/>
-              </a:rPr>
-              <a:t>A User-Agent header is a string the author typed — trivial to fake. The TLS ClientHello sent moments earlier is a structural property of whichever library is actually running.</a:t>
-            </a:r>
-          </a:p>
-        </p:txBody>
-      </p:sp>
-      <p:sp>
-        <p:nvSpPr>
-          <p:cNvPr id="7" name="Rounded Rectangle 6"/>
+                <a:latin typeface="Calibri"/>
+              </a:rPr>
+              <a:t>JA4: a newer fingerprint that isolates what actually changed</a:t>
+            </a:r>
+          </a:p>
+        </p:txBody>
+      </p:sp>
+      <p:sp>
+        <p:nvSpPr>
+          <p:cNvPr id="6" name="Rounded Rectangle 5"/>
           <p:cNvSpPr/>
           <p:nvPr/>
         </p:nvSpPr>
         <p:spPr>
           <a:xfrm>
-            <a:off x="685800" y="3200400"/>
-            <a:ext cx="10515600" cy="2377440"/>
+            <a:off x="685800" y="2377440"/>
+            <a:ext cx="5120640" cy="2651760"/>
           </a:xfrm>
           <a:prstGeom prst="roundRect">
             <a:avLst>
-              <a:gd name="adj" fmla="val 6000"/>
+              <a:gd name="adj" fmla="val 5000"/>
             </a:avLst>
           </a:prstGeom>
           <a:solidFill>
@@ -8515,7 +9122,7 @@
           </a:fontRef>
         </p:style>
         <p:txBody>
-          <a:bodyPr rtlCol="0" anchor="ctr" wrap="square" lIns="228600" rIns="228600" tIns="182880" bIns="182880"/>
+          <a:bodyPr rtlCol="0" anchor="ctr" wrap="square" lIns="256032" rIns="256032" tIns="201168" bIns="201168"/>
           <a:lstStyle/>
           <a:p>
             <a:pPr algn="ctr">
@@ -8523,93 +9130,274 @@
                 <a:spcPct val="125000"/>
               </a:lnSpc>
               <a:spcAft>
-                <a:spcPts val="400"/>
+                <a:spcPts val="500"/>
               </a:spcAft>
             </a:pPr>
             <a:r>
+              <a:rPr sz="1200" b="0">
+                <a:solidFill>
+                  <a:srgbClr val="69728A"/>
+                </a:solidFill>
+                <a:latin typeface="Consolas"/>
+              </a:rPr>
+              <a:t>Cipher segment (JA4)</a:t>
+            </a:r>
+          </a:p>
+          <a:p>
+            <a:pPr>
+              <a:lnSpc>
+                <a:spcPct val="125000"/>
+              </a:lnSpc>
+              <a:spcAft>
+                <a:spcPts val="500"/>
+              </a:spcAft>
+            </a:pPr>
+            <a:r>
+              <a:rPr sz="1500" b="1">
+                <a:solidFill>
+                  <a:srgbClr val="49C79A"/>
+                </a:solidFill>
+                <a:latin typeface="Consolas"/>
+              </a:rPr>
+              <a:t>8daaf6152771</a:t>
+            </a:r>
+          </a:p>
+          <a:p>
+            <a:pPr>
+              <a:lnSpc>
+                <a:spcPct val="125000"/>
+              </a:lnSpc>
+              <a:spcAft>
+                <a:spcPts val="500"/>
+              </a:spcAft>
+            </a:pPr>
+            <a:r>
+              <a:rPr sz="1500" b="1">
+                <a:solidFill>
+                  <a:srgbClr val="49C79A"/>
+                </a:solidFill>
+                <a:latin typeface="Consolas"/>
+              </a:rPr>
+              <a:t>8daaf6152771</a:t>
+            </a:r>
+          </a:p>
+          <a:p>
+            <a:pPr>
+              <a:lnSpc>
+                <a:spcPct val="125000"/>
+              </a:lnSpc>
+              <a:spcAft>
+                <a:spcPts val="500"/>
+              </a:spcAft>
+            </a:pPr>
+            <a:r>
+              <a:rPr sz="1200" b="0">
+                <a:solidFill>
+                  <a:srgbClr val="69728A"/>
+                </a:solidFill>
+                <a:latin typeface="Calibri"/>
+              </a:rPr>
+              <a:t>Identical, both runs — JA4 sorts the</a:t>
+            </a:r>
+            <a:br/>
+            <a:r>
+              <a:rPr sz="1200" b="0">
+                <a:solidFill>
+                  <a:srgbClr val="69728A"/>
+                </a:solidFill>
+                <a:latin typeface="Calibri"/>
+              </a:rPr>
+              <a:t>cipher list before hashing, so pure</a:t>
+            </a:r>
+            <a:br/>
+            <a:r>
+              <a:rPr sz="1200" b="0">
+                <a:solidFill>
+                  <a:srgbClr val="69728A"/>
+                </a:solidFill>
+                <a:latin typeface="Calibri"/>
+              </a:rPr>
+              <a:t>reordering can't change it.</a:t>
+            </a:r>
+          </a:p>
+        </p:txBody>
+      </p:sp>
+      <p:sp>
+        <p:nvSpPr>
+          <p:cNvPr id="7" name="Rounded Rectangle 6"/>
+          <p:cNvSpPr/>
+          <p:nvPr/>
+        </p:nvSpPr>
+        <p:spPr>
+          <a:xfrm>
+            <a:off x="6080760" y="2377440"/>
+            <a:ext cx="5120640" cy="2651760"/>
+          </a:xfrm>
+          <a:prstGeom prst="roundRect">
+            <a:avLst>
+              <a:gd name="adj" fmla="val 5000"/>
+            </a:avLst>
+          </a:prstGeom>
+          <a:solidFill>
+            <a:srgbClr val="121826"/>
+          </a:solidFill>
+          <a:ln w="12700">
+            <a:solidFill>
+              <a:srgbClr val="232B3D"/>
+            </a:solidFill>
+          </a:ln>
+          <a:effectLst/>
+        </p:spPr>
+        <p:style>
+          <a:lnRef idx="1">
+            <a:schemeClr val="accent1"/>
+          </a:lnRef>
+          <a:fillRef idx="3">
+            <a:schemeClr val="accent1"/>
+          </a:fillRef>
+          <a:effectRef idx="2">
+            <a:schemeClr val="accent1"/>
+          </a:effectRef>
+          <a:fontRef idx="minor">
+            <a:schemeClr val="lt1"/>
+          </a:fontRef>
+        </p:style>
+        <p:txBody>
+          <a:bodyPr rtlCol="0" anchor="ctr" wrap="square" lIns="256032" rIns="256032" tIns="201168" bIns="201168"/>
+          <a:lstStyle/>
+          <a:p>
+            <a:pPr algn="ctr">
+              <a:lnSpc>
+                <a:spcPct val="125000"/>
+              </a:lnSpc>
+              <a:spcAft>
+                <a:spcPts val="500"/>
+              </a:spcAft>
+            </a:pPr>
+            <a:r>
+              <a:rPr sz="1200" b="0">
+                <a:solidFill>
+                  <a:srgbClr val="69728A"/>
+                </a:solidFill>
+                <a:latin typeface="Consolas"/>
+              </a:rPr>
+              <a:t>Extension segment (JA4)</a:t>
+            </a:r>
+          </a:p>
+          <a:p>
+            <a:pPr>
+              <a:lnSpc>
+                <a:spcPct val="125000"/>
+              </a:lnSpc>
+              <a:spcAft>
+                <a:spcPts val="500"/>
+              </a:spcAft>
+            </a:pPr>
+            <a:r>
               <a:rPr sz="1300" b="0">
                 <a:solidFill>
+                  <a:srgbClr val="EDEFF4"/>
+                </a:solidFill>
+                <a:latin typeface="Consolas"/>
+              </a:rPr>
+              <a:t>806a8c22fdea   (16 extensions)</a:t>
+            </a:r>
+          </a:p>
+          <a:p>
+            <a:pPr>
+              <a:lnSpc>
+                <a:spcPct val="125000"/>
+              </a:lnSpc>
+              <a:spcAft>
+                <a:spcPts val="500"/>
+              </a:spcAft>
+            </a:pPr>
+            <a:r>
+              <a:rPr sz="1300" b="1">
+                <a:solidFill>
+                  <a:srgbClr val="F16A54"/>
+                </a:solidFill>
+                <a:latin typeface="Consolas"/>
+              </a:rPr>
+              <a:t>cb7bf5808d99   (17 extensions)</a:t>
+            </a:r>
+          </a:p>
+          <a:p>
+            <a:pPr>
+              <a:lnSpc>
+                <a:spcPct val="125000"/>
+              </a:lnSpc>
+              <a:spcAft>
+                <a:spcPts val="500"/>
+              </a:spcAft>
+            </a:pPr>
+            <a:r>
+              <a:rPr sz="1200" b="0">
+                <a:solidFill>
                   <a:srgbClr val="69728A"/>
                 </a:solidFill>
-                <a:latin typeface="IBM Plex Mono"/>
-              </a:rPr>
-              <a:t>$ tls-fingerprint check-spoofing pcaps/bot_client.pcap --claims Chrome</a:t>
-            </a:r>
-          </a:p>
-          <a:p>
-            <a:pPr>
-              <a:lnSpc>
-                <a:spcPct val="125000"/>
-              </a:lnSpc>
-              <a:spcAft>
-                <a:spcPts val="400"/>
-              </a:spcAft>
+                <a:latin typeface="Calibri"/>
+              </a:rPr>
+              <a:t>Genuinely different — Chrome sent one</a:t>
+            </a:r>
+            <a:br/>
+            <a:r>
+              <a:rPr sz="1200" b="0">
+                <a:solidFill>
+                  <a:srgbClr val="69728A"/>
+                </a:solidFill>
+                <a:latin typeface="Calibri"/>
+              </a:rPr>
+              <a:t>extra extension the 2nd time. JA4 reports</a:t>
+            </a:r>
+            <a:br/>
+            <a:r>
+              <a:rPr sz="1200" b="0">
+                <a:solidFill>
+                  <a:srgbClr val="69728A"/>
+                </a:solidFill>
+                <a:latin typeface="Calibri"/>
+              </a:rPr>
+              <a:t>that honestly instead of hiding it.</a:t>
+            </a:r>
+          </a:p>
+        </p:txBody>
+      </p:sp>
+      <p:sp>
+        <p:nvSpPr>
+          <p:cNvPr id="8" name="TextBox 7"/>
+          <p:cNvSpPr txBox="1"/>
+          <p:nvPr/>
+        </p:nvSpPr>
+        <p:spPr>
+          <a:xfrm>
+            <a:off x="685800" y="5257800"/>
+            <a:ext cx="9601200" cy="1828800"/>
+          </a:xfrm>
+          <a:prstGeom prst="rect">
+            <a:avLst/>
+          </a:prstGeom>
+          <a:noFill/>
+        </p:spPr>
+        <p:txBody>
+          <a:bodyPr wrap="square">
+            <a:spAutoFit/>
+          </a:bodyPr>
+          <a:lstStyle/>
+          <a:p>
+            <a:pPr algn="l">
+              <a:lnSpc>
+                <a:spcPct val="135000"/>
+              </a:lnSpc>
             </a:pPr>
             <a:r>
               <a:rPr sz="1300" b="0">
                 <a:solidFill>
-                  <a:srgbClr val="9AA3B5"/>
-                </a:solidFill>
-                <a:latin typeface="IBM Plex Mono"/>
-              </a:rPr>
-              <a:t>Claims to be:  Chrome</a:t>
-            </a:r>
-          </a:p>
-          <a:p>
-            <a:pPr>
-              <a:lnSpc>
-                <a:spcPct val="125000"/>
-              </a:lnSpc>
-              <a:spcAft>
-                <a:spcPts val="400"/>
-              </a:spcAft>
-            </a:pPr>
-            <a:r>
-              <a:rPr sz="1300" b="0">
-                <a:solidFill>
-                  <a:srgbClr val="9AA3B5"/>
-                </a:solidFill>
-                <a:latin typeface="IBM Plex Mono"/>
-              </a:rPr>
-              <a:t>Measured JA3:  f21f8e6cf70d5980ecfe9fa2e0ef401c</a:t>
-            </a:r>
-          </a:p>
-          <a:p>
-            <a:pPr>
-              <a:lnSpc>
-                <a:spcPct val="125000"/>
-              </a:lnSpc>
-              <a:spcAft>
-                <a:spcPts val="400"/>
-              </a:spcAft>
-            </a:pPr>
-            <a:r>
-              <a:rPr sz="1400" b="1">
-                <a:solidFill>
-                  <a:srgbClr val="F16A54"/>
-                </a:solidFill>
-                <a:latin typeface="IBM Plex Mono"/>
-              </a:rPr>
-              <a:t>VERDICT: *** MISMATCH — SUSPICIOUS ***</a:t>
-            </a:r>
-          </a:p>
-          <a:p>
-            <a:pPr>
-              <a:lnSpc>
-                <a:spcPct val="125000"/>
-              </a:lnSpc>
-              <a:spcAft>
-                <a:spcPts val="400"/>
-              </a:spcAft>
-            </a:pPr>
-            <a:r>
-              <a:rPr sz="1300" b="0">
-                <a:solidFill>
-                  <a:srgbClr val="9AA3B5"/>
-                </a:solidFill>
-                <a:latin typeface="IBM Plex Mono"/>
-              </a:rPr>
-              <a:t>matches: Python 3.14.6 stdlib ssl (ssl.create_default_context)</a:t>
+                  <a:srgbClr val="69728A"/>
+                </a:solidFill>
+                <a:latin typeface="Calibri"/>
+              </a:rPr>
+              <a:t>Validated against the official FoxIO spec's own published worked examples — not just checked against itself.</a:t>
             </a:r>
           </a:p>
         </p:txBody>

--- a/TLS_Fingerprinting_Presentation.pptx
+++ b/TLS_Fingerprinting_Presentation.pptx
@@ -19,6 +19,7 @@
     <p:sldId id="267" r:id="rId18"/>
     <p:sldId id="268" r:id="rId19"/>
     <p:sldId id="269" r:id="rId20"/>
+    <p:sldId id="270" r:id="rId21"/>
   </p:sldIdLst>
   <p:sldSz cx="12191695" cy="6858000" type="screen4x3"/>
   <p:notesSz cx="6858000" cy="9144000"/>
@@ -3174,7 +3175,7 @@
                 </a:solidFill>
                 <a:latin typeface="Consolas"/>
               </a:rPr>
-              <a:t>01 / 14</a:t>
+              <a:t>01 / 15</a:t>
             </a:r>
           </a:p>
         </p:txBody>
@@ -3408,7 +3409,7 @@
                 </a:solidFill>
                 <a:latin typeface="Calibri"/>
               </a:rPr>
-              <a:t>56</a:t>
+              <a:t>15</a:t>
             </a:r>
           </a:p>
         </p:txBody>
@@ -3447,7 +3448,7 @@
                 </a:solidFill>
                 <a:latin typeface="Calibri"/>
               </a:rPr>
-              <a:t>tests passing</a:t>
+              <a:t>measured fingerprints</a:t>
             </a:r>
           </a:p>
         </p:txBody>
@@ -3621,7 +3622,7 @@
                 </a:solidFill>
                 <a:latin typeface="Consolas"/>
               </a:rPr>
-              <a:t>10 / 14</a:t>
+              <a:t>10 / 15</a:t>
             </a:r>
           </a:p>
         </p:txBody>
@@ -3660,7 +3661,7 @@
                 </a:solidFill>
                 <a:latin typeface="Consolas"/>
               </a:rPr>
-              <a:t>FROM FINGERPRINT TO DEFENSE</a:t>
+              <a:t>BUILT IN RESPONSE — JA4</a:t>
             </a:r>
           </a:p>
         </p:txBody>
@@ -3693,27 +3694,309 @@
               </a:lnSpc>
             </a:pPr>
             <a:r>
-              <a:rPr sz="3200" b="1">
+              <a:rPr sz="2700" b="1">
                 <a:solidFill>
                   <a:srgbClr val="EDEFF4"/>
                 </a:solidFill>
                 <a:latin typeface="Calibri"/>
               </a:rPr>
-              <a:t>How a bot pretends to be Chrome</a:t>
-            </a:r>
-          </a:p>
-        </p:txBody>
-      </p:sp>
-      <p:sp>
-        <p:nvSpPr>
-          <p:cNvPr id="6" name="TextBox 5"/>
-          <p:cNvSpPr txBox="1"/>
-          <p:nvPr/>
-        </p:nvSpPr>
-        <p:spPr>
-          <a:xfrm>
-            <a:off x="685800" y="2194560"/>
-            <a:ext cx="9875520" cy="713232"/>
+              <a:t>JA4: a newer fingerprint that isolates what actually changed</a:t>
+            </a:r>
+          </a:p>
+        </p:txBody>
+      </p:sp>
+      <p:sp>
+        <p:nvSpPr>
+          <p:cNvPr id="6" name="Rounded Rectangle 5"/>
+          <p:cNvSpPr/>
+          <p:nvPr/>
+        </p:nvSpPr>
+        <p:spPr>
+          <a:xfrm>
+            <a:off x="685800" y="2377440"/>
+            <a:ext cx="5120640" cy="2651760"/>
+          </a:xfrm>
+          <a:prstGeom prst="roundRect">
+            <a:avLst>
+              <a:gd name="adj" fmla="val 5000"/>
+            </a:avLst>
+          </a:prstGeom>
+          <a:solidFill>
+            <a:srgbClr val="121826"/>
+          </a:solidFill>
+          <a:ln w="12700">
+            <a:solidFill>
+              <a:srgbClr val="232B3D"/>
+            </a:solidFill>
+          </a:ln>
+          <a:effectLst/>
+        </p:spPr>
+        <p:style>
+          <a:lnRef idx="1">
+            <a:schemeClr val="accent1"/>
+          </a:lnRef>
+          <a:fillRef idx="3">
+            <a:schemeClr val="accent1"/>
+          </a:fillRef>
+          <a:effectRef idx="2">
+            <a:schemeClr val="accent1"/>
+          </a:effectRef>
+          <a:fontRef idx="minor">
+            <a:schemeClr val="lt1"/>
+          </a:fontRef>
+        </p:style>
+        <p:txBody>
+          <a:bodyPr rtlCol="0" anchor="ctr" wrap="square" lIns="256032" rIns="256032" tIns="201168" bIns="201168"/>
+          <a:lstStyle/>
+          <a:p>
+            <a:pPr algn="ctr">
+              <a:lnSpc>
+                <a:spcPct val="125000"/>
+              </a:lnSpc>
+              <a:spcAft>
+                <a:spcPts val="500"/>
+              </a:spcAft>
+            </a:pPr>
+            <a:r>
+              <a:rPr sz="1200" b="0">
+                <a:solidFill>
+                  <a:srgbClr val="69728A"/>
+                </a:solidFill>
+                <a:latin typeface="Consolas"/>
+              </a:rPr>
+              <a:t>Cipher segment (JA4)</a:t>
+            </a:r>
+          </a:p>
+          <a:p>
+            <a:pPr>
+              <a:lnSpc>
+                <a:spcPct val="125000"/>
+              </a:lnSpc>
+              <a:spcAft>
+                <a:spcPts val="500"/>
+              </a:spcAft>
+            </a:pPr>
+            <a:r>
+              <a:rPr sz="1500" b="1">
+                <a:solidFill>
+                  <a:srgbClr val="49C79A"/>
+                </a:solidFill>
+                <a:latin typeface="Consolas"/>
+              </a:rPr>
+              <a:t>8daaf6152771</a:t>
+            </a:r>
+          </a:p>
+          <a:p>
+            <a:pPr>
+              <a:lnSpc>
+                <a:spcPct val="125000"/>
+              </a:lnSpc>
+              <a:spcAft>
+                <a:spcPts val="500"/>
+              </a:spcAft>
+            </a:pPr>
+            <a:r>
+              <a:rPr sz="1500" b="1">
+                <a:solidFill>
+                  <a:srgbClr val="49C79A"/>
+                </a:solidFill>
+                <a:latin typeface="Consolas"/>
+              </a:rPr>
+              <a:t>8daaf6152771</a:t>
+            </a:r>
+          </a:p>
+          <a:p>
+            <a:pPr>
+              <a:lnSpc>
+                <a:spcPct val="125000"/>
+              </a:lnSpc>
+              <a:spcAft>
+                <a:spcPts val="500"/>
+              </a:spcAft>
+            </a:pPr>
+            <a:r>
+              <a:rPr sz="1200" b="0">
+                <a:solidFill>
+                  <a:srgbClr val="69728A"/>
+                </a:solidFill>
+                <a:latin typeface="Calibri"/>
+              </a:rPr>
+              <a:t>Identical, both runs — JA4 sorts the</a:t>
+            </a:r>
+            <a:br/>
+            <a:r>
+              <a:rPr sz="1200" b="0">
+                <a:solidFill>
+                  <a:srgbClr val="69728A"/>
+                </a:solidFill>
+                <a:latin typeface="Calibri"/>
+              </a:rPr>
+              <a:t>cipher list before hashing, so pure</a:t>
+            </a:r>
+            <a:br/>
+            <a:r>
+              <a:rPr sz="1200" b="0">
+                <a:solidFill>
+                  <a:srgbClr val="69728A"/>
+                </a:solidFill>
+                <a:latin typeface="Calibri"/>
+              </a:rPr>
+              <a:t>reordering can't change it.</a:t>
+            </a:r>
+          </a:p>
+        </p:txBody>
+      </p:sp>
+      <p:sp>
+        <p:nvSpPr>
+          <p:cNvPr id="7" name="Rounded Rectangle 6"/>
+          <p:cNvSpPr/>
+          <p:nvPr/>
+        </p:nvSpPr>
+        <p:spPr>
+          <a:xfrm>
+            <a:off x="6080760" y="2377440"/>
+            <a:ext cx="5120640" cy="2651760"/>
+          </a:xfrm>
+          <a:prstGeom prst="roundRect">
+            <a:avLst>
+              <a:gd name="adj" fmla="val 5000"/>
+            </a:avLst>
+          </a:prstGeom>
+          <a:solidFill>
+            <a:srgbClr val="121826"/>
+          </a:solidFill>
+          <a:ln w="12700">
+            <a:solidFill>
+              <a:srgbClr val="232B3D"/>
+            </a:solidFill>
+          </a:ln>
+          <a:effectLst/>
+        </p:spPr>
+        <p:style>
+          <a:lnRef idx="1">
+            <a:schemeClr val="accent1"/>
+          </a:lnRef>
+          <a:fillRef idx="3">
+            <a:schemeClr val="accent1"/>
+          </a:fillRef>
+          <a:effectRef idx="2">
+            <a:schemeClr val="accent1"/>
+          </a:effectRef>
+          <a:fontRef idx="minor">
+            <a:schemeClr val="lt1"/>
+          </a:fontRef>
+        </p:style>
+        <p:txBody>
+          <a:bodyPr rtlCol="0" anchor="ctr" wrap="square" lIns="256032" rIns="256032" tIns="201168" bIns="201168"/>
+          <a:lstStyle/>
+          <a:p>
+            <a:pPr algn="ctr">
+              <a:lnSpc>
+                <a:spcPct val="125000"/>
+              </a:lnSpc>
+              <a:spcAft>
+                <a:spcPts val="500"/>
+              </a:spcAft>
+            </a:pPr>
+            <a:r>
+              <a:rPr sz="1200" b="0">
+                <a:solidFill>
+                  <a:srgbClr val="69728A"/>
+                </a:solidFill>
+                <a:latin typeface="Consolas"/>
+              </a:rPr>
+              <a:t>Extension segment (JA4)</a:t>
+            </a:r>
+          </a:p>
+          <a:p>
+            <a:pPr>
+              <a:lnSpc>
+                <a:spcPct val="125000"/>
+              </a:lnSpc>
+              <a:spcAft>
+                <a:spcPts val="500"/>
+              </a:spcAft>
+            </a:pPr>
+            <a:r>
+              <a:rPr sz="1300" b="0">
+                <a:solidFill>
+                  <a:srgbClr val="EDEFF4"/>
+                </a:solidFill>
+                <a:latin typeface="Consolas"/>
+              </a:rPr>
+              <a:t>806a8c22fdea   (16 extensions)</a:t>
+            </a:r>
+          </a:p>
+          <a:p>
+            <a:pPr>
+              <a:lnSpc>
+                <a:spcPct val="125000"/>
+              </a:lnSpc>
+              <a:spcAft>
+                <a:spcPts val="500"/>
+              </a:spcAft>
+            </a:pPr>
+            <a:r>
+              <a:rPr sz="1300" b="1">
+                <a:solidFill>
+                  <a:srgbClr val="F16A54"/>
+                </a:solidFill>
+                <a:latin typeface="Consolas"/>
+              </a:rPr>
+              <a:t>cb7bf5808d99   (17 extensions)</a:t>
+            </a:r>
+          </a:p>
+          <a:p>
+            <a:pPr>
+              <a:lnSpc>
+                <a:spcPct val="125000"/>
+              </a:lnSpc>
+              <a:spcAft>
+                <a:spcPts val="500"/>
+              </a:spcAft>
+            </a:pPr>
+            <a:r>
+              <a:rPr sz="1200" b="0">
+                <a:solidFill>
+                  <a:srgbClr val="69728A"/>
+                </a:solidFill>
+                <a:latin typeface="Calibri"/>
+              </a:rPr>
+              <a:t>Genuinely different — Chrome sent one</a:t>
+            </a:r>
+            <a:br/>
+            <a:r>
+              <a:rPr sz="1200" b="0">
+                <a:solidFill>
+                  <a:srgbClr val="69728A"/>
+                </a:solidFill>
+                <a:latin typeface="Calibri"/>
+              </a:rPr>
+              <a:t>extra extension the 2nd time. JA4 reports</a:t>
+            </a:r>
+            <a:br/>
+            <a:r>
+              <a:rPr sz="1200" b="0">
+                <a:solidFill>
+                  <a:srgbClr val="69728A"/>
+                </a:solidFill>
+                <a:latin typeface="Calibri"/>
+              </a:rPr>
+              <a:t>that honestly instead of hiding it.</a:t>
+            </a:r>
+          </a:p>
+        </p:txBody>
+      </p:sp>
+      <p:sp>
+        <p:nvSpPr>
+          <p:cNvPr id="8" name="TextBox 7"/>
+          <p:cNvSpPr txBox="1"/>
+          <p:nvPr/>
+        </p:nvSpPr>
+        <p:spPr>
+          <a:xfrm>
+            <a:off x="685800" y="5257800"/>
+            <a:ext cx="9601200" cy="1828800"/>
           </a:xfrm>
           <a:prstGeom prst="rect">
             <a:avLst/>
@@ -3726,136 +4009,19 @@
           </a:bodyPr>
           <a:lstStyle/>
           <a:p>
-            <a:pPr>
-              <a:lnSpc>
-                <a:spcPct val="120000"/>
-              </a:lnSpc>
-            </a:pPr>
-            <a:r>
-              <a:rPr sz="1800">
-                <a:solidFill>
-                  <a:srgbClr val="9AA3B5"/>
+            <a:pPr algn="l">
+              <a:lnSpc>
+                <a:spcPct val="135000"/>
+              </a:lnSpc>
+            </a:pPr>
+            <a:r>
+              <a:rPr sz="1300" b="0">
+                <a:solidFill>
+                  <a:srgbClr val="69728A"/>
                 </a:solidFill>
                 <a:latin typeface="Calibri"/>
               </a:rPr>
-              <a:t>•  The cheap, common trick: set the HTTP "User-Agent" header to Chrome's exact string — one line of code, free to fake.</a:t>
-            </a:r>
-          </a:p>
-        </p:txBody>
-      </p:sp>
-      <p:sp>
-        <p:nvSpPr>
-          <p:cNvPr id="7" name="TextBox 6"/>
-          <p:cNvSpPr txBox="1"/>
-          <p:nvPr/>
-        </p:nvSpPr>
-        <p:spPr>
-          <a:xfrm>
-            <a:off x="685800" y="2907792"/>
-            <a:ext cx="9875520" cy="713232"/>
-          </a:xfrm>
-          <a:prstGeom prst="rect">
-            <a:avLst/>
-          </a:prstGeom>
-          <a:noFill/>
-        </p:spPr>
-        <p:txBody>
-          <a:bodyPr wrap="square">
-            <a:spAutoFit/>
-          </a:bodyPr>
-          <a:lstStyle/>
-          <a:p>
-            <a:pPr>
-              <a:lnSpc>
-                <a:spcPct val="120000"/>
-              </a:lnSpc>
-            </a:pPr>
-            <a:r>
-              <a:rPr sz="1800">
-                <a:solidFill>
-                  <a:srgbClr val="9AA3B5"/>
-                </a:solidFill>
-                <a:latin typeface="Calibri"/>
-              </a:rPr>
-              <a:t>•  But the TLS ClientHello was already sent, moments earlier, by whichever real library the bot's script actually uses.</a:t>
-            </a:r>
-          </a:p>
-        </p:txBody>
-      </p:sp>
-      <p:sp>
-        <p:nvSpPr>
-          <p:cNvPr id="8" name="TextBox 7"/>
-          <p:cNvSpPr txBox="1"/>
-          <p:nvPr/>
-        </p:nvSpPr>
-        <p:spPr>
-          <a:xfrm>
-            <a:off x="685800" y="3621024"/>
-            <a:ext cx="9875520" cy="713232"/>
-          </a:xfrm>
-          <a:prstGeom prst="rect">
-            <a:avLst/>
-          </a:prstGeom>
-          <a:noFill/>
-        </p:spPr>
-        <p:txBody>
-          <a:bodyPr wrap="square">
-            <a:spAutoFit/>
-          </a:bodyPr>
-          <a:lstStyle/>
-          <a:p>
-            <a:pPr>
-              <a:lnSpc>
-                <a:spcPct val="120000"/>
-              </a:lnSpc>
-            </a:pPr>
-            <a:r>
-              <a:rPr sz="1800">
-                <a:solidFill>
-                  <a:srgbClr val="9AA3B5"/>
-                </a:solidFill>
-                <a:latin typeface="Calibri"/>
-              </a:rPr>
-              <a:t>•  That handshake is a structural byproduct of the real library — not something typed by hand, much harder to fake convincingly.</a:t>
-            </a:r>
-          </a:p>
-        </p:txBody>
-      </p:sp>
-      <p:sp>
-        <p:nvSpPr>
-          <p:cNvPr id="9" name="TextBox 8"/>
-          <p:cNvSpPr txBox="1"/>
-          <p:nvPr/>
-        </p:nvSpPr>
-        <p:spPr>
-          <a:xfrm>
-            <a:off x="685800" y="4334256"/>
-            <a:ext cx="9875520" cy="713232"/>
-          </a:xfrm>
-          <a:prstGeom prst="rect">
-            <a:avLst/>
-          </a:prstGeom>
-          <a:noFill/>
-        </p:spPr>
-        <p:txBody>
-          <a:bodyPr wrap="square">
-            <a:spAutoFit/>
-          </a:bodyPr>
-          <a:lstStyle/>
-          <a:p>
-            <a:pPr>
-              <a:lnSpc>
-                <a:spcPct val="120000"/>
-              </a:lnSpc>
-            </a:pPr>
-            <a:r>
-              <a:rPr sz="1800">
-                <a:solidFill>
-                  <a:srgbClr val="9AA3B5"/>
-                </a:solidFill>
-                <a:latin typeface="Calibri"/>
-              </a:rPr>
-              <a:t>•  The mismatch between the claim and the real handshake is the tell.</a:t>
+              <a:t>Validated against the official FoxIO spec's own published worked examples — not just checked against itself.</a:t>
             </a:r>
           </a:p>
         </p:txBody>
@@ -3951,7 +4117,7 @@
                 </a:solidFill>
                 <a:latin typeface="Consolas"/>
               </a:rPr>
-              <a:t>11 / 14</a:t>
+              <a:t>11 / 15</a:t>
             </a:r>
           </a:p>
         </p:txBody>
@@ -3990,7 +4156,7 @@
                 </a:solidFill>
                 <a:latin typeface="Consolas"/>
               </a:rPr>
-              <a:t>CATCHING THE LIE</a:t>
+              <a:t>FROM FINGERPRINT TO DEFENSE</a:t>
             </a:r>
           </a:p>
         </p:txBody>
@@ -4023,192 +4189,169 @@
               </a:lnSpc>
             </a:pPr>
             <a:r>
-              <a:rPr sz="3400" b="1">
+              <a:rPr sz="3200" b="1">
                 <a:solidFill>
                   <a:srgbClr val="EDEFF4"/>
                 </a:solidFill>
                 <a:latin typeface="Calibri"/>
               </a:rPr>
-              <a:t>Spoofing detection, live</a:t>
-            </a:r>
-          </a:p>
-        </p:txBody>
-      </p:sp>
-      <p:sp>
-        <p:nvSpPr>
-          <p:cNvPr id="6" name="Rounded Rectangle 5"/>
-          <p:cNvSpPr/>
-          <p:nvPr/>
-        </p:nvSpPr>
-        <p:spPr>
-          <a:xfrm>
-            <a:off x="685800" y="2286000"/>
-            <a:ext cx="10515600" cy="2377440"/>
-          </a:xfrm>
-          <a:prstGeom prst="roundRect">
-            <a:avLst>
-              <a:gd name="adj" fmla="val 5000"/>
-            </a:avLst>
-          </a:prstGeom>
-          <a:solidFill>
-            <a:srgbClr val="121826"/>
-          </a:solidFill>
-          <a:ln w="12700">
-            <a:solidFill>
-              <a:srgbClr val="232B3D"/>
-            </a:solidFill>
-          </a:ln>
-          <a:effectLst/>
-        </p:spPr>
-        <p:style>
-          <a:lnRef idx="1">
-            <a:schemeClr val="accent1"/>
-          </a:lnRef>
-          <a:fillRef idx="3">
-            <a:schemeClr val="accent1"/>
-          </a:fillRef>
-          <a:effectRef idx="2">
-            <a:schemeClr val="accent1"/>
-          </a:effectRef>
-          <a:fontRef idx="minor">
-            <a:schemeClr val="lt1"/>
-          </a:fontRef>
-        </p:style>
-        <p:txBody>
-          <a:bodyPr rtlCol="0" anchor="ctr" wrap="square" lIns="256032" rIns="256032" tIns="201168" bIns="201168"/>
-          <a:lstStyle/>
-          <a:p>
-            <a:pPr algn="ctr">
-              <a:lnSpc>
-                <a:spcPct val="125000"/>
-              </a:lnSpc>
-              <a:spcAft>
-                <a:spcPts val="500"/>
-              </a:spcAft>
-            </a:pPr>
-            <a:r>
-              <a:rPr sz="1300" b="0">
-                <a:solidFill>
-                  <a:srgbClr val="69728A"/>
-                </a:solidFill>
-                <a:latin typeface="Consolas"/>
-              </a:rPr>
-              <a:t>$ tls-fingerprint check-spoofing pcaps/bot_client.pcap --claims Chrome</a:t>
-            </a:r>
-          </a:p>
+              <a:t>How a bot pretends to be Chrome</a:t>
+            </a:r>
+          </a:p>
+        </p:txBody>
+      </p:sp>
+      <p:sp>
+        <p:nvSpPr>
+          <p:cNvPr id="6" name="TextBox 5"/>
+          <p:cNvSpPr txBox="1"/>
+          <p:nvPr/>
+        </p:nvSpPr>
+        <p:spPr>
+          <a:xfrm>
+            <a:off x="685800" y="2194560"/>
+            <a:ext cx="9875520" cy="713232"/>
+          </a:xfrm>
+          <a:prstGeom prst="rect">
+            <a:avLst/>
+          </a:prstGeom>
+          <a:noFill/>
+        </p:spPr>
+        <p:txBody>
+          <a:bodyPr wrap="square">
+            <a:spAutoFit/>
+          </a:bodyPr>
+          <a:lstStyle/>
           <a:p>
             <a:pPr>
               <a:lnSpc>
-                <a:spcPct val="125000"/>
-              </a:lnSpc>
-              <a:spcAft>
-                <a:spcPts val="500"/>
-              </a:spcAft>
-            </a:pPr>
-            <a:r>
-              <a:rPr sz="1300" b="0">
+                <a:spcPct val="120000"/>
+              </a:lnSpc>
+            </a:pPr>
+            <a:r>
+              <a:rPr sz="1800">
                 <a:solidFill>
                   <a:srgbClr val="9AA3B5"/>
                 </a:solidFill>
-                <a:latin typeface="Consolas"/>
-              </a:rPr>
-              <a:t>Claims to be:  Chrome</a:t>
-            </a:r>
-          </a:p>
+                <a:latin typeface="Calibri"/>
+              </a:rPr>
+              <a:t>•  The cheap, common trick: set the HTTP "User-Agent" header to Chrome's exact string — one line of code, free to fake.</a:t>
+            </a:r>
+          </a:p>
+        </p:txBody>
+      </p:sp>
+      <p:sp>
+        <p:nvSpPr>
+          <p:cNvPr id="7" name="TextBox 6"/>
+          <p:cNvSpPr txBox="1"/>
+          <p:nvPr/>
+        </p:nvSpPr>
+        <p:spPr>
+          <a:xfrm>
+            <a:off x="685800" y="2907792"/>
+            <a:ext cx="9875520" cy="713232"/>
+          </a:xfrm>
+          <a:prstGeom prst="rect">
+            <a:avLst/>
+          </a:prstGeom>
+          <a:noFill/>
+        </p:spPr>
+        <p:txBody>
+          <a:bodyPr wrap="square">
+            <a:spAutoFit/>
+          </a:bodyPr>
+          <a:lstStyle/>
           <a:p>
             <a:pPr>
               <a:lnSpc>
-                <a:spcPct val="125000"/>
-              </a:lnSpc>
-              <a:spcAft>
-                <a:spcPts val="500"/>
-              </a:spcAft>
-            </a:pPr>
-            <a:r>
-              <a:rPr sz="1300" b="0">
+                <a:spcPct val="120000"/>
+              </a:lnSpc>
+            </a:pPr>
+            <a:r>
+              <a:rPr sz="1800">
                 <a:solidFill>
                   <a:srgbClr val="9AA3B5"/>
                 </a:solidFill>
-                <a:latin typeface="Consolas"/>
-              </a:rPr>
-              <a:t>Measured JA3:  f21f8e6cf70d5980ecfe9fa2e0ef401c</a:t>
-            </a:r>
-          </a:p>
+                <a:latin typeface="Calibri"/>
+              </a:rPr>
+              <a:t>•  But the TLS ClientHello was already sent, moments earlier, by whichever real library the bot's script actually uses.</a:t>
+            </a:r>
+          </a:p>
+        </p:txBody>
+      </p:sp>
+      <p:sp>
+        <p:nvSpPr>
+          <p:cNvPr id="8" name="TextBox 7"/>
+          <p:cNvSpPr txBox="1"/>
+          <p:nvPr/>
+        </p:nvSpPr>
+        <p:spPr>
+          <a:xfrm>
+            <a:off x="685800" y="3621024"/>
+            <a:ext cx="9875520" cy="713232"/>
+          </a:xfrm>
+          <a:prstGeom prst="rect">
+            <a:avLst/>
+          </a:prstGeom>
+          <a:noFill/>
+        </p:spPr>
+        <p:txBody>
+          <a:bodyPr wrap="square">
+            <a:spAutoFit/>
+          </a:bodyPr>
+          <a:lstStyle/>
           <a:p>
             <a:pPr>
               <a:lnSpc>
-                <a:spcPct val="125000"/>
-              </a:lnSpc>
-              <a:spcAft>
-                <a:spcPts val="500"/>
-              </a:spcAft>
-            </a:pPr>
-            <a:r>
-              <a:rPr sz="1500" b="1">
-                <a:solidFill>
-                  <a:srgbClr val="F16A54"/>
-                </a:solidFill>
-                <a:latin typeface="Consolas"/>
-              </a:rPr>
-              <a:t>VERDICT: *** MISMATCH — SUSPICIOUS ***</a:t>
-            </a:r>
-          </a:p>
+                <a:spcPct val="120000"/>
+              </a:lnSpc>
+            </a:pPr>
+            <a:r>
+              <a:rPr sz="1800">
+                <a:solidFill>
+                  <a:srgbClr val="9AA3B5"/>
+                </a:solidFill>
+                <a:latin typeface="Calibri"/>
+              </a:rPr>
+              <a:t>•  That handshake is a structural byproduct of the real library — not something typed by hand, much harder to fake convincingly.</a:t>
+            </a:r>
+          </a:p>
+        </p:txBody>
+      </p:sp>
+      <p:sp>
+        <p:nvSpPr>
+          <p:cNvPr id="9" name="TextBox 8"/>
+          <p:cNvSpPr txBox="1"/>
+          <p:nvPr/>
+        </p:nvSpPr>
+        <p:spPr>
+          <a:xfrm>
+            <a:off x="685800" y="4334256"/>
+            <a:ext cx="9875520" cy="713232"/>
+          </a:xfrm>
+          <a:prstGeom prst="rect">
+            <a:avLst/>
+          </a:prstGeom>
+          <a:noFill/>
+        </p:spPr>
+        <p:txBody>
+          <a:bodyPr wrap="square">
+            <a:spAutoFit/>
+          </a:bodyPr>
+          <a:lstStyle/>
           <a:p>
             <a:pPr>
               <a:lnSpc>
-                <a:spcPct val="125000"/>
-              </a:lnSpc>
-              <a:spcAft>
-                <a:spcPts val="500"/>
-              </a:spcAft>
-            </a:pPr>
-            <a:r>
-              <a:rPr sz="1300" b="0">
+                <a:spcPct val="120000"/>
+              </a:lnSpc>
+            </a:pPr>
+            <a:r>
+              <a:rPr sz="1800">
                 <a:solidFill>
                   <a:srgbClr val="9AA3B5"/>
                 </a:solidFill>
-                <a:latin typeface="Consolas"/>
-              </a:rPr>
-              <a:t>matches: Python 3.14.6 stdlib ssl (ssl.create_default_context)</a:t>
-            </a:r>
-          </a:p>
-        </p:txBody>
-      </p:sp>
-      <p:sp>
-        <p:nvSpPr>
-          <p:cNvPr id="7" name="TextBox 6"/>
-          <p:cNvSpPr txBox="1"/>
-          <p:nvPr/>
-        </p:nvSpPr>
-        <p:spPr>
-          <a:xfrm>
-            <a:off x="685800" y="5120640"/>
-            <a:ext cx="9875520" cy="1828800"/>
-          </a:xfrm>
-          <a:prstGeom prst="rect">
-            <a:avLst/>
-          </a:prstGeom>
-          <a:noFill/>
-        </p:spPr>
-        <p:txBody>
-          <a:bodyPr wrap="square">
-            <a:spAutoFit/>
-          </a:bodyPr>
-          <a:lstStyle/>
-          <a:p>
-            <a:pPr algn="l">
-              <a:lnSpc>
-                <a:spcPct val="135000"/>
-              </a:lnSpc>
-            </a:pPr>
-            <a:r>
-              <a:rPr sz="1500" b="0">
-                <a:solidFill>
-                  <a:srgbClr val="9AA3B5"/>
-                </a:solidFill>
                 <a:latin typeface="Calibri"/>
               </a:rPr>
-              <a:t>The claimed identity was checked against the database's real Chrome hashes from slide 7 — it didn't match, so it's flagged, and the tool reports what it actually is instead.</a:t>
+              <a:t>•  The mismatch between the claim and the real handshake is the tell.</a:t>
             </a:r>
           </a:p>
         </p:txBody>
@@ -4304,7 +4447,7 @@
                 </a:solidFill>
                 <a:latin typeface="Consolas"/>
               </a:rPr>
-              <a:t>12 / 14</a:t>
+              <a:t>12 / 15</a:t>
             </a:r>
           </a:p>
         </p:txBody>
@@ -4343,7 +4486,7 @@
                 </a:solidFill>
                 <a:latin typeface="Consolas"/>
               </a:rPr>
-              <a:t>UNDER LOAD</a:t>
+              <a:t>CATCHING THE LIE</a:t>
             </a:r>
           </a:p>
         </p:txBody>
@@ -4376,13 +4519,13 @@
               </a:lnSpc>
             </a:pPr>
             <a:r>
-              <a:rPr sz="3200" b="1">
+              <a:rPr sz="3400" b="1">
                 <a:solidFill>
                   <a:srgbClr val="EDEFF4"/>
                 </a:solidFill>
                 <a:latin typeface="Calibri"/>
               </a:rPr>
-              <a:t>5 rapid requests. 5 for 5, caught.</a:t>
+              <a:t>Spoofing detection, live</a:t>
             </a:r>
           </a:p>
         </p:txBody>
@@ -4395,8 +4538,8 @@
         </p:nvSpPr>
         <p:spPr>
           <a:xfrm>
-            <a:off x="685800" y="2194560"/>
-            <a:ext cx="10515600" cy="2743200"/>
+            <a:off x="685800" y="2286000"/>
+            <a:ext cx="10515600" cy="2377440"/>
           </a:xfrm>
           <a:prstGeom prst="roundRect">
             <a:avLst>
@@ -4446,7 +4589,7 @@
                 </a:solidFill>
                 <a:latin typeface="Consolas"/>
               </a:rPr>
-              <a:t>$ python experiments/bombard_demo.py 5</a:t>
+              <a:t>$ tls-fingerprint check-spoofing pcaps/bot_client.pcap --claims Chrome</a:t>
             </a:r>
           </a:p>
           <a:p>
@@ -4461,11 +4604,11 @@
             <a:r>
               <a:rPr sz="1300" b="0">
                 <a:solidFill>
-                  <a:srgbClr val="F16A54"/>
+                  <a:srgbClr val="9AA3B5"/>
                 </a:solidFill>
                 <a:latin typeface="Consolas"/>
               </a:rPr>
-              <a:t>request 1/5: JA3=f21f8e6c...  -&gt; FLAGGED</a:t>
+              <a:t>Claims to be:  Chrome</a:t>
             </a:r>
           </a:p>
           <a:p>
@@ -4480,11 +4623,11 @@
             <a:r>
               <a:rPr sz="1300" b="0">
                 <a:solidFill>
-                  <a:srgbClr val="F16A54"/>
+                  <a:srgbClr val="9AA3B5"/>
                 </a:solidFill>
                 <a:latin typeface="Consolas"/>
               </a:rPr>
-              <a:t>request 2/5: JA3=f21f8e6c...  -&gt; FLAGGED</a:t>
+              <a:t>Measured JA3:  f21f8e6cf70d5980ecfe9fa2e0ef401c</a:t>
             </a:r>
           </a:p>
           <a:p>
@@ -4497,13 +4640,13 @@
               </a:spcAft>
             </a:pPr>
             <a:r>
-              <a:rPr sz="1300" b="0">
+              <a:rPr sz="1500" b="1">
                 <a:solidFill>
                   <a:srgbClr val="F16A54"/>
                 </a:solidFill>
                 <a:latin typeface="Consolas"/>
               </a:rPr>
-              <a:t>request 3/5: JA3=f21f8e6c...  -&gt; FLAGGED</a:t>
+              <a:t>VERDICT: *** MISMATCH — SUSPICIOUS ***</a:t>
             </a:r>
           </a:p>
           <a:p>
@@ -4518,49 +4661,11 @@
             <a:r>
               <a:rPr sz="1300" b="0">
                 <a:solidFill>
-                  <a:srgbClr val="F16A54"/>
+                  <a:srgbClr val="9AA3B5"/>
                 </a:solidFill>
                 <a:latin typeface="Consolas"/>
               </a:rPr>
-              <a:t>request 4/5: JA3=f21f8e6c...  -&gt; FLAGGED</a:t>
-            </a:r>
-          </a:p>
-          <a:p>
-            <a:pPr>
-              <a:lnSpc>
-                <a:spcPct val="125000"/>
-              </a:lnSpc>
-              <a:spcAft>
-                <a:spcPts val="500"/>
-              </a:spcAft>
-            </a:pPr>
-            <a:r>
-              <a:rPr sz="1300" b="0">
-                <a:solidFill>
-                  <a:srgbClr val="F16A54"/>
-                </a:solidFill>
-                <a:latin typeface="Consolas"/>
-              </a:rPr>
-              <a:t>request 5/5: JA3=f21f8e6c...  -&gt; FLAGGED</a:t>
-            </a:r>
-          </a:p>
-          <a:p>
-            <a:pPr>
-              <a:lnSpc>
-                <a:spcPct val="125000"/>
-              </a:lnSpc>
-              <a:spcAft>
-                <a:spcPts val="500"/>
-              </a:spcAft>
-            </a:pPr>
-            <a:r>
-              <a:rPr sz="1400" b="1">
-                <a:solidFill>
-                  <a:srgbClr val="49C79A"/>
-                </a:solidFill>
-                <a:latin typeface="Consolas"/>
-              </a:rPr>
-              <a:t>Result: 5/5 requests correctly flagged.</a:t>
+              <a:t>matches: Python 3.14.6 stdlib ssl (ssl.create_default_context)</a:t>
             </a:r>
           </a:p>
         </p:txBody>
@@ -4573,7 +4678,7 @@
         </p:nvSpPr>
         <p:spPr>
           <a:xfrm>
-            <a:off x="685800" y="5212080"/>
+            <a:off x="685800" y="5120640"/>
             <a:ext cx="9875520" cy="1828800"/>
           </a:xfrm>
           <a:prstGeom prst="rect">
@@ -4593,13 +4698,13 @@
               </a:lnSpc>
             </a:pPr>
             <a:r>
-              <a:rPr sz="1400" b="0">
+              <a:rPr sz="1500" b="0">
                 <a:solidFill>
                   <a:srgbClr val="9AA3B5"/>
                 </a:solidFill>
                 <a:latin typeface="Calibri"/>
               </a:rPr>
-              <a:t>Real botnets spread requests across many IPs to stay under rate-limit thresholds. That trick doesn't help here — every connection is judged on its own real handshake, independently, so more requests just means more identical evidence.</a:t>
+              <a:t>The claimed identity was checked against the database's real Chrome hashes from slide 7 — it didn't match, so it's flagged, and the tool reports what it actually is instead.</a:t>
             </a:r>
           </a:p>
         </p:txBody>
@@ -4695,7 +4800,7 @@
                 </a:solidFill>
                 <a:latin typeface="Consolas"/>
               </a:rPr>
-              <a:t>13 / 14</a:t>
+              <a:t>13 / 15</a:t>
             </a:r>
           </a:p>
         </p:txBody>
@@ -4734,7 +4839,7 @@
                 </a:solidFill>
                 <a:latin typeface="Consolas"/>
               </a:rPr>
-              <a:t>WHAT THIS DOESN'T PROVE</a:t>
+              <a:t>UNDER LOAD</a:t>
             </a:r>
           </a:p>
         </p:txBody>
@@ -4773,21 +4878,199 @@
                 </a:solidFill>
                 <a:latin typeface="Calibri"/>
               </a:rPr>
-              <a:t>A fingerprint is a hint, not a verdict.</a:t>
-            </a:r>
-          </a:p>
-        </p:txBody>
-      </p:sp>
-      <p:sp>
-        <p:nvSpPr>
-          <p:cNvPr id="6" name="TextBox 5"/>
-          <p:cNvSpPr txBox="1"/>
+              <a:t>5 rapid requests. 5 for 5, caught.</a:t>
+            </a:r>
+          </a:p>
+        </p:txBody>
+      </p:sp>
+      <p:sp>
+        <p:nvSpPr>
+          <p:cNvPr id="6" name="Rounded Rectangle 5"/>
+          <p:cNvSpPr/>
           <p:nvPr/>
         </p:nvSpPr>
         <p:spPr>
           <a:xfrm>
             <a:off x="685800" y="2194560"/>
-            <a:ext cx="548640" cy="457200"/>
+            <a:ext cx="10515600" cy="2743200"/>
+          </a:xfrm>
+          <a:prstGeom prst="roundRect">
+            <a:avLst>
+              <a:gd name="adj" fmla="val 5000"/>
+            </a:avLst>
+          </a:prstGeom>
+          <a:solidFill>
+            <a:srgbClr val="121826"/>
+          </a:solidFill>
+          <a:ln w="12700">
+            <a:solidFill>
+              <a:srgbClr val="232B3D"/>
+            </a:solidFill>
+          </a:ln>
+          <a:effectLst/>
+        </p:spPr>
+        <p:style>
+          <a:lnRef idx="1">
+            <a:schemeClr val="accent1"/>
+          </a:lnRef>
+          <a:fillRef idx="3">
+            <a:schemeClr val="accent1"/>
+          </a:fillRef>
+          <a:effectRef idx="2">
+            <a:schemeClr val="accent1"/>
+          </a:effectRef>
+          <a:fontRef idx="minor">
+            <a:schemeClr val="lt1"/>
+          </a:fontRef>
+        </p:style>
+        <p:txBody>
+          <a:bodyPr rtlCol="0" anchor="ctr" wrap="square" lIns="256032" rIns="256032" tIns="201168" bIns="201168"/>
+          <a:lstStyle/>
+          <a:p>
+            <a:pPr algn="ctr">
+              <a:lnSpc>
+                <a:spcPct val="125000"/>
+              </a:lnSpc>
+              <a:spcAft>
+                <a:spcPts val="500"/>
+              </a:spcAft>
+            </a:pPr>
+            <a:r>
+              <a:rPr sz="1300" b="0">
+                <a:solidFill>
+                  <a:srgbClr val="69728A"/>
+                </a:solidFill>
+                <a:latin typeface="Consolas"/>
+              </a:rPr>
+              <a:t>$ python experiments/bombard_demo.py 5</a:t>
+            </a:r>
+          </a:p>
+          <a:p>
+            <a:pPr>
+              <a:lnSpc>
+                <a:spcPct val="125000"/>
+              </a:lnSpc>
+              <a:spcAft>
+                <a:spcPts val="500"/>
+              </a:spcAft>
+            </a:pPr>
+            <a:r>
+              <a:rPr sz="1300" b="0">
+                <a:solidFill>
+                  <a:srgbClr val="F16A54"/>
+                </a:solidFill>
+                <a:latin typeface="Consolas"/>
+              </a:rPr>
+              <a:t>request 1/5: JA3=f21f8e6c...  -&gt; FLAGGED</a:t>
+            </a:r>
+          </a:p>
+          <a:p>
+            <a:pPr>
+              <a:lnSpc>
+                <a:spcPct val="125000"/>
+              </a:lnSpc>
+              <a:spcAft>
+                <a:spcPts val="500"/>
+              </a:spcAft>
+            </a:pPr>
+            <a:r>
+              <a:rPr sz="1300" b="0">
+                <a:solidFill>
+                  <a:srgbClr val="F16A54"/>
+                </a:solidFill>
+                <a:latin typeface="Consolas"/>
+              </a:rPr>
+              <a:t>request 2/5: JA3=f21f8e6c...  -&gt; FLAGGED</a:t>
+            </a:r>
+          </a:p>
+          <a:p>
+            <a:pPr>
+              <a:lnSpc>
+                <a:spcPct val="125000"/>
+              </a:lnSpc>
+              <a:spcAft>
+                <a:spcPts val="500"/>
+              </a:spcAft>
+            </a:pPr>
+            <a:r>
+              <a:rPr sz="1300" b="0">
+                <a:solidFill>
+                  <a:srgbClr val="F16A54"/>
+                </a:solidFill>
+                <a:latin typeface="Consolas"/>
+              </a:rPr>
+              <a:t>request 3/5: JA3=f21f8e6c...  -&gt; FLAGGED</a:t>
+            </a:r>
+          </a:p>
+          <a:p>
+            <a:pPr>
+              <a:lnSpc>
+                <a:spcPct val="125000"/>
+              </a:lnSpc>
+              <a:spcAft>
+                <a:spcPts val="500"/>
+              </a:spcAft>
+            </a:pPr>
+            <a:r>
+              <a:rPr sz="1300" b="0">
+                <a:solidFill>
+                  <a:srgbClr val="F16A54"/>
+                </a:solidFill>
+                <a:latin typeface="Consolas"/>
+              </a:rPr>
+              <a:t>request 4/5: JA3=f21f8e6c...  -&gt; FLAGGED</a:t>
+            </a:r>
+          </a:p>
+          <a:p>
+            <a:pPr>
+              <a:lnSpc>
+                <a:spcPct val="125000"/>
+              </a:lnSpc>
+              <a:spcAft>
+                <a:spcPts val="500"/>
+              </a:spcAft>
+            </a:pPr>
+            <a:r>
+              <a:rPr sz="1300" b="0">
+                <a:solidFill>
+                  <a:srgbClr val="F16A54"/>
+                </a:solidFill>
+                <a:latin typeface="Consolas"/>
+              </a:rPr>
+              <a:t>request 5/5: JA3=f21f8e6c...  -&gt; FLAGGED</a:t>
+            </a:r>
+          </a:p>
+          <a:p>
+            <a:pPr>
+              <a:lnSpc>
+                <a:spcPct val="125000"/>
+              </a:lnSpc>
+              <a:spcAft>
+                <a:spcPts val="500"/>
+              </a:spcAft>
+            </a:pPr>
+            <a:r>
+              <a:rPr sz="1400" b="1">
+                <a:solidFill>
+                  <a:srgbClr val="49C79A"/>
+                </a:solidFill>
+                <a:latin typeface="Consolas"/>
+              </a:rPr>
+              <a:t>Result: 5/5 requests correctly flagged.</a:t>
+            </a:r>
+          </a:p>
+        </p:txBody>
+      </p:sp>
+      <p:sp>
+        <p:nvSpPr>
+          <p:cNvPr id="7" name="TextBox 6"/>
+          <p:cNvSpPr txBox="1"/>
+          <p:nvPr/>
+        </p:nvSpPr>
+        <p:spPr>
+          <a:xfrm>
+            <a:off x="685800" y="5212080"/>
+            <a:ext cx="9875520" cy="1828800"/>
           </a:xfrm>
           <a:prstGeom prst="rect">
             <a:avLst/>
@@ -4802,368 +5085,17 @@
           <a:p>
             <a:pPr algn="l">
               <a:lnSpc>
-                <a:spcPct val="115000"/>
-              </a:lnSpc>
-            </a:pPr>
-            <a:r>
-              <a:rPr sz="1400" b="1">
-                <a:solidFill>
-                  <a:srgbClr val="E8A33D"/>
-                </a:solidFill>
-                <a:latin typeface="Consolas"/>
-              </a:rPr>
-              <a:t>01</a:t>
-            </a:r>
-          </a:p>
-        </p:txBody>
-      </p:sp>
-      <p:sp>
-        <p:nvSpPr>
-          <p:cNvPr id="7" name="TextBox 6"/>
-          <p:cNvSpPr txBox="1"/>
-          <p:nvPr/>
-        </p:nvSpPr>
-        <p:spPr>
-          <a:xfrm>
-            <a:off x="1371600" y="2194560"/>
-            <a:ext cx="9601200" cy="685800"/>
-          </a:xfrm>
-          <a:prstGeom prst="rect">
-            <a:avLst/>
-          </a:prstGeom>
-          <a:noFill/>
-        </p:spPr>
-        <p:txBody>
-          <a:bodyPr wrap="square">
-            <a:spAutoFit/>
-          </a:bodyPr>
-          <a:lstStyle/>
-          <a:p>
-            <a:pPr algn="l">
-              <a:lnSpc>
-                <a:spcPct val="120000"/>
-              </a:lnSpc>
-            </a:pPr>
-            <a:r>
-              <a:rPr sz="1500" b="0">
+                <a:spcPct val="135000"/>
+              </a:lnSpc>
+            </a:pPr>
+            <a:r>
+              <a:rPr sz="1400" b="0">
                 <a:solidFill>
                   <a:srgbClr val="9AA3B5"/>
                 </a:solidFill>
                 <a:latin typeface="Calibri"/>
               </a:rPr>
-              <a:t>Same hash != same software — two unrelated programs on the same library/config fingerprint identically.</a:t>
-            </a:r>
-          </a:p>
-        </p:txBody>
-      </p:sp>
-      <p:sp>
-        <p:nvSpPr>
-          <p:cNvPr id="8" name="TextBox 7"/>
-          <p:cNvSpPr txBox="1"/>
-          <p:nvPr/>
-        </p:nvSpPr>
-        <p:spPr>
-          <a:xfrm>
-            <a:off x="685800" y="2971800"/>
-            <a:ext cx="548640" cy="457200"/>
-          </a:xfrm>
-          <a:prstGeom prst="rect">
-            <a:avLst/>
-          </a:prstGeom>
-          <a:noFill/>
-        </p:spPr>
-        <p:txBody>
-          <a:bodyPr wrap="square">
-            <a:spAutoFit/>
-          </a:bodyPr>
-          <a:lstStyle/>
-          <a:p>
-            <a:pPr algn="l">
-              <a:lnSpc>
-                <a:spcPct val="115000"/>
-              </a:lnSpc>
-            </a:pPr>
-            <a:r>
-              <a:rPr sz="1400" b="1">
-                <a:solidFill>
-                  <a:srgbClr val="E8A33D"/>
-                </a:solidFill>
-                <a:latin typeface="Consolas"/>
-              </a:rPr>
-              <a:t>02</a:t>
-            </a:r>
-          </a:p>
-        </p:txBody>
-      </p:sp>
-      <p:sp>
-        <p:nvSpPr>
-          <p:cNvPr id="9" name="TextBox 8"/>
-          <p:cNvSpPr txBox="1"/>
-          <p:nvPr/>
-        </p:nvSpPr>
-        <p:spPr>
-          <a:xfrm>
-            <a:off x="1371600" y="2971800"/>
-            <a:ext cx="9601200" cy="685800"/>
-          </a:xfrm>
-          <a:prstGeom prst="rect">
-            <a:avLst/>
-          </a:prstGeom>
-          <a:noFill/>
-        </p:spPr>
-        <p:txBody>
-          <a:bodyPr wrap="square">
-            <a:spAutoFit/>
-          </a:bodyPr>
-          <a:lstStyle/>
-          <a:p>
-            <a:pPr algn="l">
-              <a:lnSpc>
-                <a:spcPct val="120000"/>
-              </a:lnSpc>
-            </a:pPr>
-            <a:r>
-              <a:rPr sz="1500" b="0">
-                <a:solidFill>
-                  <a:srgbClr val="9AA3B5"/>
-                </a:solidFill>
-                <a:latin typeface="Calibri"/>
-              </a:rPr>
-              <a:t>JA3S depends on the client, too — two of our own clients produced an identical JA3S against the same server.</a:t>
-            </a:r>
-          </a:p>
-        </p:txBody>
-      </p:sp>
-      <p:sp>
-        <p:nvSpPr>
-          <p:cNvPr id="10" name="TextBox 9"/>
-          <p:cNvSpPr txBox="1"/>
-          <p:nvPr/>
-        </p:nvSpPr>
-        <p:spPr>
-          <a:xfrm>
-            <a:off x="685800" y="3749040"/>
-            <a:ext cx="548640" cy="457200"/>
-          </a:xfrm>
-          <a:prstGeom prst="rect">
-            <a:avLst/>
-          </a:prstGeom>
-          <a:noFill/>
-        </p:spPr>
-        <p:txBody>
-          <a:bodyPr wrap="square">
-            <a:spAutoFit/>
-          </a:bodyPr>
-          <a:lstStyle/>
-          <a:p>
-            <a:pPr algn="l">
-              <a:lnSpc>
-                <a:spcPct val="115000"/>
-              </a:lnSpc>
-            </a:pPr>
-            <a:r>
-              <a:rPr sz="1400" b="1">
-                <a:solidFill>
-                  <a:srgbClr val="E8A33D"/>
-                </a:solidFill>
-                <a:latin typeface="Consolas"/>
-              </a:rPr>
-              <a:t>03</a:t>
-            </a:r>
-          </a:p>
-        </p:txBody>
-      </p:sp>
-      <p:sp>
-        <p:nvSpPr>
-          <p:cNvPr id="11" name="TextBox 10"/>
-          <p:cNvSpPr txBox="1"/>
-          <p:nvPr/>
-        </p:nvSpPr>
-        <p:spPr>
-          <a:xfrm>
-            <a:off x="1371600" y="3749040"/>
-            <a:ext cx="9601200" cy="685800"/>
-          </a:xfrm>
-          <a:prstGeom prst="rect">
-            <a:avLst/>
-          </a:prstGeom>
-          <a:noFill/>
-        </p:spPr>
-        <p:txBody>
-          <a:bodyPr wrap="square">
-            <a:spAutoFit/>
-          </a:bodyPr>
-          <a:lstStyle/>
-          <a:p>
-            <a:pPr algn="l">
-              <a:lnSpc>
-                <a:spcPct val="120000"/>
-              </a:lnSpc>
-            </a:pPr>
-            <a:r>
-              <a:rPr sz="1500" b="0">
-                <a:solidFill>
-                  <a:srgbClr val="9AA3B5"/>
-                </a:solidFill>
-                <a:latin typeface="Calibri"/>
-              </a:rPr>
-              <a:t>GREASE and reordering actively fight back — Chrome randomizes its own hello on purpose (slide 8).</a:t>
-            </a:r>
-          </a:p>
-        </p:txBody>
-      </p:sp>
-      <p:sp>
-        <p:nvSpPr>
-          <p:cNvPr id="12" name="TextBox 11"/>
-          <p:cNvSpPr txBox="1"/>
-          <p:nvPr/>
-        </p:nvSpPr>
-        <p:spPr>
-          <a:xfrm>
-            <a:off x="685800" y="4526280"/>
-            <a:ext cx="548640" cy="457200"/>
-          </a:xfrm>
-          <a:prstGeom prst="rect">
-            <a:avLst/>
-          </a:prstGeom>
-          <a:noFill/>
-        </p:spPr>
-        <p:txBody>
-          <a:bodyPr wrap="square">
-            <a:spAutoFit/>
-          </a:bodyPr>
-          <a:lstStyle/>
-          <a:p>
-            <a:pPr algn="l">
-              <a:lnSpc>
-                <a:spcPct val="115000"/>
-              </a:lnSpc>
-            </a:pPr>
-            <a:r>
-              <a:rPr sz="1400" b="1">
-                <a:solidFill>
-                  <a:srgbClr val="E8A33D"/>
-                </a:solidFill>
-                <a:latin typeface="Consolas"/>
-              </a:rPr>
-              <a:t>04</a:t>
-            </a:r>
-          </a:p>
-        </p:txBody>
-      </p:sp>
-      <p:sp>
-        <p:nvSpPr>
-          <p:cNvPr id="13" name="TextBox 12"/>
-          <p:cNvSpPr txBox="1"/>
-          <p:nvPr/>
-        </p:nvSpPr>
-        <p:spPr>
-          <a:xfrm>
-            <a:off x="1371600" y="4526280"/>
-            <a:ext cx="9601200" cy="685800"/>
-          </a:xfrm>
-          <a:prstGeom prst="rect">
-            <a:avLst/>
-          </a:prstGeom>
-          <a:noFill/>
-        </p:spPr>
-        <p:txBody>
-          <a:bodyPr wrap="square">
-            <a:spAutoFit/>
-          </a:bodyPr>
-          <a:lstStyle/>
-          <a:p>
-            <a:pPr algn="l">
-              <a:lnSpc>
-                <a:spcPct val="120000"/>
-              </a:lnSpc>
-            </a:pPr>
-            <a:r>
-              <a:rPr sz="1500" b="0">
-                <a:solidFill>
-                  <a:srgbClr val="9AA3B5"/>
-                </a:solidFill>
-                <a:latin typeface="Calibri"/>
-              </a:rPr>
-              <a:t>Evasion is possible — since the fingerprint is client-controlled bytes, a determined attacker can copy it exactly.</a:t>
-            </a:r>
-          </a:p>
-        </p:txBody>
-      </p:sp>
-      <p:sp>
-        <p:nvSpPr>
-          <p:cNvPr id="14" name="TextBox 13"/>
-          <p:cNvSpPr txBox="1"/>
-          <p:nvPr/>
-        </p:nvSpPr>
-        <p:spPr>
-          <a:xfrm>
-            <a:off x="685800" y="5303520"/>
-            <a:ext cx="548640" cy="457200"/>
-          </a:xfrm>
-          <a:prstGeom prst="rect">
-            <a:avLst/>
-          </a:prstGeom>
-          <a:noFill/>
-        </p:spPr>
-        <p:txBody>
-          <a:bodyPr wrap="square">
-            <a:spAutoFit/>
-          </a:bodyPr>
-          <a:lstStyle/>
-          <a:p>
-            <a:pPr algn="l">
-              <a:lnSpc>
-                <a:spcPct val="115000"/>
-              </a:lnSpc>
-            </a:pPr>
-            <a:r>
-              <a:rPr sz="1400" b="1">
-                <a:solidFill>
-                  <a:srgbClr val="E8A33D"/>
-                </a:solidFill>
-                <a:latin typeface="Consolas"/>
-              </a:rPr>
-              <a:t>05</a:t>
-            </a:r>
-          </a:p>
-        </p:txBody>
-      </p:sp>
-      <p:sp>
-        <p:nvSpPr>
-          <p:cNvPr id="15" name="TextBox 14"/>
-          <p:cNvSpPr txBox="1"/>
-          <p:nvPr/>
-        </p:nvSpPr>
-        <p:spPr>
-          <a:xfrm>
-            <a:off x="1371600" y="5303520"/>
-            <a:ext cx="9601200" cy="685800"/>
-          </a:xfrm>
-          <a:prstGeom prst="rect">
-            <a:avLst/>
-          </a:prstGeom>
-          <a:noFill/>
-        </p:spPr>
-        <p:txBody>
-          <a:bodyPr wrap="square">
-            <a:spAutoFit/>
-          </a:bodyPr>
-          <a:lstStyle/>
-          <a:p>
-            <a:pPr algn="l">
-              <a:lnSpc>
-                <a:spcPct val="120000"/>
-              </a:lnSpc>
-            </a:pPr>
-            <a:r>
-              <a:rPr sz="1500" b="0">
-                <a:solidFill>
-                  <a:srgbClr val="9AA3B5"/>
-                </a:solidFill>
-                <a:latin typeface="Calibri"/>
-              </a:rPr>
-              <a:t>Nothing here decrypts anything — only the already-unencrypted handshake preamble is ever read.</a:t>
+              <a:t>Real botnets spread requests across many IPs to stay under rate-limit thresholds. That trick doesn't help here — every connection is judged on its own real handshake, independently, so more requests just means more identical evidence.</a:t>
             </a:r>
           </a:p>
         </p:txBody>
@@ -5259,7 +5191,7 @@
                 </a:solidFill>
                 <a:latin typeface="Consolas"/>
               </a:rPr>
-              <a:t>14 / 14</a:t>
+              <a:t>14 / 15</a:t>
             </a:r>
           </a:p>
         </p:txBody>
@@ -5298,7 +5230,7 @@
                 </a:solidFill>
                 <a:latin typeface="Consolas"/>
               </a:rPr>
-              <a:t>IN SUMMARY</a:t>
+              <a:t>WHAT THIS DOESN'T PROVE</a:t>
             </a:r>
           </a:p>
         </p:txBody>
@@ -5337,6 +5269,570 @@
                 </a:solidFill>
                 <a:latin typeface="Calibri"/>
               </a:rPr>
+              <a:t>A fingerprint is a hint, not a verdict.</a:t>
+            </a:r>
+          </a:p>
+        </p:txBody>
+      </p:sp>
+      <p:sp>
+        <p:nvSpPr>
+          <p:cNvPr id="6" name="TextBox 5"/>
+          <p:cNvSpPr txBox="1"/>
+          <p:nvPr/>
+        </p:nvSpPr>
+        <p:spPr>
+          <a:xfrm>
+            <a:off x="685800" y="2194560"/>
+            <a:ext cx="548640" cy="457200"/>
+          </a:xfrm>
+          <a:prstGeom prst="rect">
+            <a:avLst/>
+          </a:prstGeom>
+          <a:noFill/>
+        </p:spPr>
+        <p:txBody>
+          <a:bodyPr wrap="square">
+            <a:spAutoFit/>
+          </a:bodyPr>
+          <a:lstStyle/>
+          <a:p>
+            <a:pPr algn="l">
+              <a:lnSpc>
+                <a:spcPct val="115000"/>
+              </a:lnSpc>
+            </a:pPr>
+            <a:r>
+              <a:rPr sz="1400" b="1">
+                <a:solidFill>
+                  <a:srgbClr val="E8A33D"/>
+                </a:solidFill>
+                <a:latin typeface="Consolas"/>
+              </a:rPr>
+              <a:t>01</a:t>
+            </a:r>
+          </a:p>
+        </p:txBody>
+      </p:sp>
+      <p:sp>
+        <p:nvSpPr>
+          <p:cNvPr id="7" name="TextBox 6"/>
+          <p:cNvSpPr txBox="1"/>
+          <p:nvPr/>
+        </p:nvSpPr>
+        <p:spPr>
+          <a:xfrm>
+            <a:off x="1371600" y="2194560"/>
+            <a:ext cx="9601200" cy="685800"/>
+          </a:xfrm>
+          <a:prstGeom prst="rect">
+            <a:avLst/>
+          </a:prstGeom>
+          <a:noFill/>
+        </p:spPr>
+        <p:txBody>
+          <a:bodyPr wrap="square">
+            <a:spAutoFit/>
+          </a:bodyPr>
+          <a:lstStyle/>
+          <a:p>
+            <a:pPr algn="l">
+              <a:lnSpc>
+                <a:spcPct val="120000"/>
+              </a:lnSpc>
+            </a:pPr>
+            <a:r>
+              <a:rPr sz="1500" b="0">
+                <a:solidFill>
+                  <a:srgbClr val="9AA3B5"/>
+                </a:solidFill>
+                <a:latin typeface="Calibri"/>
+              </a:rPr>
+              <a:t>Same hash != same software — two unrelated programs on the same library/config fingerprint identically.</a:t>
+            </a:r>
+          </a:p>
+        </p:txBody>
+      </p:sp>
+      <p:sp>
+        <p:nvSpPr>
+          <p:cNvPr id="8" name="TextBox 7"/>
+          <p:cNvSpPr txBox="1"/>
+          <p:nvPr/>
+        </p:nvSpPr>
+        <p:spPr>
+          <a:xfrm>
+            <a:off x="685800" y="2971800"/>
+            <a:ext cx="548640" cy="457200"/>
+          </a:xfrm>
+          <a:prstGeom prst="rect">
+            <a:avLst/>
+          </a:prstGeom>
+          <a:noFill/>
+        </p:spPr>
+        <p:txBody>
+          <a:bodyPr wrap="square">
+            <a:spAutoFit/>
+          </a:bodyPr>
+          <a:lstStyle/>
+          <a:p>
+            <a:pPr algn="l">
+              <a:lnSpc>
+                <a:spcPct val="115000"/>
+              </a:lnSpc>
+            </a:pPr>
+            <a:r>
+              <a:rPr sz="1400" b="1">
+                <a:solidFill>
+                  <a:srgbClr val="E8A33D"/>
+                </a:solidFill>
+                <a:latin typeface="Consolas"/>
+              </a:rPr>
+              <a:t>02</a:t>
+            </a:r>
+          </a:p>
+        </p:txBody>
+      </p:sp>
+      <p:sp>
+        <p:nvSpPr>
+          <p:cNvPr id="9" name="TextBox 8"/>
+          <p:cNvSpPr txBox="1"/>
+          <p:nvPr/>
+        </p:nvSpPr>
+        <p:spPr>
+          <a:xfrm>
+            <a:off x="1371600" y="2971800"/>
+            <a:ext cx="9601200" cy="685800"/>
+          </a:xfrm>
+          <a:prstGeom prst="rect">
+            <a:avLst/>
+          </a:prstGeom>
+          <a:noFill/>
+        </p:spPr>
+        <p:txBody>
+          <a:bodyPr wrap="square">
+            <a:spAutoFit/>
+          </a:bodyPr>
+          <a:lstStyle/>
+          <a:p>
+            <a:pPr algn="l">
+              <a:lnSpc>
+                <a:spcPct val="120000"/>
+              </a:lnSpc>
+            </a:pPr>
+            <a:r>
+              <a:rPr sz="1500" b="0">
+                <a:solidFill>
+                  <a:srgbClr val="9AA3B5"/>
+                </a:solidFill>
+                <a:latin typeface="Calibri"/>
+              </a:rPr>
+              <a:t>JA3S depends on the client, too — two of our own clients produced an identical JA3S against the same server.</a:t>
+            </a:r>
+          </a:p>
+        </p:txBody>
+      </p:sp>
+      <p:sp>
+        <p:nvSpPr>
+          <p:cNvPr id="10" name="TextBox 9"/>
+          <p:cNvSpPr txBox="1"/>
+          <p:nvPr/>
+        </p:nvSpPr>
+        <p:spPr>
+          <a:xfrm>
+            <a:off x="685800" y="3749040"/>
+            <a:ext cx="548640" cy="457200"/>
+          </a:xfrm>
+          <a:prstGeom prst="rect">
+            <a:avLst/>
+          </a:prstGeom>
+          <a:noFill/>
+        </p:spPr>
+        <p:txBody>
+          <a:bodyPr wrap="square">
+            <a:spAutoFit/>
+          </a:bodyPr>
+          <a:lstStyle/>
+          <a:p>
+            <a:pPr algn="l">
+              <a:lnSpc>
+                <a:spcPct val="115000"/>
+              </a:lnSpc>
+            </a:pPr>
+            <a:r>
+              <a:rPr sz="1400" b="1">
+                <a:solidFill>
+                  <a:srgbClr val="E8A33D"/>
+                </a:solidFill>
+                <a:latin typeface="Consolas"/>
+              </a:rPr>
+              <a:t>03</a:t>
+            </a:r>
+          </a:p>
+        </p:txBody>
+      </p:sp>
+      <p:sp>
+        <p:nvSpPr>
+          <p:cNvPr id="11" name="TextBox 10"/>
+          <p:cNvSpPr txBox="1"/>
+          <p:nvPr/>
+        </p:nvSpPr>
+        <p:spPr>
+          <a:xfrm>
+            <a:off x="1371600" y="3749040"/>
+            <a:ext cx="9601200" cy="685800"/>
+          </a:xfrm>
+          <a:prstGeom prst="rect">
+            <a:avLst/>
+          </a:prstGeom>
+          <a:noFill/>
+        </p:spPr>
+        <p:txBody>
+          <a:bodyPr wrap="square">
+            <a:spAutoFit/>
+          </a:bodyPr>
+          <a:lstStyle/>
+          <a:p>
+            <a:pPr algn="l">
+              <a:lnSpc>
+                <a:spcPct val="120000"/>
+              </a:lnSpc>
+            </a:pPr>
+            <a:r>
+              <a:rPr sz="1500" b="0">
+                <a:solidFill>
+                  <a:srgbClr val="9AA3B5"/>
+                </a:solidFill>
+                <a:latin typeface="Calibri"/>
+              </a:rPr>
+              <a:t>GREASE and reordering actively fight back — Chrome randomizes its own hello on purpose (slide 8).</a:t>
+            </a:r>
+          </a:p>
+        </p:txBody>
+      </p:sp>
+      <p:sp>
+        <p:nvSpPr>
+          <p:cNvPr id="12" name="TextBox 11"/>
+          <p:cNvSpPr txBox="1"/>
+          <p:nvPr/>
+        </p:nvSpPr>
+        <p:spPr>
+          <a:xfrm>
+            <a:off x="685800" y="4526280"/>
+            <a:ext cx="548640" cy="457200"/>
+          </a:xfrm>
+          <a:prstGeom prst="rect">
+            <a:avLst/>
+          </a:prstGeom>
+          <a:noFill/>
+        </p:spPr>
+        <p:txBody>
+          <a:bodyPr wrap="square">
+            <a:spAutoFit/>
+          </a:bodyPr>
+          <a:lstStyle/>
+          <a:p>
+            <a:pPr algn="l">
+              <a:lnSpc>
+                <a:spcPct val="115000"/>
+              </a:lnSpc>
+            </a:pPr>
+            <a:r>
+              <a:rPr sz="1400" b="1">
+                <a:solidFill>
+                  <a:srgbClr val="E8A33D"/>
+                </a:solidFill>
+                <a:latin typeface="Consolas"/>
+              </a:rPr>
+              <a:t>04</a:t>
+            </a:r>
+          </a:p>
+        </p:txBody>
+      </p:sp>
+      <p:sp>
+        <p:nvSpPr>
+          <p:cNvPr id="13" name="TextBox 12"/>
+          <p:cNvSpPr txBox="1"/>
+          <p:nvPr/>
+        </p:nvSpPr>
+        <p:spPr>
+          <a:xfrm>
+            <a:off x="1371600" y="4526280"/>
+            <a:ext cx="9601200" cy="685800"/>
+          </a:xfrm>
+          <a:prstGeom prst="rect">
+            <a:avLst/>
+          </a:prstGeom>
+          <a:noFill/>
+        </p:spPr>
+        <p:txBody>
+          <a:bodyPr wrap="square">
+            <a:spAutoFit/>
+          </a:bodyPr>
+          <a:lstStyle/>
+          <a:p>
+            <a:pPr algn="l">
+              <a:lnSpc>
+                <a:spcPct val="120000"/>
+              </a:lnSpc>
+            </a:pPr>
+            <a:r>
+              <a:rPr sz="1500" b="0">
+                <a:solidFill>
+                  <a:srgbClr val="9AA3B5"/>
+                </a:solidFill>
+                <a:latin typeface="Calibri"/>
+              </a:rPr>
+              <a:t>Evasion is possible — since the fingerprint is client-controlled bytes, a determined attacker can copy it exactly.</a:t>
+            </a:r>
+          </a:p>
+        </p:txBody>
+      </p:sp>
+      <p:sp>
+        <p:nvSpPr>
+          <p:cNvPr id="14" name="TextBox 13"/>
+          <p:cNvSpPr txBox="1"/>
+          <p:nvPr/>
+        </p:nvSpPr>
+        <p:spPr>
+          <a:xfrm>
+            <a:off x="685800" y="5303520"/>
+            <a:ext cx="548640" cy="457200"/>
+          </a:xfrm>
+          <a:prstGeom prst="rect">
+            <a:avLst/>
+          </a:prstGeom>
+          <a:noFill/>
+        </p:spPr>
+        <p:txBody>
+          <a:bodyPr wrap="square">
+            <a:spAutoFit/>
+          </a:bodyPr>
+          <a:lstStyle/>
+          <a:p>
+            <a:pPr algn="l">
+              <a:lnSpc>
+                <a:spcPct val="115000"/>
+              </a:lnSpc>
+            </a:pPr>
+            <a:r>
+              <a:rPr sz="1400" b="1">
+                <a:solidFill>
+                  <a:srgbClr val="E8A33D"/>
+                </a:solidFill>
+                <a:latin typeface="Consolas"/>
+              </a:rPr>
+              <a:t>05</a:t>
+            </a:r>
+          </a:p>
+        </p:txBody>
+      </p:sp>
+      <p:sp>
+        <p:nvSpPr>
+          <p:cNvPr id="15" name="TextBox 14"/>
+          <p:cNvSpPr txBox="1"/>
+          <p:nvPr/>
+        </p:nvSpPr>
+        <p:spPr>
+          <a:xfrm>
+            <a:off x="1371600" y="5303520"/>
+            <a:ext cx="9601200" cy="685800"/>
+          </a:xfrm>
+          <a:prstGeom prst="rect">
+            <a:avLst/>
+          </a:prstGeom>
+          <a:noFill/>
+        </p:spPr>
+        <p:txBody>
+          <a:bodyPr wrap="square">
+            <a:spAutoFit/>
+          </a:bodyPr>
+          <a:lstStyle/>
+          <a:p>
+            <a:pPr algn="l">
+              <a:lnSpc>
+                <a:spcPct val="120000"/>
+              </a:lnSpc>
+            </a:pPr>
+            <a:r>
+              <a:rPr sz="1500" b="0">
+                <a:solidFill>
+                  <a:srgbClr val="9AA3B5"/>
+                </a:solidFill>
+                <a:latin typeface="Calibri"/>
+              </a:rPr>
+              <a:t>Nothing here decrypts anything — only the already-unencrypted handshake preamble is ever read.</a:t>
+            </a:r>
+          </a:p>
+        </p:txBody>
+      </p:sp>
+    </p:spTree>
+  </p:cSld>
+  <p:clrMapOvr>
+    <a:masterClrMapping/>
+  </p:clrMapOvr>
+</p:sld>
+</file>
+
+<file path=ppt/slides/slide15.xml><?xml version="1.0" encoding="utf-8"?>
+<p:sld xmlns:a="http://schemas.openxmlformats.org/drawingml/2006/main" xmlns:p="http://schemas.openxmlformats.org/presentationml/2006/main" xmlns:r="http://schemas.openxmlformats.org/officeDocument/2006/relationships">
+  <p:cSld>
+    <p:spTree>
+      <p:nvGrpSpPr>
+        <p:cNvPr id="1" name=""/>
+        <p:cNvGrpSpPr/>
+        <p:nvPr/>
+      </p:nvGrpSpPr>
+      <p:grpSpPr/>
+      <p:sp>
+        <p:nvSpPr>
+          <p:cNvPr id="2" name="Rectangle 1"/>
+          <p:cNvSpPr/>
+          <p:nvPr/>
+        </p:nvSpPr>
+        <p:spPr>
+          <a:xfrm>
+            <a:off x="0" y="0"/>
+            <a:ext cx="12191695" cy="6858000"/>
+          </a:xfrm>
+          <a:prstGeom prst="rect">
+            <a:avLst/>
+          </a:prstGeom>
+          <a:solidFill>
+            <a:srgbClr val="0A0E17"/>
+          </a:solidFill>
+          <a:ln>
+            <a:noFill/>
+          </a:ln>
+          <a:effectLst/>
+        </p:spPr>
+        <p:style>
+          <a:lnRef idx="1">
+            <a:schemeClr val="accent1"/>
+          </a:lnRef>
+          <a:fillRef idx="3">
+            <a:schemeClr val="accent1"/>
+          </a:fillRef>
+          <a:effectRef idx="2">
+            <a:schemeClr val="accent1"/>
+          </a:effectRef>
+          <a:fontRef idx="minor">
+            <a:schemeClr val="lt1"/>
+          </a:fontRef>
+        </p:style>
+        <p:txBody>
+          <a:bodyPr rtlCol="0" anchor="ctr"/>
+          <a:lstStyle/>
+          <a:p>
+            <a:pPr algn="ctr"/>
+          </a:p>
+        </p:txBody>
+      </p:sp>
+      <p:sp>
+        <p:nvSpPr>
+          <p:cNvPr id="3" name="TextBox 2"/>
+          <p:cNvSpPr txBox="1"/>
+          <p:nvPr/>
+        </p:nvSpPr>
+        <p:spPr>
+          <a:xfrm>
+            <a:off x="685800" y="6355080"/>
+            <a:ext cx="1828800" cy="365760"/>
+          </a:xfrm>
+          <a:prstGeom prst="rect">
+            <a:avLst/>
+          </a:prstGeom>
+          <a:noFill/>
+        </p:spPr>
+        <p:txBody>
+          <a:bodyPr wrap="none">
+            <a:spAutoFit/>
+          </a:bodyPr>
+          <a:lstStyle/>
+          <a:p>
+            <a:r>
+              <a:rPr sz="1100">
+                <a:solidFill>
+                  <a:srgbClr val="69728A"/>
+                </a:solidFill>
+                <a:latin typeface="Consolas"/>
+              </a:rPr>
+              <a:t>15 / 15</a:t>
+            </a:r>
+          </a:p>
+        </p:txBody>
+      </p:sp>
+      <p:sp>
+        <p:nvSpPr>
+          <p:cNvPr id="4" name="TextBox 3"/>
+          <p:cNvSpPr txBox="1"/>
+          <p:nvPr/>
+        </p:nvSpPr>
+        <p:spPr>
+          <a:xfrm>
+            <a:off x="685800" y="594360"/>
+            <a:ext cx="10058400" cy="365760"/>
+          </a:xfrm>
+          <a:prstGeom prst="rect">
+            <a:avLst/>
+          </a:prstGeom>
+          <a:noFill/>
+        </p:spPr>
+        <p:txBody>
+          <a:bodyPr wrap="square">
+            <a:spAutoFit/>
+          </a:bodyPr>
+          <a:lstStyle/>
+          <a:p>
+            <a:pPr algn="l">
+              <a:lnSpc>
+                <a:spcPct val="115000"/>
+              </a:lnSpc>
+            </a:pPr>
+            <a:r>
+              <a:rPr sz="1300" b="1">
+                <a:solidFill>
+                  <a:srgbClr val="E8A33D"/>
+                </a:solidFill>
+                <a:latin typeface="Consolas"/>
+              </a:rPr>
+              <a:t>IN SUMMARY</a:t>
+            </a:r>
+          </a:p>
+        </p:txBody>
+      </p:sp>
+      <p:sp>
+        <p:nvSpPr>
+          <p:cNvPr id="5" name="TextBox 4"/>
+          <p:cNvSpPr txBox="1"/>
+          <p:nvPr/>
+        </p:nvSpPr>
+        <p:spPr>
+          <a:xfrm>
+            <a:off x="685800" y="1051560"/>
+            <a:ext cx="10789920" cy="1554480"/>
+          </a:xfrm>
+          <a:prstGeom prst="rect">
+            <a:avLst/>
+          </a:prstGeom>
+          <a:noFill/>
+        </p:spPr>
+        <p:txBody>
+          <a:bodyPr wrap="square">
+            <a:spAutoFit/>
+          </a:bodyPr>
+          <a:lstStyle/>
+          <a:p>
+            <a:pPr algn="l">
+              <a:lnSpc>
+                <a:spcPct val="105000"/>
+              </a:lnSpc>
+            </a:pPr>
+            <a:r>
+              <a:rPr sz="3200" b="1">
+                <a:solidFill>
+                  <a:srgbClr val="EDEFF4"/>
+                </a:solidFill>
+                <a:latin typeface="Calibri"/>
+              </a:rPr>
               <a:t>Built, tested, and proven against real traffic.</a:t>
             </a:r>
           </a:p>
@@ -5415,7 +5911,7 @@
                 </a:solidFill>
                 <a:latin typeface="Calibri"/>
               </a:rPr>
-              <a:t>56</a:t>
+              <a:t>15</a:t>
             </a:r>
           </a:p>
         </p:txBody>
@@ -5454,7 +5950,7 @@
                 </a:solidFill>
                 <a:latin typeface="Calibri"/>
               </a:rPr>
-              <a:t>tests passing</a:t>
+              <a:t>measured DB entries</a:t>
             </a:r>
           </a:p>
         </p:txBody>
@@ -5493,7 +5989,7 @@
                 </a:solidFill>
                 <a:latin typeface="Calibri"/>
               </a:rPr>
-              <a:t>15</a:t>
+              <a:t>7</a:t>
             </a:r>
           </a:p>
         </p:txBody>
@@ -5532,7 +6028,7 @@
                 </a:solidFill>
                 <a:latin typeface="Calibri"/>
               </a:rPr>
-              <a:t>measured DB entries</a:t>
+              <a:t>real experiments</a:t>
             </a:r>
           </a:p>
         </p:txBody>
@@ -5571,7 +6067,7 @@
                 </a:solidFill>
                 <a:latin typeface="Calibri"/>
               </a:rPr>
-              <a:t>7</a:t>
+              <a:t>2</a:t>
             </a:r>
           </a:p>
         </p:txBody>
@@ -5610,7 +6106,7 @@
                 </a:solidFill>
                 <a:latin typeface="Calibri"/>
               </a:rPr>
-              <a:t>real experiments</a:t>
+              <a:t>fingerprint schemes</a:t>
             </a:r>
           </a:p>
         </p:txBody>
@@ -5618,84 +6114,6 @@
       <p:sp>
         <p:nvSpPr>
           <p:cNvPr id="13" name="TextBox 12"/>
-          <p:cNvSpPr txBox="1"/>
-          <p:nvPr/>
-        </p:nvSpPr>
-        <p:spPr>
-          <a:xfrm>
-            <a:off x="8229600" y="3108960"/>
-            <a:ext cx="2514600" cy="640080"/>
-          </a:xfrm>
-          <a:prstGeom prst="rect">
-            <a:avLst/>
-          </a:prstGeom>
-          <a:noFill/>
-        </p:spPr>
-        <p:txBody>
-          <a:bodyPr wrap="square">
-            <a:spAutoFit/>
-          </a:bodyPr>
-          <a:lstStyle/>
-          <a:p>
-            <a:pPr algn="l">
-              <a:lnSpc>
-                <a:spcPct val="115000"/>
-              </a:lnSpc>
-            </a:pPr>
-            <a:r>
-              <a:rPr sz="3200" b="1">
-                <a:solidFill>
-                  <a:srgbClr val="E8A33D"/>
-                </a:solidFill>
-                <a:latin typeface="Calibri"/>
-              </a:rPr>
-              <a:t>2</a:t>
-            </a:r>
-          </a:p>
-        </p:txBody>
-      </p:sp>
-      <p:sp>
-        <p:nvSpPr>
-          <p:cNvPr id="14" name="TextBox 13"/>
-          <p:cNvSpPr txBox="1"/>
-          <p:nvPr/>
-        </p:nvSpPr>
-        <p:spPr>
-          <a:xfrm>
-            <a:off x="8229600" y="3703320"/>
-            <a:ext cx="2514600" cy="457200"/>
-          </a:xfrm>
-          <a:prstGeom prst="rect">
-            <a:avLst/>
-          </a:prstGeom>
-          <a:noFill/>
-        </p:spPr>
-        <p:txBody>
-          <a:bodyPr wrap="square">
-            <a:spAutoFit/>
-          </a:bodyPr>
-          <a:lstStyle/>
-          <a:p>
-            <a:pPr algn="l">
-              <a:lnSpc>
-                <a:spcPct val="115000"/>
-              </a:lnSpc>
-            </a:pPr>
-            <a:r>
-              <a:rPr sz="1200" b="0">
-                <a:solidFill>
-                  <a:srgbClr val="9AA3B5"/>
-                </a:solidFill>
-                <a:latin typeface="Calibri"/>
-              </a:rPr>
-              <a:t>fingerprint schemes</a:t>
-            </a:r>
-          </a:p>
-        </p:txBody>
-      </p:sp>
-      <p:sp>
-        <p:nvSpPr>
-          <p:cNvPr id="15" name="TextBox 14"/>
           <p:cNvSpPr txBox="1"/>
           <p:nvPr/>
         </p:nvSpPr>
@@ -5823,7 +6241,7 @@
                 </a:solidFill>
                 <a:latin typeface="Consolas"/>
               </a:rPr>
-              <a:t>02 / 14</a:t>
+              <a:t>02 / 15</a:t>
             </a:r>
           </a:p>
         </p:txBody>
@@ -6153,7 +6571,7 @@
                 </a:solidFill>
                 <a:latin typeface="Consolas"/>
               </a:rPr>
-              <a:t>03 / 14</a:t>
+              <a:t>03 / 15</a:t>
             </a:r>
           </a:p>
         </p:txBody>
@@ -6483,7 +6901,7 @@
                 </a:solidFill>
                 <a:latin typeface="Consolas"/>
               </a:rPr>
-              <a:t>04 / 14</a:t>
+              <a:t>04 / 15</a:t>
             </a:r>
           </a:p>
         </p:txBody>
@@ -6891,7 +7309,7 @@
                 </a:solidFill>
                 <a:latin typeface="Consolas"/>
               </a:rPr>
-              <a:t>05 / 14</a:t>
+              <a:t>05 / 15</a:t>
             </a:r>
           </a:p>
         </p:txBody>
@@ -7580,7 +7998,7 @@
                 </a:solidFill>
                 <a:latin typeface="Consolas"/>
               </a:rPr>
-              <a:t>06 / 14</a:t>
+              <a:t>06 / 15</a:t>
             </a:r>
           </a:p>
         </p:txBody>
@@ -7619,7 +8037,7 @@
                 </a:solidFill>
                 <a:latin typeface="Consolas"/>
               </a:rPr>
-              <a:t>REFERENCE DATABASE</a:t>
+              <a:t>BEFORE TRUSTING ANY RESULT</a:t>
             </a:r>
           </a:p>
         </p:txBody>
@@ -7652,13 +8070,13 @@
               </a:lnSpc>
             </a:pPr>
             <a:r>
-              <a:rPr sz="3200" b="1">
+              <a:rPr sz="2800" b="1">
                 <a:solidFill>
                   <a:srgbClr val="EDEFF4"/>
                 </a:solidFill>
                 <a:latin typeface="Calibri"/>
               </a:rPr>
-              <a:t>A notebook of known fingerprints</a:t>
+              <a:t>56 automated tests — what they actually check</a:t>
             </a:r>
           </a:p>
         </p:txBody>
@@ -7672,7 +8090,7 @@
         <p:spPr>
           <a:xfrm>
             <a:off x="685800" y="2148840"/>
-            <a:ext cx="9875520" cy="1828800"/>
+            <a:ext cx="9875520" cy="621792"/>
           </a:xfrm>
           <a:prstGeom prst="rect">
             <a:avLst/>
@@ -7685,197 +8103,214 @@
           </a:bodyPr>
           <a:lstStyle/>
           <a:p>
+            <a:pPr>
+              <a:lnSpc>
+                <a:spcPct val="120000"/>
+              </a:lnSpc>
+            </a:pPr>
+            <a:r>
+              <a:rPr sz="1600">
+                <a:solidFill>
+                  <a:srgbClr val="9AA3B5"/>
+                </a:solidFill>
+                <a:latin typeface="Calibri"/>
+              </a:rPr>
+              <a:t>•  JA3 / JA3S string construction, checked against hand-derived expected values (not just checked against itself).</a:t>
+            </a:r>
+          </a:p>
+        </p:txBody>
+      </p:sp>
+      <p:sp>
+        <p:nvSpPr>
+          <p:cNvPr id="7" name="TextBox 6"/>
+          <p:cNvSpPr txBox="1"/>
+          <p:nvPr/>
+        </p:nvSpPr>
+        <p:spPr>
+          <a:xfrm>
+            <a:off x="685800" y="2770632"/>
+            <a:ext cx="9875520" cy="621792"/>
+          </a:xfrm>
+          <a:prstGeom prst="rect">
+            <a:avLst/>
+          </a:prstGeom>
+          <a:noFill/>
+        </p:spPr>
+        <p:txBody>
+          <a:bodyPr wrap="square">
+            <a:spAutoFit/>
+          </a:bodyPr>
+          <a:lstStyle/>
+          <a:p>
+            <a:pPr>
+              <a:lnSpc>
+                <a:spcPct val="120000"/>
+              </a:lnSpc>
+            </a:pPr>
+            <a:r>
+              <a:rPr sz="1600">
+                <a:solidFill>
+                  <a:srgbClr val="9AA3B5"/>
+                </a:solidFill>
+                <a:latin typeface="Calibri"/>
+              </a:rPr>
+              <a:t>•  JA4, checked against the official FoxIO spec's own published worked examples — an external ground truth.</a:t>
+            </a:r>
+          </a:p>
+        </p:txBody>
+      </p:sp>
+      <p:sp>
+        <p:nvSpPr>
+          <p:cNvPr id="8" name="TextBox 7"/>
+          <p:cNvSpPr txBox="1"/>
+          <p:nvPr/>
+        </p:nvSpPr>
+        <p:spPr>
+          <a:xfrm>
+            <a:off x="685800" y="3392424"/>
+            <a:ext cx="9875520" cy="621792"/>
+          </a:xfrm>
+          <a:prstGeom prst="rect">
+            <a:avLst/>
+          </a:prstGeom>
+          <a:noFill/>
+        </p:spPr>
+        <p:txBody>
+          <a:bodyPr wrap="square">
+            <a:spAutoFit/>
+          </a:bodyPr>
+          <a:lstStyle/>
+          <a:p>
+            <a:pPr>
+              <a:lnSpc>
+                <a:spcPct val="120000"/>
+              </a:lnSpc>
+            </a:pPr>
+            <a:r>
+              <a:rPr sz="1600">
+                <a:solidFill>
+                  <a:srgbClr val="9AA3B5"/>
+                </a:solidFill>
+                <a:latin typeface="Calibri"/>
+              </a:rPr>
+              <a:t>•  Parser edge cases: truncated records, GREASE-only cipher lists, a handshake split across multiple TLS records.</a:t>
+            </a:r>
+          </a:p>
+        </p:txBody>
+      </p:sp>
+      <p:sp>
+        <p:nvSpPr>
+          <p:cNvPr id="9" name="TextBox 8"/>
+          <p:cNvSpPr txBox="1"/>
+          <p:nvPr/>
+        </p:nvSpPr>
+        <p:spPr>
+          <a:xfrm>
+            <a:off x="685800" y="4014216"/>
+            <a:ext cx="9875520" cy="621792"/>
+          </a:xfrm>
+          <a:prstGeom prst="rect">
+            <a:avLst/>
+          </a:prstGeom>
+          <a:noFill/>
+        </p:spPr>
+        <p:txBody>
+          <a:bodyPr wrap="square">
+            <a:spAutoFit/>
+          </a:bodyPr>
+          <a:lstStyle/>
+          <a:p>
+            <a:pPr>
+              <a:lnSpc>
+                <a:spcPct val="120000"/>
+              </a:lnSpc>
+            </a:pPr>
+            <a:r>
+              <a:rPr sz="1600">
+                <a:solidFill>
+                  <a:srgbClr val="9AA3B5"/>
+                </a:solidFill>
+                <a:latin typeface="Calibri"/>
+              </a:rPr>
+              <a:t>•  Database matching logic (known / possible / unknown) and the spoofing-detector's mismatch logic.</a:t>
+            </a:r>
+          </a:p>
+        </p:txBody>
+      </p:sp>
+      <p:sp>
+        <p:nvSpPr>
+          <p:cNvPr id="10" name="TextBox 9"/>
+          <p:cNvSpPr txBox="1"/>
+          <p:nvPr/>
+        </p:nvSpPr>
+        <p:spPr>
+          <a:xfrm>
+            <a:off x="685800" y="4636008"/>
+            <a:ext cx="9875520" cy="621792"/>
+          </a:xfrm>
+          <a:prstGeom prst="rect">
+            <a:avLst/>
+          </a:prstGeom>
+          <a:noFill/>
+        </p:spPr>
+        <p:txBody>
+          <a:bodyPr wrap="square">
+            <a:spAutoFit/>
+          </a:bodyPr>
+          <a:lstStyle/>
+          <a:p>
+            <a:pPr>
+              <a:lnSpc>
+                <a:spcPct val="120000"/>
+              </a:lnSpc>
+            </a:pPr>
+            <a:r>
+              <a:rPr sz="1600">
+                <a:solidFill>
+                  <a:srgbClr val="9AA3B5"/>
+                </a:solidFill>
+                <a:latin typeface="Calibri"/>
+              </a:rPr>
+              <a:t>•  One end-to-end test: build a synthetic pcap, run the full pipeline, check the final answer.</a:t>
+            </a:r>
+          </a:p>
+        </p:txBody>
+      </p:sp>
+      <p:sp>
+        <p:nvSpPr>
+          <p:cNvPr id="11" name="TextBox 10"/>
+          <p:cNvSpPr txBox="1"/>
+          <p:nvPr/>
+        </p:nvSpPr>
+        <p:spPr>
+          <a:xfrm>
+            <a:off x="685800" y="5806440"/>
+            <a:ext cx="9601200" cy="1828800"/>
+          </a:xfrm>
+          <a:prstGeom prst="rect">
+            <a:avLst/>
+          </a:prstGeom>
+          <a:noFill/>
+        </p:spPr>
+        <p:txBody>
+          <a:bodyPr wrap="square">
+            <a:spAutoFit/>
+          </a:bodyPr>
+          <a:lstStyle/>
+          <a:p>
             <a:pPr algn="l">
               <a:lnSpc>
                 <a:spcPct val="135000"/>
               </a:lnSpc>
             </a:pPr>
             <a:r>
-              <a:rPr sz="1700" b="0">
-                <a:solidFill>
-                  <a:srgbClr val="9AA3B5"/>
+              <a:rPr sz="1300" b="0">
+                <a:solidFill>
+                  <a:srgbClr val="69728A"/>
                 </a:solidFill>
                 <a:latin typeface="Calibri"/>
               </a:rPr>
-              <a:t>Every entry was computed from a real, captured network connection — never typed by hand or copied from a public list.</a:t>
-            </a:r>
-          </a:p>
-        </p:txBody>
-      </p:sp>
-      <p:sp>
-        <p:nvSpPr>
-          <p:cNvPr id="7" name="Rounded Rectangle 6"/>
-          <p:cNvSpPr/>
-          <p:nvPr/>
-        </p:nvSpPr>
-        <p:spPr>
-          <a:xfrm>
-            <a:off x="685800" y="2926080"/>
-            <a:ext cx="10515600" cy="2651760"/>
-          </a:xfrm>
-          <a:prstGeom prst="roundRect">
-            <a:avLst>
-              <a:gd name="adj" fmla="val 5000"/>
-            </a:avLst>
-          </a:prstGeom>
-          <a:solidFill>
-            <a:srgbClr val="121826"/>
-          </a:solidFill>
-          <a:ln w="12700">
-            <a:solidFill>
-              <a:srgbClr val="232B3D"/>
-            </a:solidFill>
-          </a:ln>
-          <a:effectLst/>
-        </p:spPr>
-        <p:style>
-          <a:lnRef idx="1">
-            <a:schemeClr val="accent1"/>
-          </a:lnRef>
-          <a:fillRef idx="3">
-            <a:schemeClr val="accent1"/>
-          </a:fillRef>
-          <a:effectRef idx="2">
-            <a:schemeClr val="accent1"/>
-          </a:effectRef>
-          <a:fontRef idx="minor">
-            <a:schemeClr val="lt1"/>
-          </a:fontRef>
-        </p:style>
-        <p:txBody>
-          <a:bodyPr rtlCol="0" anchor="ctr" wrap="square" lIns="256032" rIns="256032" tIns="201168" bIns="201168"/>
-          <a:lstStyle/>
-          <a:p>
-            <a:pPr algn="ctr">
-              <a:lnSpc>
-                <a:spcPct val="125000"/>
-              </a:lnSpc>
-              <a:spcAft>
-                <a:spcPts val="500"/>
-              </a:spcAft>
-            </a:pPr>
-            <a:r>
-              <a:rPr sz="1200" b="0">
-                <a:solidFill>
-                  <a:srgbClr val="69728A"/>
-                </a:solidFill>
-                <a:latin typeface="Consolas"/>
-              </a:rPr>
-              <a:t>tls-fingerprint db list</a:t>
-            </a:r>
-          </a:p>
-          <a:p>
-            <a:pPr>
-              <a:lnSpc>
-                <a:spcPct val="125000"/>
-              </a:lnSpc>
-              <a:spcAft>
-                <a:spcPts val="500"/>
-              </a:spcAft>
-            </a:pPr>
-            <a:r>
-              <a:rPr sz="1300" b="0">
-                <a:solidFill>
-                  <a:srgbClr val="EDEFF4"/>
-                </a:solidFill>
-                <a:latin typeface="Consolas"/>
-              </a:rPr>
-              <a:t>[ja3]  curl 8.7.1 (macOS system, SecureTransport/LibreSSL)</a:t>
-            </a:r>
-          </a:p>
-          <a:p>
-            <a:pPr>
-              <a:lnSpc>
-                <a:spcPct val="125000"/>
-              </a:lnSpc>
-              <a:spcAft>
-                <a:spcPts val="500"/>
-              </a:spcAft>
-            </a:pPr>
-            <a:r>
-              <a:rPr sz="1300" b="0">
-                <a:solidFill>
-                  <a:srgbClr val="EDEFF4"/>
-                </a:solidFill>
-                <a:latin typeface="Consolas"/>
-              </a:rPr>
-              <a:t>[ja4]  curl 8.7.1 (macOS system, SecureTransport/LibreSSL)</a:t>
-            </a:r>
-          </a:p>
-          <a:p>
-            <a:pPr>
-              <a:lnSpc>
-                <a:spcPct val="125000"/>
-              </a:lnSpc>
-              <a:spcAft>
-                <a:spcPts val="500"/>
-              </a:spcAft>
-            </a:pPr>
-            <a:r>
-              <a:rPr sz="1300" b="0">
-                <a:solidFill>
-                  <a:srgbClr val="9AA3B5"/>
-                </a:solidFill>
-                <a:latin typeface="Consolas"/>
-              </a:rPr>
-              <a:t>[ja3s] Cloudflare edge (fronting example.com)</a:t>
-            </a:r>
-          </a:p>
-          <a:p>
-            <a:pPr>
-              <a:lnSpc>
-                <a:spcPct val="125000"/>
-              </a:lnSpc>
-              <a:spcAft>
-                <a:spcPts val="500"/>
-              </a:spcAft>
-            </a:pPr>
-            <a:r>
-              <a:rPr sz="1300" b="0">
-                <a:solidFill>
-                  <a:srgbClr val="EDEFF4"/>
-                </a:solidFill>
-                <a:latin typeface="Consolas"/>
-              </a:rPr>
-              <a:t>[ja3]  Google Chrome 151.0.7922.174 (headless)</a:t>
-            </a:r>
-          </a:p>
-          <a:p>
-            <a:pPr>
-              <a:lnSpc>
-                <a:spcPct val="125000"/>
-              </a:lnSpc>
-              <a:spcAft>
-                <a:spcPts val="500"/>
-              </a:spcAft>
-            </a:pPr>
-            <a:r>
-              <a:rPr sz="1300" b="0">
-                <a:solidFill>
-                  <a:srgbClr val="EDEFF4"/>
-                </a:solidFill>
-                <a:latin typeface="Consolas"/>
-              </a:rPr>
-              <a:t>[ja4]  Google Chrome 151.0.7922.174 (headless)</a:t>
-            </a:r>
-          </a:p>
-          <a:p>
-            <a:pPr>
-              <a:lnSpc>
-                <a:spcPct val="125000"/>
-              </a:lnSpc>
-              <a:spcAft>
-                <a:spcPts val="500"/>
-              </a:spcAft>
-            </a:pPr>
-            <a:r>
-              <a:rPr sz="1300" b="0">
-                <a:solidFill>
-                  <a:srgbClr val="69728A"/>
-                </a:solidFill>
-                <a:latin typeface="Consolas"/>
-              </a:rPr>
-              <a:t>... 15 entries total: 5 clients x (JA3 + JA4 + JA3S)</a:t>
+              <a:t>Runs offline in under a second, no network needed — this is what's checked BEFORE any real capture is trusted.</a:t>
             </a:r>
           </a:p>
         </p:txBody>
@@ -7971,7 +8406,398 @@
                 </a:solidFill>
                 <a:latin typeface="Consolas"/>
               </a:rPr>
-              <a:t>07 / 14</a:t>
+              <a:t>07 / 15</a:t>
+            </a:r>
+          </a:p>
+        </p:txBody>
+      </p:sp>
+      <p:sp>
+        <p:nvSpPr>
+          <p:cNvPr id="4" name="TextBox 3"/>
+          <p:cNvSpPr txBox="1"/>
+          <p:nvPr/>
+        </p:nvSpPr>
+        <p:spPr>
+          <a:xfrm>
+            <a:off x="685800" y="594360"/>
+            <a:ext cx="10058400" cy="365760"/>
+          </a:xfrm>
+          <a:prstGeom prst="rect">
+            <a:avLst/>
+          </a:prstGeom>
+          <a:noFill/>
+        </p:spPr>
+        <p:txBody>
+          <a:bodyPr wrap="square">
+            <a:spAutoFit/>
+          </a:bodyPr>
+          <a:lstStyle/>
+          <a:p>
+            <a:pPr algn="l">
+              <a:lnSpc>
+                <a:spcPct val="115000"/>
+              </a:lnSpc>
+            </a:pPr>
+            <a:r>
+              <a:rPr sz="1300" b="1">
+                <a:solidFill>
+                  <a:srgbClr val="E8A33D"/>
+                </a:solidFill>
+                <a:latin typeface="Consolas"/>
+              </a:rPr>
+              <a:t>REFERENCE DATABASE</a:t>
+            </a:r>
+          </a:p>
+        </p:txBody>
+      </p:sp>
+      <p:sp>
+        <p:nvSpPr>
+          <p:cNvPr id="5" name="TextBox 4"/>
+          <p:cNvSpPr txBox="1"/>
+          <p:nvPr/>
+        </p:nvSpPr>
+        <p:spPr>
+          <a:xfrm>
+            <a:off x="685800" y="1051560"/>
+            <a:ext cx="10789920" cy="1554480"/>
+          </a:xfrm>
+          <a:prstGeom prst="rect">
+            <a:avLst/>
+          </a:prstGeom>
+          <a:noFill/>
+        </p:spPr>
+        <p:txBody>
+          <a:bodyPr wrap="square">
+            <a:spAutoFit/>
+          </a:bodyPr>
+          <a:lstStyle/>
+          <a:p>
+            <a:pPr algn="l">
+              <a:lnSpc>
+                <a:spcPct val="105000"/>
+              </a:lnSpc>
+            </a:pPr>
+            <a:r>
+              <a:rPr sz="3200" b="1">
+                <a:solidFill>
+                  <a:srgbClr val="EDEFF4"/>
+                </a:solidFill>
+                <a:latin typeface="Calibri"/>
+              </a:rPr>
+              <a:t>A notebook of known fingerprints</a:t>
+            </a:r>
+          </a:p>
+        </p:txBody>
+      </p:sp>
+      <p:sp>
+        <p:nvSpPr>
+          <p:cNvPr id="6" name="TextBox 5"/>
+          <p:cNvSpPr txBox="1"/>
+          <p:nvPr/>
+        </p:nvSpPr>
+        <p:spPr>
+          <a:xfrm>
+            <a:off x="685800" y="2148840"/>
+            <a:ext cx="9875520" cy="1828800"/>
+          </a:xfrm>
+          <a:prstGeom prst="rect">
+            <a:avLst/>
+          </a:prstGeom>
+          <a:noFill/>
+        </p:spPr>
+        <p:txBody>
+          <a:bodyPr wrap="square">
+            <a:spAutoFit/>
+          </a:bodyPr>
+          <a:lstStyle/>
+          <a:p>
+            <a:pPr algn="l">
+              <a:lnSpc>
+                <a:spcPct val="135000"/>
+              </a:lnSpc>
+            </a:pPr>
+            <a:r>
+              <a:rPr sz="1700" b="0">
+                <a:solidFill>
+                  <a:srgbClr val="9AA3B5"/>
+                </a:solidFill>
+                <a:latin typeface="Calibri"/>
+              </a:rPr>
+              <a:t>Every entry was computed from a real, captured network connection — never typed by hand or copied from a public list.</a:t>
+            </a:r>
+          </a:p>
+        </p:txBody>
+      </p:sp>
+      <p:sp>
+        <p:nvSpPr>
+          <p:cNvPr id="7" name="Rounded Rectangle 6"/>
+          <p:cNvSpPr/>
+          <p:nvPr/>
+        </p:nvSpPr>
+        <p:spPr>
+          <a:xfrm>
+            <a:off x="685800" y="2926080"/>
+            <a:ext cx="10515600" cy="2651760"/>
+          </a:xfrm>
+          <a:prstGeom prst="roundRect">
+            <a:avLst>
+              <a:gd name="adj" fmla="val 5000"/>
+            </a:avLst>
+          </a:prstGeom>
+          <a:solidFill>
+            <a:srgbClr val="121826"/>
+          </a:solidFill>
+          <a:ln w="12700">
+            <a:solidFill>
+              <a:srgbClr val="232B3D"/>
+            </a:solidFill>
+          </a:ln>
+          <a:effectLst/>
+        </p:spPr>
+        <p:style>
+          <a:lnRef idx="1">
+            <a:schemeClr val="accent1"/>
+          </a:lnRef>
+          <a:fillRef idx="3">
+            <a:schemeClr val="accent1"/>
+          </a:fillRef>
+          <a:effectRef idx="2">
+            <a:schemeClr val="accent1"/>
+          </a:effectRef>
+          <a:fontRef idx="minor">
+            <a:schemeClr val="lt1"/>
+          </a:fontRef>
+        </p:style>
+        <p:txBody>
+          <a:bodyPr rtlCol="0" anchor="ctr" wrap="square" lIns="256032" rIns="256032" tIns="201168" bIns="201168"/>
+          <a:lstStyle/>
+          <a:p>
+            <a:pPr algn="ctr">
+              <a:lnSpc>
+                <a:spcPct val="125000"/>
+              </a:lnSpc>
+              <a:spcAft>
+                <a:spcPts val="500"/>
+              </a:spcAft>
+            </a:pPr>
+            <a:r>
+              <a:rPr sz="1200" b="0">
+                <a:solidFill>
+                  <a:srgbClr val="69728A"/>
+                </a:solidFill>
+                <a:latin typeface="Consolas"/>
+              </a:rPr>
+              <a:t>tls-fingerprint db list</a:t>
+            </a:r>
+          </a:p>
+          <a:p>
+            <a:pPr>
+              <a:lnSpc>
+                <a:spcPct val="125000"/>
+              </a:lnSpc>
+              <a:spcAft>
+                <a:spcPts val="500"/>
+              </a:spcAft>
+            </a:pPr>
+            <a:r>
+              <a:rPr sz="1300" b="0">
+                <a:solidFill>
+                  <a:srgbClr val="EDEFF4"/>
+                </a:solidFill>
+                <a:latin typeface="Consolas"/>
+              </a:rPr>
+              <a:t>[ja3]  curl 8.7.1 (macOS system, SecureTransport/LibreSSL)</a:t>
+            </a:r>
+          </a:p>
+          <a:p>
+            <a:pPr>
+              <a:lnSpc>
+                <a:spcPct val="125000"/>
+              </a:lnSpc>
+              <a:spcAft>
+                <a:spcPts val="500"/>
+              </a:spcAft>
+            </a:pPr>
+            <a:r>
+              <a:rPr sz="1300" b="0">
+                <a:solidFill>
+                  <a:srgbClr val="EDEFF4"/>
+                </a:solidFill>
+                <a:latin typeface="Consolas"/>
+              </a:rPr>
+              <a:t>[ja4]  curl 8.7.1 (macOS system, SecureTransport/LibreSSL)</a:t>
+            </a:r>
+          </a:p>
+          <a:p>
+            <a:pPr>
+              <a:lnSpc>
+                <a:spcPct val="125000"/>
+              </a:lnSpc>
+              <a:spcAft>
+                <a:spcPts val="500"/>
+              </a:spcAft>
+            </a:pPr>
+            <a:r>
+              <a:rPr sz="1300" b="0">
+                <a:solidFill>
+                  <a:srgbClr val="9AA3B5"/>
+                </a:solidFill>
+                <a:latin typeface="Consolas"/>
+              </a:rPr>
+              <a:t>[ja3s] Cloudflare edge (fronting example.com)</a:t>
+            </a:r>
+          </a:p>
+          <a:p>
+            <a:pPr>
+              <a:lnSpc>
+                <a:spcPct val="125000"/>
+              </a:lnSpc>
+              <a:spcAft>
+                <a:spcPts val="500"/>
+              </a:spcAft>
+            </a:pPr>
+            <a:r>
+              <a:rPr sz="1300" b="0">
+                <a:solidFill>
+                  <a:srgbClr val="EDEFF4"/>
+                </a:solidFill>
+                <a:latin typeface="Consolas"/>
+              </a:rPr>
+              <a:t>[ja3]  Google Chrome 151.0.7922.174 (headless)</a:t>
+            </a:r>
+          </a:p>
+          <a:p>
+            <a:pPr>
+              <a:lnSpc>
+                <a:spcPct val="125000"/>
+              </a:lnSpc>
+              <a:spcAft>
+                <a:spcPts val="500"/>
+              </a:spcAft>
+            </a:pPr>
+            <a:r>
+              <a:rPr sz="1300" b="0">
+                <a:solidFill>
+                  <a:srgbClr val="EDEFF4"/>
+                </a:solidFill>
+                <a:latin typeface="Consolas"/>
+              </a:rPr>
+              <a:t>[ja4]  Google Chrome 151.0.7922.174 (headless)</a:t>
+            </a:r>
+          </a:p>
+          <a:p>
+            <a:pPr>
+              <a:lnSpc>
+                <a:spcPct val="125000"/>
+              </a:lnSpc>
+              <a:spcAft>
+                <a:spcPts val="500"/>
+              </a:spcAft>
+            </a:pPr>
+            <a:r>
+              <a:rPr sz="1300" b="0">
+                <a:solidFill>
+                  <a:srgbClr val="69728A"/>
+                </a:solidFill>
+                <a:latin typeface="Consolas"/>
+              </a:rPr>
+              <a:t>... 15 entries total: 5 clients x (JA3 + JA4 + JA3S)</a:t>
+            </a:r>
+          </a:p>
+        </p:txBody>
+      </p:sp>
+    </p:spTree>
+  </p:cSld>
+  <p:clrMapOvr>
+    <a:masterClrMapping/>
+  </p:clrMapOvr>
+</p:sld>
+</file>
+
+<file path=ppt/slides/slide8.xml><?xml version="1.0" encoding="utf-8"?>
+<p:sld xmlns:a="http://schemas.openxmlformats.org/drawingml/2006/main" xmlns:p="http://schemas.openxmlformats.org/presentationml/2006/main" xmlns:r="http://schemas.openxmlformats.org/officeDocument/2006/relationships">
+  <p:cSld>
+    <p:spTree>
+      <p:nvGrpSpPr>
+        <p:cNvPr id="1" name=""/>
+        <p:cNvGrpSpPr/>
+        <p:nvPr/>
+      </p:nvGrpSpPr>
+      <p:grpSpPr/>
+      <p:sp>
+        <p:nvSpPr>
+          <p:cNvPr id="2" name="Rectangle 1"/>
+          <p:cNvSpPr/>
+          <p:nvPr/>
+        </p:nvSpPr>
+        <p:spPr>
+          <a:xfrm>
+            <a:off x="0" y="0"/>
+            <a:ext cx="12191695" cy="6858000"/>
+          </a:xfrm>
+          <a:prstGeom prst="rect">
+            <a:avLst/>
+          </a:prstGeom>
+          <a:solidFill>
+            <a:srgbClr val="0A0E17"/>
+          </a:solidFill>
+          <a:ln>
+            <a:noFill/>
+          </a:ln>
+          <a:effectLst/>
+        </p:spPr>
+        <p:style>
+          <a:lnRef idx="1">
+            <a:schemeClr val="accent1"/>
+          </a:lnRef>
+          <a:fillRef idx="3">
+            <a:schemeClr val="accent1"/>
+          </a:fillRef>
+          <a:effectRef idx="2">
+            <a:schemeClr val="accent1"/>
+          </a:effectRef>
+          <a:fontRef idx="minor">
+            <a:schemeClr val="lt1"/>
+          </a:fontRef>
+        </p:style>
+        <p:txBody>
+          <a:bodyPr rtlCol="0" anchor="ctr"/>
+          <a:lstStyle/>
+          <a:p>
+            <a:pPr algn="ctr"/>
+          </a:p>
+        </p:txBody>
+      </p:sp>
+      <p:sp>
+        <p:nvSpPr>
+          <p:cNvPr id="3" name="TextBox 2"/>
+          <p:cNvSpPr txBox="1"/>
+          <p:nvPr/>
+        </p:nvSpPr>
+        <p:spPr>
+          <a:xfrm>
+            <a:off x="685800" y="6355080"/>
+            <a:ext cx="1828800" cy="365760"/>
+          </a:xfrm>
+          <a:prstGeom prst="rect">
+            <a:avLst/>
+          </a:prstGeom>
+          <a:noFill/>
+        </p:spPr>
+        <p:txBody>
+          <a:bodyPr wrap="none">
+            <a:spAutoFit/>
+          </a:bodyPr>
+          <a:lstStyle/>
+          <a:p>
+            <a:r>
+              <a:rPr sz="1100">
+                <a:solidFill>
+                  <a:srgbClr val="69728A"/>
+                </a:solidFill>
+                <a:latin typeface="Consolas"/>
+              </a:rPr>
+              <a:t>08 / 15</a:t>
             </a:r>
           </a:p>
         </p:txBody>
@@ -8536,7 +9362,7 @@
 </p:sld>
 </file>
 
-<file path=ppt/slides/slide8.xml><?xml version="1.0" encoding="utf-8"?>
+<file path=ppt/slides/slide9.xml><?xml version="1.0" encoding="utf-8"?>
 <p:sld xmlns:a="http://schemas.openxmlformats.org/drawingml/2006/main" xmlns:p="http://schemas.openxmlformats.org/presentationml/2006/main" xmlns:r="http://schemas.openxmlformats.org/officeDocument/2006/relationships">
   <p:cSld>
     <p:spTree>
@@ -8619,7 +9445,7 @@
                 </a:solidFill>
                 <a:latin typeface="Consolas"/>
               </a:rPr>
-              <a:t>08 / 14</a:t>
+              <a:t>09 / 15</a:t>
             </a:r>
           </a:p>
         </p:txBody>
@@ -8903,501 +9729,6 @@
                 <a:latin typeface="Calibri"/>
               </a:rPr>
               <a:t>Modern Chrome deliberately randomizes ClientHello extension order per connection, specifically to weaken fingerprinting like this. We didn't just read that fact — we reproduced it live, re-running our own experiment.</a:t>
-            </a:r>
-          </a:p>
-        </p:txBody>
-      </p:sp>
-    </p:spTree>
-  </p:cSld>
-  <p:clrMapOvr>
-    <a:masterClrMapping/>
-  </p:clrMapOvr>
-</p:sld>
-</file>
-
-<file path=ppt/slides/slide9.xml><?xml version="1.0" encoding="utf-8"?>
-<p:sld xmlns:a="http://schemas.openxmlformats.org/drawingml/2006/main" xmlns:p="http://schemas.openxmlformats.org/presentationml/2006/main" xmlns:r="http://schemas.openxmlformats.org/officeDocument/2006/relationships">
-  <p:cSld>
-    <p:spTree>
-      <p:nvGrpSpPr>
-        <p:cNvPr id="1" name=""/>
-        <p:cNvGrpSpPr/>
-        <p:nvPr/>
-      </p:nvGrpSpPr>
-      <p:grpSpPr/>
-      <p:sp>
-        <p:nvSpPr>
-          <p:cNvPr id="2" name="Rectangle 1"/>
-          <p:cNvSpPr/>
-          <p:nvPr/>
-        </p:nvSpPr>
-        <p:spPr>
-          <a:xfrm>
-            <a:off x="0" y="0"/>
-            <a:ext cx="12191695" cy="6858000"/>
-          </a:xfrm>
-          <a:prstGeom prst="rect">
-            <a:avLst/>
-          </a:prstGeom>
-          <a:solidFill>
-            <a:srgbClr val="0A0E17"/>
-          </a:solidFill>
-          <a:ln>
-            <a:noFill/>
-          </a:ln>
-          <a:effectLst/>
-        </p:spPr>
-        <p:style>
-          <a:lnRef idx="1">
-            <a:schemeClr val="accent1"/>
-          </a:lnRef>
-          <a:fillRef idx="3">
-            <a:schemeClr val="accent1"/>
-          </a:fillRef>
-          <a:effectRef idx="2">
-            <a:schemeClr val="accent1"/>
-          </a:effectRef>
-          <a:fontRef idx="minor">
-            <a:schemeClr val="lt1"/>
-          </a:fontRef>
-        </p:style>
-        <p:txBody>
-          <a:bodyPr rtlCol="0" anchor="ctr"/>
-          <a:lstStyle/>
-          <a:p>
-            <a:pPr algn="ctr"/>
-          </a:p>
-        </p:txBody>
-      </p:sp>
-      <p:sp>
-        <p:nvSpPr>
-          <p:cNvPr id="3" name="TextBox 2"/>
-          <p:cNvSpPr txBox="1"/>
-          <p:nvPr/>
-        </p:nvSpPr>
-        <p:spPr>
-          <a:xfrm>
-            <a:off x="685800" y="6355080"/>
-            <a:ext cx="1828800" cy="365760"/>
-          </a:xfrm>
-          <a:prstGeom prst="rect">
-            <a:avLst/>
-          </a:prstGeom>
-          <a:noFill/>
-        </p:spPr>
-        <p:txBody>
-          <a:bodyPr wrap="none">
-            <a:spAutoFit/>
-          </a:bodyPr>
-          <a:lstStyle/>
-          <a:p>
-            <a:r>
-              <a:rPr sz="1100">
-                <a:solidFill>
-                  <a:srgbClr val="69728A"/>
-                </a:solidFill>
-                <a:latin typeface="Consolas"/>
-              </a:rPr>
-              <a:t>09 / 14</a:t>
-            </a:r>
-          </a:p>
-        </p:txBody>
-      </p:sp>
-      <p:sp>
-        <p:nvSpPr>
-          <p:cNvPr id="4" name="TextBox 3"/>
-          <p:cNvSpPr txBox="1"/>
-          <p:nvPr/>
-        </p:nvSpPr>
-        <p:spPr>
-          <a:xfrm>
-            <a:off x="685800" y="594360"/>
-            <a:ext cx="10058400" cy="365760"/>
-          </a:xfrm>
-          <a:prstGeom prst="rect">
-            <a:avLst/>
-          </a:prstGeom>
-          <a:noFill/>
-        </p:spPr>
-        <p:txBody>
-          <a:bodyPr wrap="square">
-            <a:spAutoFit/>
-          </a:bodyPr>
-          <a:lstStyle/>
-          <a:p>
-            <a:pPr algn="l">
-              <a:lnSpc>
-                <a:spcPct val="115000"/>
-              </a:lnSpc>
-            </a:pPr>
-            <a:r>
-              <a:rPr sz="1300" b="1">
-                <a:solidFill>
-                  <a:srgbClr val="E8A33D"/>
-                </a:solidFill>
-                <a:latin typeface="Consolas"/>
-              </a:rPr>
-              <a:t>BUILT IN RESPONSE — JA4</a:t>
-            </a:r>
-          </a:p>
-        </p:txBody>
-      </p:sp>
-      <p:sp>
-        <p:nvSpPr>
-          <p:cNvPr id="5" name="TextBox 4"/>
-          <p:cNvSpPr txBox="1"/>
-          <p:nvPr/>
-        </p:nvSpPr>
-        <p:spPr>
-          <a:xfrm>
-            <a:off x="685800" y="1051560"/>
-            <a:ext cx="10789920" cy="1554480"/>
-          </a:xfrm>
-          <a:prstGeom prst="rect">
-            <a:avLst/>
-          </a:prstGeom>
-          <a:noFill/>
-        </p:spPr>
-        <p:txBody>
-          <a:bodyPr wrap="square">
-            <a:spAutoFit/>
-          </a:bodyPr>
-          <a:lstStyle/>
-          <a:p>
-            <a:pPr algn="l">
-              <a:lnSpc>
-                <a:spcPct val="105000"/>
-              </a:lnSpc>
-            </a:pPr>
-            <a:r>
-              <a:rPr sz="2700" b="1">
-                <a:solidFill>
-                  <a:srgbClr val="EDEFF4"/>
-                </a:solidFill>
-                <a:latin typeface="Calibri"/>
-              </a:rPr>
-              <a:t>JA4: a newer fingerprint that isolates what actually changed</a:t>
-            </a:r>
-          </a:p>
-        </p:txBody>
-      </p:sp>
-      <p:sp>
-        <p:nvSpPr>
-          <p:cNvPr id="6" name="Rounded Rectangle 5"/>
-          <p:cNvSpPr/>
-          <p:nvPr/>
-        </p:nvSpPr>
-        <p:spPr>
-          <a:xfrm>
-            <a:off x="685800" y="2377440"/>
-            <a:ext cx="5120640" cy="2651760"/>
-          </a:xfrm>
-          <a:prstGeom prst="roundRect">
-            <a:avLst>
-              <a:gd name="adj" fmla="val 5000"/>
-            </a:avLst>
-          </a:prstGeom>
-          <a:solidFill>
-            <a:srgbClr val="121826"/>
-          </a:solidFill>
-          <a:ln w="12700">
-            <a:solidFill>
-              <a:srgbClr val="232B3D"/>
-            </a:solidFill>
-          </a:ln>
-          <a:effectLst/>
-        </p:spPr>
-        <p:style>
-          <a:lnRef idx="1">
-            <a:schemeClr val="accent1"/>
-          </a:lnRef>
-          <a:fillRef idx="3">
-            <a:schemeClr val="accent1"/>
-          </a:fillRef>
-          <a:effectRef idx="2">
-            <a:schemeClr val="accent1"/>
-          </a:effectRef>
-          <a:fontRef idx="minor">
-            <a:schemeClr val="lt1"/>
-          </a:fontRef>
-        </p:style>
-        <p:txBody>
-          <a:bodyPr rtlCol="0" anchor="ctr" wrap="square" lIns="256032" rIns="256032" tIns="201168" bIns="201168"/>
-          <a:lstStyle/>
-          <a:p>
-            <a:pPr algn="ctr">
-              <a:lnSpc>
-                <a:spcPct val="125000"/>
-              </a:lnSpc>
-              <a:spcAft>
-                <a:spcPts val="500"/>
-              </a:spcAft>
-            </a:pPr>
-            <a:r>
-              <a:rPr sz="1200" b="0">
-                <a:solidFill>
-                  <a:srgbClr val="69728A"/>
-                </a:solidFill>
-                <a:latin typeface="Consolas"/>
-              </a:rPr>
-              <a:t>Cipher segment (JA4)</a:t>
-            </a:r>
-          </a:p>
-          <a:p>
-            <a:pPr>
-              <a:lnSpc>
-                <a:spcPct val="125000"/>
-              </a:lnSpc>
-              <a:spcAft>
-                <a:spcPts val="500"/>
-              </a:spcAft>
-            </a:pPr>
-            <a:r>
-              <a:rPr sz="1500" b="1">
-                <a:solidFill>
-                  <a:srgbClr val="49C79A"/>
-                </a:solidFill>
-                <a:latin typeface="Consolas"/>
-              </a:rPr>
-              <a:t>8daaf6152771</a:t>
-            </a:r>
-          </a:p>
-          <a:p>
-            <a:pPr>
-              <a:lnSpc>
-                <a:spcPct val="125000"/>
-              </a:lnSpc>
-              <a:spcAft>
-                <a:spcPts val="500"/>
-              </a:spcAft>
-            </a:pPr>
-            <a:r>
-              <a:rPr sz="1500" b="1">
-                <a:solidFill>
-                  <a:srgbClr val="49C79A"/>
-                </a:solidFill>
-                <a:latin typeface="Consolas"/>
-              </a:rPr>
-              <a:t>8daaf6152771</a:t>
-            </a:r>
-          </a:p>
-          <a:p>
-            <a:pPr>
-              <a:lnSpc>
-                <a:spcPct val="125000"/>
-              </a:lnSpc>
-              <a:spcAft>
-                <a:spcPts val="500"/>
-              </a:spcAft>
-            </a:pPr>
-            <a:r>
-              <a:rPr sz="1200" b="0">
-                <a:solidFill>
-                  <a:srgbClr val="69728A"/>
-                </a:solidFill>
-                <a:latin typeface="Calibri"/>
-              </a:rPr>
-              <a:t>Identical, both runs — JA4 sorts the</a:t>
-            </a:r>
-            <a:br/>
-            <a:r>
-              <a:rPr sz="1200" b="0">
-                <a:solidFill>
-                  <a:srgbClr val="69728A"/>
-                </a:solidFill>
-                <a:latin typeface="Calibri"/>
-              </a:rPr>
-              <a:t>cipher list before hashing, so pure</a:t>
-            </a:r>
-            <a:br/>
-            <a:r>
-              <a:rPr sz="1200" b="0">
-                <a:solidFill>
-                  <a:srgbClr val="69728A"/>
-                </a:solidFill>
-                <a:latin typeface="Calibri"/>
-              </a:rPr>
-              <a:t>reordering can't change it.</a:t>
-            </a:r>
-          </a:p>
-        </p:txBody>
-      </p:sp>
-      <p:sp>
-        <p:nvSpPr>
-          <p:cNvPr id="7" name="Rounded Rectangle 6"/>
-          <p:cNvSpPr/>
-          <p:nvPr/>
-        </p:nvSpPr>
-        <p:spPr>
-          <a:xfrm>
-            <a:off x="6080760" y="2377440"/>
-            <a:ext cx="5120640" cy="2651760"/>
-          </a:xfrm>
-          <a:prstGeom prst="roundRect">
-            <a:avLst>
-              <a:gd name="adj" fmla="val 5000"/>
-            </a:avLst>
-          </a:prstGeom>
-          <a:solidFill>
-            <a:srgbClr val="121826"/>
-          </a:solidFill>
-          <a:ln w="12700">
-            <a:solidFill>
-              <a:srgbClr val="232B3D"/>
-            </a:solidFill>
-          </a:ln>
-          <a:effectLst/>
-        </p:spPr>
-        <p:style>
-          <a:lnRef idx="1">
-            <a:schemeClr val="accent1"/>
-          </a:lnRef>
-          <a:fillRef idx="3">
-            <a:schemeClr val="accent1"/>
-          </a:fillRef>
-          <a:effectRef idx="2">
-            <a:schemeClr val="accent1"/>
-          </a:effectRef>
-          <a:fontRef idx="minor">
-            <a:schemeClr val="lt1"/>
-          </a:fontRef>
-        </p:style>
-        <p:txBody>
-          <a:bodyPr rtlCol="0" anchor="ctr" wrap="square" lIns="256032" rIns="256032" tIns="201168" bIns="201168"/>
-          <a:lstStyle/>
-          <a:p>
-            <a:pPr algn="ctr">
-              <a:lnSpc>
-                <a:spcPct val="125000"/>
-              </a:lnSpc>
-              <a:spcAft>
-                <a:spcPts val="500"/>
-              </a:spcAft>
-            </a:pPr>
-            <a:r>
-              <a:rPr sz="1200" b="0">
-                <a:solidFill>
-                  <a:srgbClr val="69728A"/>
-                </a:solidFill>
-                <a:latin typeface="Consolas"/>
-              </a:rPr>
-              <a:t>Extension segment (JA4)</a:t>
-            </a:r>
-          </a:p>
-          <a:p>
-            <a:pPr>
-              <a:lnSpc>
-                <a:spcPct val="125000"/>
-              </a:lnSpc>
-              <a:spcAft>
-                <a:spcPts val="500"/>
-              </a:spcAft>
-            </a:pPr>
-            <a:r>
-              <a:rPr sz="1300" b="0">
-                <a:solidFill>
-                  <a:srgbClr val="EDEFF4"/>
-                </a:solidFill>
-                <a:latin typeface="Consolas"/>
-              </a:rPr>
-              <a:t>806a8c22fdea   (16 extensions)</a:t>
-            </a:r>
-          </a:p>
-          <a:p>
-            <a:pPr>
-              <a:lnSpc>
-                <a:spcPct val="125000"/>
-              </a:lnSpc>
-              <a:spcAft>
-                <a:spcPts val="500"/>
-              </a:spcAft>
-            </a:pPr>
-            <a:r>
-              <a:rPr sz="1300" b="1">
-                <a:solidFill>
-                  <a:srgbClr val="F16A54"/>
-                </a:solidFill>
-                <a:latin typeface="Consolas"/>
-              </a:rPr>
-              <a:t>cb7bf5808d99   (17 extensions)</a:t>
-            </a:r>
-          </a:p>
-          <a:p>
-            <a:pPr>
-              <a:lnSpc>
-                <a:spcPct val="125000"/>
-              </a:lnSpc>
-              <a:spcAft>
-                <a:spcPts val="500"/>
-              </a:spcAft>
-            </a:pPr>
-            <a:r>
-              <a:rPr sz="1200" b="0">
-                <a:solidFill>
-                  <a:srgbClr val="69728A"/>
-                </a:solidFill>
-                <a:latin typeface="Calibri"/>
-              </a:rPr>
-              <a:t>Genuinely different — Chrome sent one</a:t>
-            </a:r>
-            <a:br/>
-            <a:r>
-              <a:rPr sz="1200" b="0">
-                <a:solidFill>
-                  <a:srgbClr val="69728A"/>
-                </a:solidFill>
-                <a:latin typeface="Calibri"/>
-              </a:rPr>
-              <a:t>extra extension the 2nd time. JA4 reports</a:t>
-            </a:r>
-            <a:br/>
-            <a:r>
-              <a:rPr sz="1200" b="0">
-                <a:solidFill>
-                  <a:srgbClr val="69728A"/>
-                </a:solidFill>
-                <a:latin typeface="Calibri"/>
-              </a:rPr>
-              <a:t>that honestly instead of hiding it.</a:t>
-            </a:r>
-          </a:p>
-        </p:txBody>
-      </p:sp>
-      <p:sp>
-        <p:nvSpPr>
-          <p:cNvPr id="8" name="TextBox 7"/>
-          <p:cNvSpPr txBox="1"/>
-          <p:nvPr/>
-        </p:nvSpPr>
-        <p:spPr>
-          <a:xfrm>
-            <a:off x="685800" y="5257800"/>
-            <a:ext cx="9601200" cy="1828800"/>
-          </a:xfrm>
-          <a:prstGeom prst="rect">
-            <a:avLst/>
-          </a:prstGeom>
-          <a:noFill/>
-        </p:spPr>
-        <p:txBody>
-          <a:bodyPr wrap="square">
-            <a:spAutoFit/>
-          </a:bodyPr>
-          <a:lstStyle/>
-          <a:p>
-            <a:pPr algn="l">
-              <a:lnSpc>
-                <a:spcPct val="135000"/>
-              </a:lnSpc>
-            </a:pPr>
-            <a:r>
-              <a:rPr sz="1300" b="0">
-                <a:solidFill>
-                  <a:srgbClr val="69728A"/>
-                </a:solidFill>
-                <a:latin typeface="Calibri"/>
-              </a:rPr>
-              <a:t>Validated against the official FoxIO spec's own published worked examples — not just checked against itself.</a:t>
             </a:r>
           </a:p>
         </p:txBody>

--- a/TLS_Fingerprinting_Presentation.pptx
+++ b/TLS_Fingerprinting_Presentation.pptx
@@ -3448,7 +3448,7 @@
                 </a:solidFill>
                 <a:latin typeface="Calibri"/>
               </a:rPr>
-              <a:t>measured fingerprints</a:t>
+              <a:t>database entries</a:t>
             </a:r>
           </a:p>
         </p:txBody>
@@ -3943,7 +3943,7 @@
                 </a:solidFill>
                 <a:latin typeface="Consolas"/>
               </a:rPr>
-              <a:t>cb7bf5808d99   (17 extensions)</a:t>
+              <a:t>541cd5a3d78e   (17 extensions)</a:t>
             </a:r>
           </a:p>
           <a:p>
@@ -5503,7 +5503,7 @@
                 </a:solidFill>
                 <a:latin typeface="Calibri"/>
               </a:rPr>
-              <a:t>GREASE and reordering actively fight back — Chrome randomizes its own hello on purpose (slide 8).</a:t>
+              <a:t>GREASE and reordering actively fight back — Chrome randomizes its own hello on purpose (slide 9).</a:t>
             </a:r>
           </a:p>
         </p:txBody>
@@ -9689,7 +9689,7 @@
                 </a:solidFill>
                 <a:latin typeface="Consolas"/>
               </a:rPr>
-              <a:t>825cf36b22c9ab3e25a5bc094aecde86</a:t>
+              <a:t>a00e551d2f4af85ede1156537ebf095a</a:t>
             </a:r>
           </a:p>
         </p:txBody>

--- a/TLS_Fingerprinting_Presentation.pptx
+++ b/TLS_Fingerprinting_Presentation.pptx
@@ -8076,7 +8076,7 @@
                 </a:solidFill>
                 <a:latin typeface="Calibri"/>
               </a:rPr>
-              <a:t>56 automated tests — what they actually check</a:t>
+              <a:t>61 automated tests — what they actually check</a:t>
             </a:r>
           </a:p>
         </p:txBody>
